--- a/docs/design/servex-deck-design.pptx
+++ b/docs/design/servex-deck-design.pptx
@@ -9,9 +9,14 @@
     <p:sldId id="257" r:id="rId3"/>
     <p:sldId id="258" r:id="rId4"/>
     <p:sldId id="259" r:id="rId5"/>
+    <p:sldId id="260" r:id="rId6"/>
+    <p:sldId id="261" r:id="rId7"/>
+    <p:sldId id="262" r:id="rId8"/>
+    <p:sldId id="263" r:id="rId9"/>
+    <p:sldId id="264" r:id="rId10"/>
   </p:sldIdLst>
   <p:notesMasterIdLst>
-    <p:notesMasterId r:id="rId6"/>
+    <p:notesMasterId r:id="rId11"/>
   </p:notesMasterIdLst>
   <p:sldSz cx="12191695" cy="6858000"/>
   <p:notesSz cx="6858000" cy="12191695"/>
@@ -793,6 +798,446 @@
             <a:fld id="{F7021451-1387-4CA6-816F-3879F97B5CBC}" type="slidenum">
               <a:rPr lang="en-US"/>
               <a:t>4</a:t>
+            </a:fld>
+            <a:endParaRPr lang="en-US"/>
+          </a:p>
+        </p:txBody>
+      </p:sp>
+    </p:spTree>
+    <p:extLst>
+      <p:ext uri="{BB962C8B-B14F-4D97-AF65-F5344CB8AC3E}">
+        <p14:creationId xmlns:p14="http://schemas.microsoft.com/office/powerpoint/2010/main" val="1024086991"/>
+      </p:ext>
+    </p:extLst>
+  </p:cSld>
+  <p:clrMapOvr>
+    <a:masterClrMapping/>
+  </p:clrMapOvr>
+</p:notes>
+</file>
+
+<file path=ppt/notesSlides/notesSlide5.xml><?xml version="1.0" encoding="utf-8"?>
+<p:notes xmlns:a="http://schemas.openxmlformats.org/drawingml/2006/main" xmlns:r="http://schemas.openxmlformats.org/officeDocument/2006/relationships" xmlns:p="http://schemas.openxmlformats.org/presentationml/2006/main">
+  <p:cSld>
+    <p:spTree>
+      <p:nvGrpSpPr>
+        <p:cNvPr id="1" name=""/>
+        <p:cNvGrpSpPr/>
+        <p:nvPr/>
+      </p:nvGrpSpPr>
+      <p:grpSpPr>
+        <a:xfrm>
+          <a:off x="0" y="0"/>
+          <a:ext cx="0" cy="0"/>
+          <a:chOff x="0" y="0"/>
+          <a:chExt cx="0" cy="0"/>
+        </a:xfrm>
+      </p:grpSpPr>
+      <p:sp>
+        <p:nvSpPr>
+          <p:cNvPr id="2" name="Slide Image Placeholder 1"/>
+          <p:cNvSpPr>
+            <a:spLocks noGrp="1" noRot="1" noChangeAspect="1"/>
+          </p:cNvSpPr>
+          <p:nvPr>
+            <p:ph type="sldImg"/>
+          </p:nvPr>
+        </p:nvSpPr>
+        <p:spPr/>
+      </p:sp>
+      <p:sp>
+        <p:nvSpPr>
+          <p:cNvPr id="3" name="Notes Placeholder 2"/>
+          <p:cNvSpPr>
+            <a:spLocks noGrp="1"/>
+          </p:cNvSpPr>
+          <p:nvPr>
+            <p:ph type="body" idx="1"/>
+          </p:nvPr>
+        </p:nvSpPr>
+        <p:spPr/>
+        <p:txBody>
+          <a:bodyPr/>
+          <a:lstStyle/>
+          <a:p>
+            <a:r>
+              <a:rPr lang="en-US" dirty="0"/>
+              <a:t/>
+            </a:r>
+            <a:endParaRPr lang="en-US" dirty="0"/>
+          </a:p>
+        </p:txBody>
+      </p:sp>
+      <p:sp>
+        <p:nvSpPr>
+          <p:cNvPr id="4" name="Slide Number Placeholder 3"/>
+          <p:cNvSpPr>
+            <a:spLocks noGrp="1"/>
+          </p:cNvSpPr>
+          <p:nvPr>
+            <p:ph type="sldNum" sz="quarter" idx="10"/>
+          </p:nvPr>
+        </p:nvSpPr>
+        <p:spPr/>
+        <p:txBody>
+          <a:bodyPr/>
+          <a:lstStyle/>
+          <a:p>
+            <a:fld id="{F7021451-1387-4CA6-816F-3879F97B5CBC}" type="slidenum">
+              <a:rPr lang="en-US"/>
+              <a:t>5</a:t>
+            </a:fld>
+            <a:endParaRPr lang="en-US"/>
+          </a:p>
+        </p:txBody>
+      </p:sp>
+    </p:spTree>
+    <p:extLst>
+      <p:ext uri="{BB962C8B-B14F-4D97-AF65-F5344CB8AC3E}">
+        <p14:creationId xmlns:p14="http://schemas.microsoft.com/office/powerpoint/2010/main" val="1024086991"/>
+      </p:ext>
+    </p:extLst>
+  </p:cSld>
+  <p:clrMapOvr>
+    <a:masterClrMapping/>
+  </p:clrMapOvr>
+</p:notes>
+</file>
+
+<file path=ppt/notesSlides/notesSlide6.xml><?xml version="1.0" encoding="utf-8"?>
+<p:notes xmlns:a="http://schemas.openxmlformats.org/drawingml/2006/main" xmlns:r="http://schemas.openxmlformats.org/officeDocument/2006/relationships" xmlns:p="http://schemas.openxmlformats.org/presentationml/2006/main">
+  <p:cSld>
+    <p:spTree>
+      <p:nvGrpSpPr>
+        <p:cNvPr id="1" name=""/>
+        <p:cNvGrpSpPr/>
+        <p:nvPr/>
+      </p:nvGrpSpPr>
+      <p:grpSpPr>
+        <a:xfrm>
+          <a:off x="0" y="0"/>
+          <a:ext cx="0" cy="0"/>
+          <a:chOff x="0" y="0"/>
+          <a:chExt cx="0" cy="0"/>
+        </a:xfrm>
+      </p:grpSpPr>
+      <p:sp>
+        <p:nvSpPr>
+          <p:cNvPr id="2" name="Slide Image Placeholder 1"/>
+          <p:cNvSpPr>
+            <a:spLocks noGrp="1" noRot="1" noChangeAspect="1"/>
+          </p:cNvSpPr>
+          <p:nvPr>
+            <p:ph type="sldImg"/>
+          </p:nvPr>
+        </p:nvSpPr>
+        <p:spPr/>
+      </p:sp>
+      <p:sp>
+        <p:nvSpPr>
+          <p:cNvPr id="3" name="Notes Placeholder 2"/>
+          <p:cNvSpPr>
+            <a:spLocks noGrp="1"/>
+          </p:cNvSpPr>
+          <p:nvPr>
+            <p:ph type="body" idx="1"/>
+          </p:nvPr>
+        </p:nvSpPr>
+        <p:spPr/>
+        <p:txBody>
+          <a:bodyPr/>
+          <a:lstStyle/>
+          <a:p>
+            <a:r>
+              <a:rPr lang="en-US" dirty="0"/>
+              <a:t/>
+            </a:r>
+            <a:endParaRPr lang="en-US" dirty="0"/>
+          </a:p>
+        </p:txBody>
+      </p:sp>
+      <p:sp>
+        <p:nvSpPr>
+          <p:cNvPr id="4" name="Slide Number Placeholder 3"/>
+          <p:cNvSpPr>
+            <a:spLocks noGrp="1"/>
+          </p:cNvSpPr>
+          <p:nvPr>
+            <p:ph type="sldNum" sz="quarter" idx="10"/>
+          </p:nvPr>
+        </p:nvSpPr>
+        <p:spPr/>
+        <p:txBody>
+          <a:bodyPr/>
+          <a:lstStyle/>
+          <a:p>
+            <a:fld id="{F7021451-1387-4CA6-816F-3879F97B5CBC}" type="slidenum">
+              <a:rPr lang="en-US"/>
+              <a:t>6</a:t>
+            </a:fld>
+            <a:endParaRPr lang="en-US"/>
+          </a:p>
+        </p:txBody>
+      </p:sp>
+    </p:spTree>
+    <p:extLst>
+      <p:ext uri="{BB962C8B-B14F-4D97-AF65-F5344CB8AC3E}">
+        <p14:creationId xmlns:p14="http://schemas.microsoft.com/office/powerpoint/2010/main" val="1024086991"/>
+      </p:ext>
+    </p:extLst>
+  </p:cSld>
+  <p:clrMapOvr>
+    <a:masterClrMapping/>
+  </p:clrMapOvr>
+</p:notes>
+</file>
+
+<file path=ppt/notesSlides/notesSlide7.xml><?xml version="1.0" encoding="utf-8"?>
+<p:notes xmlns:a="http://schemas.openxmlformats.org/drawingml/2006/main" xmlns:r="http://schemas.openxmlformats.org/officeDocument/2006/relationships" xmlns:p="http://schemas.openxmlformats.org/presentationml/2006/main">
+  <p:cSld>
+    <p:spTree>
+      <p:nvGrpSpPr>
+        <p:cNvPr id="1" name=""/>
+        <p:cNvGrpSpPr/>
+        <p:nvPr/>
+      </p:nvGrpSpPr>
+      <p:grpSpPr>
+        <a:xfrm>
+          <a:off x="0" y="0"/>
+          <a:ext cx="0" cy="0"/>
+          <a:chOff x="0" y="0"/>
+          <a:chExt cx="0" cy="0"/>
+        </a:xfrm>
+      </p:grpSpPr>
+      <p:sp>
+        <p:nvSpPr>
+          <p:cNvPr id="2" name="Slide Image Placeholder 1"/>
+          <p:cNvSpPr>
+            <a:spLocks noGrp="1" noRot="1" noChangeAspect="1"/>
+          </p:cNvSpPr>
+          <p:nvPr>
+            <p:ph type="sldImg"/>
+          </p:nvPr>
+        </p:nvSpPr>
+        <p:spPr/>
+      </p:sp>
+      <p:sp>
+        <p:nvSpPr>
+          <p:cNvPr id="3" name="Notes Placeholder 2"/>
+          <p:cNvSpPr>
+            <a:spLocks noGrp="1"/>
+          </p:cNvSpPr>
+          <p:nvPr>
+            <p:ph type="body" idx="1"/>
+          </p:nvPr>
+        </p:nvSpPr>
+        <p:spPr/>
+        <p:txBody>
+          <a:bodyPr/>
+          <a:lstStyle/>
+          <a:p>
+            <a:r>
+              <a:rPr lang="en-US" dirty="0"/>
+              <a:t/>
+            </a:r>
+            <a:endParaRPr lang="en-US" dirty="0"/>
+          </a:p>
+        </p:txBody>
+      </p:sp>
+      <p:sp>
+        <p:nvSpPr>
+          <p:cNvPr id="4" name="Slide Number Placeholder 3"/>
+          <p:cNvSpPr>
+            <a:spLocks noGrp="1"/>
+          </p:cNvSpPr>
+          <p:nvPr>
+            <p:ph type="sldNum" sz="quarter" idx="10"/>
+          </p:nvPr>
+        </p:nvSpPr>
+        <p:spPr/>
+        <p:txBody>
+          <a:bodyPr/>
+          <a:lstStyle/>
+          <a:p>
+            <a:fld id="{F7021451-1387-4CA6-816F-3879F97B5CBC}" type="slidenum">
+              <a:rPr lang="en-US"/>
+              <a:t>7</a:t>
+            </a:fld>
+            <a:endParaRPr lang="en-US"/>
+          </a:p>
+        </p:txBody>
+      </p:sp>
+    </p:spTree>
+    <p:extLst>
+      <p:ext uri="{BB962C8B-B14F-4D97-AF65-F5344CB8AC3E}">
+        <p14:creationId xmlns:p14="http://schemas.microsoft.com/office/powerpoint/2010/main" val="1024086991"/>
+      </p:ext>
+    </p:extLst>
+  </p:cSld>
+  <p:clrMapOvr>
+    <a:masterClrMapping/>
+  </p:clrMapOvr>
+</p:notes>
+</file>
+
+<file path=ppt/notesSlides/notesSlide8.xml><?xml version="1.0" encoding="utf-8"?>
+<p:notes xmlns:a="http://schemas.openxmlformats.org/drawingml/2006/main" xmlns:r="http://schemas.openxmlformats.org/officeDocument/2006/relationships" xmlns:p="http://schemas.openxmlformats.org/presentationml/2006/main">
+  <p:cSld>
+    <p:spTree>
+      <p:nvGrpSpPr>
+        <p:cNvPr id="1" name=""/>
+        <p:cNvGrpSpPr/>
+        <p:nvPr/>
+      </p:nvGrpSpPr>
+      <p:grpSpPr>
+        <a:xfrm>
+          <a:off x="0" y="0"/>
+          <a:ext cx="0" cy="0"/>
+          <a:chOff x="0" y="0"/>
+          <a:chExt cx="0" cy="0"/>
+        </a:xfrm>
+      </p:grpSpPr>
+      <p:sp>
+        <p:nvSpPr>
+          <p:cNvPr id="2" name="Slide Image Placeholder 1"/>
+          <p:cNvSpPr>
+            <a:spLocks noGrp="1" noRot="1" noChangeAspect="1"/>
+          </p:cNvSpPr>
+          <p:nvPr>
+            <p:ph type="sldImg"/>
+          </p:nvPr>
+        </p:nvSpPr>
+        <p:spPr/>
+      </p:sp>
+      <p:sp>
+        <p:nvSpPr>
+          <p:cNvPr id="3" name="Notes Placeholder 2"/>
+          <p:cNvSpPr>
+            <a:spLocks noGrp="1"/>
+          </p:cNvSpPr>
+          <p:nvPr>
+            <p:ph type="body" idx="1"/>
+          </p:nvPr>
+        </p:nvSpPr>
+        <p:spPr/>
+        <p:txBody>
+          <a:bodyPr/>
+          <a:lstStyle/>
+          <a:p>
+            <a:r>
+              <a:rPr lang="en-US" dirty="0"/>
+              <a:t/>
+            </a:r>
+            <a:endParaRPr lang="en-US" dirty="0"/>
+          </a:p>
+        </p:txBody>
+      </p:sp>
+      <p:sp>
+        <p:nvSpPr>
+          <p:cNvPr id="4" name="Slide Number Placeholder 3"/>
+          <p:cNvSpPr>
+            <a:spLocks noGrp="1"/>
+          </p:cNvSpPr>
+          <p:nvPr>
+            <p:ph type="sldNum" sz="quarter" idx="10"/>
+          </p:nvPr>
+        </p:nvSpPr>
+        <p:spPr/>
+        <p:txBody>
+          <a:bodyPr/>
+          <a:lstStyle/>
+          <a:p>
+            <a:fld id="{F7021451-1387-4CA6-816F-3879F97B5CBC}" type="slidenum">
+              <a:rPr lang="en-US"/>
+              <a:t>8</a:t>
+            </a:fld>
+            <a:endParaRPr lang="en-US"/>
+          </a:p>
+        </p:txBody>
+      </p:sp>
+    </p:spTree>
+    <p:extLst>
+      <p:ext uri="{BB962C8B-B14F-4D97-AF65-F5344CB8AC3E}">
+        <p14:creationId xmlns:p14="http://schemas.microsoft.com/office/powerpoint/2010/main" val="1024086991"/>
+      </p:ext>
+    </p:extLst>
+  </p:cSld>
+  <p:clrMapOvr>
+    <a:masterClrMapping/>
+  </p:clrMapOvr>
+</p:notes>
+</file>
+
+<file path=ppt/notesSlides/notesSlide9.xml><?xml version="1.0" encoding="utf-8"?>
+<p:notes xmlns:a="http://schemas.openxmlformats.org/drawingml/2006/main" xmlns:r="http://schemas.openxmlformats.org/officeDocument/2006/relationships" xmlns:p="http://schemas.openxmlformats.org/presentationml/2006/main">
+  <p:cSld>
+    <p:spTree>
+      <p:nvGrpSpPr>
+        <p:cNvPr id="1" name=""/>
+        <p:cNvGrpSpPr/>
+        <p:nvPr/>
+      </p:nvGrpSpPr>
+      <p:grpSpPr>
+        <a:xfrm>
+          <a:off x="0" y="0"/>
+          <a:ext cx="0" cy="0"/>
+          <a:chOff x="0" y="0"/>
+          <a:chExt cx="0" cy="0"/>
+        </a:xfrm>
+      </p:grpSpPr>
+      <p:sp>
+        <p:nvSpPr>
+          <p:cNvPr id="2" name="Slide Image Placeholder 1"/>
+          <p:cNvSpPr>
+            <a:spLocks noGrp="1" noRot="1" noChangeAspect="1"/>
+          </p:cNvSpPr>
+          <p:nvPr>
+            <p:ph type="sldImg"/>
+          </p:nvPr>
+        </p:nvSpPr>
+        <p:spPr/>
+      </p:sp>
+      <p:sp>
+        <p:nvSpPr>
+          <p:cNvPr id="3" name="Notes Placeholder 2"/>
+          <p:cNvSpPr>
+            <a:spLocks noGrp="1"/>
+          </p:cNvSpPr>
+          <p:nvPr>
+            <p:ph type="body" idx="1"/>
+          </p:nvPr>
+        </p:nvSpPr>
+        <p:spPr/>
+        <p:txBody>
+          <a:bodyPr/>
+          <a:lstStyle/>
+          <a:p>
+            <a:r>
+              <a:rPr lang="en-US" dirty="0"/>
+              <a:t/>
+            </a:r>
+            <a:endParaRPr lang="en-US" dirty="0"/>
+          </a:p>
+        </p:txBody>
+      </p:sp>
+      <p:sp>
+        <p:nvSpPr>
+          <p:cNvPr id="4" name="Slide Number Placeholder 3"/>
+          <p:cNvSpPr>
+            <a:spLocks noGrp="1"/>
+          </p:cNvSpPr>
+          <p:nvPr>
+            <p:ph type="sldNum" sz="quarter" idx="10"/>
+          </p:nvPr>
+        </p:nvSpPr>
+        <p:spPr/>
+        <p:txBody>
+          <a:bodyPr/>
+          <a:lstStyle/>
+          <a:p>
+            <a:fld id="{F7021451-1387-4CA6-816F-3879F97B5CBC}" type="slidenum">
+              <a:rPr lang="en-US"/>
+              <a:t>9</a:t>
             </a:fld>
             <a:endParaRPr lang="en-US"/>
           </a:p>
@@ -8733,6 +9178,7206 @@
 </p:sld>
 </file>
 
+<file path=ppt/slides/slide5.xml><?xml version="1.0" encoding="utf-8"?>
+<p:sld xmlns:a="http://schemas.openxmlformats.org/drawingml/2006/main" xmlns:r="http://schemas.openxmlformats.org/officeDocument/2006/relationships" xmlns:p="http://schemas.openxmlformats.org/presentationml/2006/main">
+  <p:cSld name="Slide 5">
+    <p:bg>
+      <p:bgPr>
+        <a:solidFill>
+          <a:srgbClr val="06070A"/>
+        </a:solidFill>
+      </p:bgPr>
+    </p:bg>
+    <p:spTree>
+      <p:nvGrpSpPr>
+        <p:cNvPr id="1" name=""/>
+        <p:cNvGrpSpPr/>
+        <p:nvPr/>
+      </p:nvGrpSpPr>
+      <p:grpSpPr>
+        <a:xfrm>
+          <a:off x="0" y="0"/>
+          <a:ext cx="0" cy="0"/>
+          <a:chOff x="0" y="0"/>
+          <a:chExt cx="0" cy="0"/>
+        </a:xfrm>
+      </p:grpSpPr>
+      <p:sp>
+        <p:nvSpPr>
+          <p:cNvPr id="2" name="Text 0"/>
+          <p:cNvSpPr txBox="1"/>
+          <p:nvPr/>
+        </p:nvSpPr>
+        <p:spPr>
+          <a:xfrm>
+            <a:off x="640080" y="457200"/>
+            <a:ext cx="10911535" cy="274320"/>
+          </a:xfrm>
+          <a:prstGeom prst="rect">
+            <a:avLst/>
+          </a:prstGeom>
+          <a:noFill/>
+          <a:ln/>
+        </p:spPr>
+        <p:txBody>
+          <a:bodyPr wrap="square" lIns="0" tIns="0" rIns="0" bIns="0" rtlCol="0" anchor="t"/>
+          <a:lstStyle/>
+          <a:p>
+            <a:pPr algn="l" indent="0" marL="0">
+              <a:lnSpc>
+                <a:spcPct val="100000"/>
+              </a:lnSpc>
+              <a:buNone/>
+            </a:pPr>
+            <a:r>
+              <a:rPr lang="en-US" sz="1100" b="1" spc="200" kern="0" dirty="0">
+                <a:solidFill>
+                  <a:srgbClr val="4C8DFF"/>
+                </a:solidFill>
+                <a:latin typeface="Malgun Gothic" pitchFamily="34" charset="0"/>
+                <a:ea typeface="Malgun Gothic" pitchFamily="34" charset="-122"/>
+                <a:cs typeface="Malgun Gothic" pitchFamily="34" charset="-120"/>
+              </a:rPr>
+              <a:t>TYPOGRAPHY</a:t>
+            </a:r>
+            <a:endParaRPr lang="en-US" sz="1100" dirty="0"/>
+          </a:p>
+        </p:txBody>
+      </p:sp>
+      <p:sp>
+        <p:nvSpPr>
+          <p:cNvPr id="3" name="Text 1"/>
+          <p:cNvSpPr txBox="1"/>
+          <p:nvPr/>
+        </p:nvSpPr>
+        <p:spPr>
+          <a:xfrm>
+            <a:off x="640080" y="731520"/>
+            <a:ext cx="10911535" cy="548640"/>
+          </a:xfrm>
+          <a:prstGeom prst="rect">
+            <a:avLst/>
+          </a:prstGeom>
+          <a:noFill/>
+          <a:ln/>
+        </p:spPr>
+        <p:txBody>
+          <a:bodyPr wrap="square" lIns="0" tIns="0" rIns="0" bIns="0" rtlCol="0" anchor="t"/>
+          <a:lstStyle/>
+          <a:p>
+            <a:pPr algn="l" indent="0" marL="0">
+              <a:lnSpc>
+                <a:spcPct val="100000"/>
+              </a:lnSpc>
+              <a:buNone/>
+            </a:pPr>
+            <a:r>
+              <a:rPr lang="en-US" sz="2600" b="1" dirty="0">
+                <a:solidFill>
+                  <a:srgbClr val="E6E9EF"/>
+                </a:solidFill>
+                <a:latin typeface="Malgun Gothic" pitchFamily="34" charset="0"/>
+                <a:ea typeface="Malgun Gothic" pitchFamily="34" charset="-122"/>
+                <a:cs typeface="Malgun Gothic" pitchFamily="34" charset="-120"/>
+              </a:rPr>
+              <a:t>타이포그래피 스케일</a:t>
+            </a:r>
+            <a:endParaRPr lang="en-US" sz="2600" dirty="0"/>
+          </a:p>
+        </p:txBody>
+      </p:sp>
+      <p:sp>
+        <p:nvSpPr>
+          <p:cNvPr id="4" name="Text 2"/>
+          <p:cNvSpPr txBox="1"/>
+          <p:nvPr/>
+        </p:nvSpPr>
+        <p:spPr>
+          <a:xfrm>
+            <a:off x="640080" y="1298448"/>
+            <a:ext cx="10911535" cy="347472"/>
+          </a:xfrm>
+          <a:prstGeom prst="rect">
+            <a:avLst/>
+          </a:prstGeom>
+          <a:noFill/>
+          <a:ln/>
+        </p:spPr>
+        <p:txBody>
+          <a:bodyPr wrap="square" lIns="0" tIns="0" rIns="0" bIns="0" rtlCol="0" anchor="t"/>
+          <a:lstStyle/>
+          <a:p>
+            <a:pPr algn="l" indent="0" marL="0">
+              <a:lnSpc>
+                <a:spcPct val="100000"/>
+              </a:lnSpc>
+              <a:buNone/>
+            </a:pPr>
+            <a:r>
+              <a:rPr lang="en-US" sz="1200" dirty="0">
+                <a:solidFill>
+                  <a:srgbClr val="8A9099"/>
+                </a:solidFill>
+                <a:latin typeface="Malgun Gothic" pitchFamily="34" charset="0"/>
+                <a:ea typeface="Malgun Gothic" pitchFamily="34" charset="-122"/>
+                <a:cs typeface="Malgun Gothic" pitchFamily="34" charset="-120"/>
+              </a:rPr>
+              <a:t>위계는 제목 → 주요 수치 → 본문 → 보조 라벨 순서로만 만듭니다.</a:t>
+            </a:r>
+            <a:endParaRPr lang="en-US" sz="1200" dirty="0"/>
+          </a:p>
+        </p:txBody>
+      </p:sp>
+      <p:sp>
+        <p:nvSpPr>
+          <p:cNvPr id="5" name="Text 3"/>
+          <p:cNvSpPr txBox="1"/>
+          <p:nvPr/>
+        </p:nvSpPr>
+        <p:spPr>
+          <a:xfrm>
+            <a:off x="640080" y="1965960"/>
+            <a:ext cx="2743200" cy="685800"/>
+          </a:xfrm>
+          <a:prstGeom prst="rect">
+            <a:avLst/>
+          </a:prstGeom>
+          <a:noFill/>
+          <a:ln/>
+        </p:spPr>
+        <p:txBody>
+          <a:bodyPr wrap="square" lIns="0" tIns="0" rIns="0" bIns="0" rtlCol="0" anchor="ctr"/>
+          <a:lstStyle/>
+          <a:p>
+            <a:pPr algn="l" indent="0" marL="0">
+              <a:lnSpc>
+                <a:spcPct val="100000"/>
+              </a:lnSpc>
+              <a:buNone/>
+            </a:pPr>
+            <a:r>
+              <a:rPr lang="en-US" sz="3000" b="1" dirty="0">
+                <a:solidFill>
+                  <a:srgbClr val="E6E9EF"/>
+                </a:solidFill>
+                <a:latin typeface="Malgun Gothic" pitchFamily="34" charset="0"/>
+                <a:ea typeface="Malgun Gothic" pitchFamily="34" charset="-122"/>
+                <a:cs typeface="Malgun Gothic" pitchFamily="34" charset="-120"/>
+              </a:rPr>
+              <a:t>Aa</a:t>
+            </a:r>
+            <a:endParaRPr lang="en-US" sz="3000" dirty="0"/>
+          </a:p>
+        </p:txBody>
+      </p:sp>
+      <p:sp>
+        <p:nvSpPr>
+          <p:cNvPr id="6" name="Text 4"/>
+          <p:cNvSpPr txBox="1"/>
+          <p:nvPr/>
+        </p:nvSpPr>
+        <p:spPr>
+          <a:xfrm>
+            <a:off x="3566160" y="2002536"/>
+            <a:ext cx="2377440" cy="274320"/>
+          </a:xfrm>
+          <a:prstGeom prst="rect">
+            <a:avLst/>
+          </a:prstGeom>
+          <a:noFill/>
+          <a:ln/>
+        </p:spPr>
+        <p:txBody>
+          <a:bodyPr wrap="square" lIns="0" tIns="0" rIns="0" bIns="0" rtlCol="0" anchor="t"/>
+          <a:lstStyle/>
+          <a:p>
+            <a:pPr algn="l" indent="0" marL="0">
+              <a:lnSpc>
+                <a:spcPct val="100000"/>
+              </a:lnSpc>
+              <a:buNone/>
+            </a:pPr>
+            <a:r>
+              <a:rPr lang="en-US" sz="1300" b="1" dirty="0">
+                <a:solidFill>
+                  <a:srgbClr val="4C8DFF"/>
+                </a:solidFill>
+                <a:latin typeface="Malgun Gothic" pitchFamily="34" charset="0"/>
+                <a:ea typeface="Malgun Gothic" pitchFamily="34" charset="-122"/>
+                <a:cs typeface="Malgun Gothic" pitchFamily="34" charset="-120"/>
+              </a:rPr>
+              <a:t>titleLarge</a:t>
+            </a:r>
+            <a:endParaRPr lang="en-US" sz="1300" dirty="0"/>
+          </a:p>
+        </p:txBody>
+      </p:sp>
+      <p:sp>
+        <p:nvSpPr>
+          <p:cNvPr id="7" name="Text 5"/>
+          <p:cNvSpPr txBox="1"/>
+          <p:nvPr/>
+        </p:nvSpPr>
+        <p:spPr>
+          <a:xfrm>
+            <a:off x="3566160" y="2258568"/>
+            <a:ext cx="2926080" cy="274320"/>
+          </a:xfrm>
+          <a:prstGeom prst="rect">
+            <a:avLst/>
+          </a:prstGeom>
+          <a:noFill/>
+          <a:ln/>
+        </p:spPr>
+        <p:txBody>
+          <a:bodyPr wrap="square" lIns="0" tIns="0" rIns="0" bIns="0" rtlCol="0" anchor="t"/>
+          <a:lstStyle/>
+          <a:p>
+            <a:pPr algn="l" indent="0" marL="0">
+              <a:lnSpc>
+                <a:spcPct val="100000"/>
+              </a:lnSpc>
+              <a:buNone/>
+            </a:pPr>
+            <a:r>
+              <a:rPr lang="en-US" sz="1050" dirty="0">
+                <a:solidFill>
+                  <a:srgbClr val="8A9099"/>
+                </a:solidFill>
+                <a:latin typeface="Malgun Gothic" pitchFamily="34" charset="0"/>
+                <a:ea typeface="Malgun Gothic" pitchFamily="34" charset="-122"/>
+                <a:cs typeface="Malgun Gothic" pitchFamily="34" charset="-120"/>
+              </a:rPr>
+              <a:t>20 sp · Bold</a:t>
+            </a:r>
+            <a:endParaRPr lang="en-US" sz="1050" dirty="0"/>
+          </a:p>
+        </p:txBody>
+      </p:sp>
+      <p:sp>
+        <p:nvSpPr>
+          <p:cNvPr id="8" name="Text 6"/>
+          <p:cNvSpPr txBox="1"/>
+          <p:nvPr/>
+        </p:nvSpPr>
+        <p:spPr>
+          <a:xfrm>
+            <a:off x="6766560" y="2130552"/>
+            <a:ext cx="4754880" cy="365760"/>
+          </a:xfrm>
+          <a:prstGeom prst="rect">
+            <a:avLst/>
+          </a:prstGeom>
+          <a:noFill/>
+          <a:ln/>
+        </p:spPr>
+        <p:txBody>
+          <a:bodyPr wrap="square" lIns="0" tIns="0" rIns="0" bIns="0" rtlCol="0" anchor="ctr"/>
+          <a:lstStyle/>
+          <a:p>
+            <a:pPr algn="l" indent="0" marL="0">
+              <a:lnSpc>
+                <a:spcPct val="100000"/>
+              </a:lnSpc>
+              <a:buNone/>
+            </a:pPr>
+            <a:r>
+              <a:rPr lang="en-US" sz="1200" dirty="0">
+                <a:solidFill>
+                  <a:srgbClr val="E6E9EF"/>
+                </a:solidFill>
+                <a:latin typeface="Malgun Gothic" pitchFamily="34" charset="0"/>
+                <a:ea typeface="Malgun Gothic" pitchFamily="34" charset="-122"/>
+                <a:cs typeface="Malgun Gothic" pitchFamily="34" charset="-120"/>
+              </a:rPr>
+              <a:t>화면·카드 제목</a:t>
+            </a:r>
+            <a:endParaRPr lang="en-US" sz="1200" dirty="0"/>
+          </a:p>
+        </p:txBody>
+      </p:sp>
+      <p:sp>
+        <p:nvSpPr>
+          <p:cNvPr id="9" name="Text 7"/>
+          <p:cNvSpPr txBox="1"/>
+          <p:nvPr/>
+        </p:nvSpPr>
+        <p:spPr>
+          <a:xfrm>
+            <a:off x="640080" y="2971800"/>
+            <a:ext cx="2743200" cy="685800"/>
+          </a:xfrm>
+          <a:prstGeom prst="rect">
+            <a:avLst/>
+          </a:prstGeom>
+          <a:noFill/>
+          <a:ln/>
+        </p:spPr>
+        <p:txBody>
+          <a:bodyPr wrap="square" lIns="0" tIns="0" rIns="0" bIns="0" rtlCol="0" anchor="ctr"/>
+          <a:lstStyle/>
+          <a:p>
+            <a:pPr algn="l" indent="0" marL="0">
+              <a:lnSpc>
+                <a:spcPct val="100000"/>
+              </a:lnSpc>
+              <a:buNone/>
+            </a:pPr>
+            <a:r>
+              <a:rPr lang="en-US" sz="4000" b="1" dirty="0">
+                <a:solidFill>
+                  <a:srgbClr val="E6E9EF"/>
+                </a:solidFill>
+                <a:latin typeface="Malgun Gothic" pitchFamily="34" charset="0"/>
+                <a:ea typeface="Malgun Gothic" pitchFamily="34" charset="-122"/>
+                <a:cs typeface="Malgun Gothic" pitchFamily="34" charset="-120"/>
+              </a:rPr>
+              <a:t>37%</a:t>
+            </a:r>
+            <a:endParaRPr lang="en-US" sz="4000" dirty="0"/>
+          </a:p>
+        </p:txBody>
+      </p:sp>
+      <p:sp>
+        <p:nvSpPr>
+          <p:cNvPr id="10" name="Text 8"/>
+          <p:cNvSpPr txBox="1"/>
+          <p:nvPr/>
+        </p:nvSpPr>
+        <p:spPr>
+          <a:xfrm>
+            <a:off x="3566160" y="3008376"/>
+            <a:ext cx="2377440" cy="274320"/>
+          </a:xfrm>
+          <a:prstGeom prst="rect">
+            <a:avLst/>
+          </a:prstGeom>
+          <a:noFill/>
+          <a:ln/>
+        </p:spPr>
+        <p:txBody>
+          <a:bodyPr wrap="square" lIns="0" tIns="0" rIns="0" bIns="0" rtlCol="0" anchor="t"/>
+          <a:lstStyle/>
+          <a:p>
+            <a:pPr algn="l" indent="0" marL="0">
+              <a:lnSpc>
+                <a:spcPct val="100000"/>
+              </a:lnSpc>
+              <a:buNone/>
+            </a:pPr>
+            <a:r>
+              <a:rPr lang="en-US" sz="1300" b="1" dirty="0">
+                <a:solidFill>
+                  <a:srgbClr val="4C8DFF"/>
+                </a:solidFill>
+                <a:latin typeface="Malgun Gothic" pitchFamily="34" charset="0"/>
+                <a:ea typeface="Malgun Gothic" pitchFamily="34" charset="-122"/>
+                <a:cs typeface="Malgun Gothic" pitchFamily="34" charset="-120"/>
+              </a:rPr>
+              <a:t>headlineMedium</a:t>
+            </a:r>
+            <a:endParaRPr lang="en-US" sz="1300" dirty="0"/>
+          </a:p>
+        </p:txBody>
+      </p:sp>
+      <p:sp>
+        <p:nvSpPr>
+          <p:cNvPr id="11" name="Text 9"/>
+          <p:cNvSpPr txBox="1"/>
+          <p:nvPr/>
+        </p:nvSpPr>
+        <p:spPr>
+          <a:xfrm>
+            <a:off x="3566160" y="3264408"/>
+            <a:ext cx="2926080" cy="274320"/>
+          </a:xfrm>
+          <a:prstGeom prst="rect">
+            <a:avLst/>
+          </a:prstGeom>
+          <a:noFill/>
+          <a:ln/>
+        </p:spPr>
+        <p:txBody>
+          <a:bodyPr wrap="square" lIns="0" tIns="0" rIns="0" bIns="0" rtlCol="0" anchor="t"/>
+          <a:lstStyle/>
+          <a:p>
+            <a:pPr algn="l" indent="0" marL="0">
+              <a:lnSpc>
+                <a:spcPct val="100000"/>
+              </a:lnSpc>
+              <a:buNone/>
+            </a:pPr>
+            <a:r>
+              <a:rPr lang="en-US" sz="1050" dirty="0">
+                <a:solidFill>
+                  <a:srgbClr val="8A9099"/>
+                </a:solidFill>
+                <a:latin typeface="Malgun Gothic" pitchFamily="34" charset="0"/>
+                <a:ea typeface="Malgun Gothic" pitchFamily="34" charset="-122"/>
+                <a:cs typeface="Malgun Gothic" pitchFamily="34" charset="-120"/>
+              </a:rPr>
+              <a:t>28 sp · SemiBold · tabular</a:t>
+            </a:r>
+            <a:endParaRPr lang="en-US" sz="1050" dirty="0"/>
+          </a:p>
+        </p:txBody>
+      </p:sp>
+      <p:sp>
+        <p:nvSpPr>
+          <p:cNvPr id="12" name="Text 10"/>
+          <p:cNvSpPr txBox="1"/>
+          <p:nvPr/>
+        </p:nvSpPr>
+        <p:spPr>
+          <a:xfrm>
+            <a:off x="6766560" y="3136392"/>
+            <a:ext cx="4754880" cy="365760"/>
+          </a:xfrm>
+          <a:prstGeom prst="rect">
+            <a:avLst/>
+          </a:prstGeom>
+          <a:noFill/>
+          <a:ln/>
+        </p:spPr>
+        <p:txBody>
+          <a:bodyPr wrap="square" lIns="0" tIns="0" rIns="0" bIns="0" rtlCol="0" anchor="ctr"/>
+          <a:lstStyle/>
+          <a:p>
+            <a:pPr algn="l" indent="0" marL="0">
+              <a:lnSpc>
+                <a:spcPct val="100000"/>
+              </a:lnSpc>
+              <a:buNone/>
+            </a:pPr>
+            <a:r>
+              <a:rPr lang="en-US" sz="1200" dirty="0">
+                <a:solidFill>
+                  <a:srgbClr val="E6E9EF"/>
+                </a:solidFill>
+                <a:latin typeface="Malgun Gothic" pitchFamily="34" charset="0"/>
+                <a:ea typeface="Malgun Gothic" pitchFamily="34" charset="-122"/>
+                <a:cs typeface="Malgun Gothic" pitchFamily="34" charset="-120"/>
+              </a:rPr>
+              <a:t>주요 수치 (CPU / MEM / DISK)</a:t>
+            </a:r>
+            <a:endParaRPr lang="en-US" sz="1200" dirty="0"/>
+          </a:p>
+        </p:txBody>
+      </p:sp>
+      <p:sp>
+        <p:nvSpPr>
+          <p:cNvPr id="13" name="Text 11"/>
+          <p:cNvSpPr txBox="1"/>
+          <p:nvPr/>
+        </p:nvSpPr>
+        <p:spPr>
+          <a:xfrm>
+            <a:off x="640080" y="3977640"/>
+            <a:ext cx="2743200" cy="685800"/>
+          </a:xfrm>
+          <a:prstGeom prst="rect">
+            <a:avLst/>
+          </a:prstGeom>
+          <a:noFill/>
+          <a:ln/>
+        </p:spPr>
+        <p:txBody>
+          <a:bodyPr wrap="square" lIns="0" tIns="0" rIns="0" bIns="0" rtlCol="0" anchor="ctr"/>
+          <a:lstStyle/>
+          <a:p>
+            <a:pPr algn="l" indent="0" marL="0">
+              <a:lnSpc>
+                <a:spcPct val="100000"/>
+              </a:lnSpc>
+              <a:buNone/>
+            </a:pPr>
+            <a:r>
+              <a:rPr lang="en-US" sz="1800" b="1" dirty="0">
+                <a:solidFill>
+                  <a:srgbClr val="E6E9EF"/>
+                </a:solidFill>
+                <a:latin typeface="Malgun Gothic" pitchFamily="34" charset="0"/>
+                <a:ea typeface="Malgun Gothic" pitchFamily="34" charset="-122"/>
+                <a:cs typeface="Malgun Gothic" pitchFamily="34" charset="-120"/>
+              </a:rPr>
+              <a:t>Ubuntu 24.04 · up 4d</a:t>
+            </a:r>
+            <a:endParaRPr lang="en-US" sz="1800" dirty="0"/>
+          </a:p>
+        </p:txBody>
+      </p:sp>
+      <p:sp>
+        <p:nvSpPr>
+          <p:cNvPr id="14" name="Text 12"/>
+          <p:cNvSpPr txBox="1"/>
+          <p:nvPr/>
+        </p:nvSpPr>
+        <p:spPr>
+          <a:xfrm>
+            <a:off x="3566160" y="4014216"/>
+            <a:ext cx="2377440" cy="274320"/>
+          </a:xfrm>
+          <a:prstGeom prst="rect">
+            <a:avLst/>
+          </a:prstGeom>
+          <a:noFill/>
+          <a:ln/>
+        </p:spPr>
+        <p:txBody>
+          <a:bodyPr wrap="square" lIns="0" tIns="0" rIns="0" bIns="0" rtlCol="0" anchor="t"/>
+          <a:lstStyle/>
+          <a:p>
+            <a:pPr algn="l" indent="0" marL="0">
+              <a:lnSpc>
+                <a:spcPct val="100000"/>
+              </a:lnSpc>
+              <a:buNone/>
+            </a:pPr>
+            <a:r>
+              <a:rPr lang="en-US" sz="1300" b="1" dirty="0">
+                <a:solidFill>
+                  <a:srgbClr val="4C8DFF"/>
+                </a:solidFill>
+                <a:latin typeface="Malgun Gothic" pitchFamily="34" charset="0"/>
+                <a:ea typeface="Malgun Gothic" pitchFamily="34" charset="-122"/>
+                <a:cs typeface="Malgun Gothic" pitchFamily="34" charset="-120"/>
+              </a:rPr>
+              <a:t>bodyMedium</a:t>
+            </a:r>
+            <a:endParaRPr lang="en-US" sz="1300" dirty="0"/>
+          </a:p>
+        </p:txBody>
+      </p:sp>
+      <p:sp>
+        <p:nvSpPr>
+          <p:cNvPr id="15" name="Text 13"/>
+          <p:cNvSpPr txBox="1"/>
+          <p:nvPr/>
+        </p:nvSpPr>
+        <p:spPr>
+          <a:xfrm>
+            <a:off x="3566160" y="4270248"/>
+            <a:ext cx="2926080" cy="274320"/>
+          </a:xfrm>
+          <a:prstGeom prst="rect">
+            <a:avLst/>
+          </a:prstGeom>
+          <a:noFill/>
+          <a:ln/>
+        </p:spPr>
+        <p:txBody>
+          <a:bodyPr wrap="square" lIns="0" tIns="0" rIns="0" bIns="0" rtlCol="0" anchor="t"/>
+          <a:lstStyle/>
+          <a:p>
+            <a:pPr algn="l" indent="0" marL="0">
+              <a:lnSpc>
+                <a:spcPct val="100000"/>
+              </a:lnSpc>
+              <a:buNone/>
+            </a:pPr>
+            <a:r>
+              <a:rPr lang="en-US" sz="1050" dirty="0">
+                <a:solidFill>
+                  <a:srgbClr val="8A9099"/>
+                </a:solidFill>
+                <a:latin typeface="Malgun Gothic" pitchFamily="34" charset="0"/>
+                <a:ea typeface="Malgun Gothic" pitchFamily="34" charset="-122"/>
+                <a:cs typeface="Malgun Gothic" pitchFamily="34" charset="-120"/>
+              </a:rPr>
+              <a:t>14 sp · Regular</a:t>
+            </a:r>
+            <a:endParaRPr lang="en-US" sz="1050" dirty="0"/>
+          </a:p>
+        </p:txBody>
+      </p:sp>
+      <p:sp>
+        <p:nvSpPr>
+          <p:cNvPr id="16" name="Text 14"/>
+          <p:cNvSpPr txBox="1"/>
+          <p:nvPr/>
+        </p:nvSpPr>
+        <p:spPr>
+          <a:xfrm>
+            <a:off x="6766560" y="4142232"/>
+            <a:ext cx="4754880" cy="365760"/>
+          </a:xfrm>
+          <a:prstGeom prst="rect">
+            <a:avLst/>
+          </a:prstGeom>
+          <a:noFill/>
+          <a:ln/>
+        </p:spPr>
+        <p:txBody>
+          <a:bodyPr wrap="square" lIns="0" tIns="0" rIns="0" bIns="0" rtlCol="0" anchor="ctr"/>
+          <a:lstStyle/>
+          <a:p>
+            <a:pPr algn="l" indent="0" marL="0">
+              <a:lnSpc>
+                <a:spcPct val="100000"/>
+              </a:lnSpc>
+              <a:buNone/>
+            </a:pPr>
+            <a:r>
+              <a:rPr lang="en-US" sz="1200" dirty="0">
+                <a:solidFill>
+                  <a:srgbClr val="E6E9EF"/>
+                </a:solidFill>
+                <a:latin typeface="Malgun Gothic" pitchFamily="34" charset="0"/>
+                <a:ea typeface="Malgun Gothic" pitchFamily="34" charset="-122"/>
+                <a:cs typeface="Malgun Gothic" pitchFamily="34" charset="-120"/>
+              </a:rPr>
+              <a:t>행·값·설명</a:t>
+            </a:r>
+            <a:endParaRPr lang="en-US" sz="1200" dirty="0"/>
+          </a:p>
+        </p:txBody>
+      </p:sp>
+      <p:sp>
+        <p:nvSpPr>
+          <p:cNvPr id="17" name="Text 15"/>
+          <p:cNvSpPr txBox="1"/>
+          <p:nvPr/>
+        </p:nvSpPr>
+        <p:spPr>
+          <a:xfrm>
+            <a:off x="640080" y="4983480"/>
+            <a:ext cx="2743200" cy="685800"/>
+          </a:xfrm>
+          <a:prstGeom prst="rect">
+            <a:avLst/>
+          </a:prstGeom>
+          <a:noFill/>
+          <a:ln/>
+        </p:spPr>
+        <p:txBody>
+          <a:bodyPr wrap="square" lIns="0" tIns="0" rIns="0" bIns="0" rtlCol="0" anchor="ctr"/>
+          <a:lstStyle/>
+          <a:p>
+            <a:pPr algn="l" indent="0" marL="0">
+              <a:lnSpc>
+                <a:spcPct val="100000"/>
+              </a:lnSpc>
+              <a:buNone/>
+            </a:pPr>
+            <a:r>
+              <a:rPr lang="en-US" sz="1300" b="1" dirty="0">
+                <a:solidFill>
+                  <a:srgbClr val="E6E9EF"/>
+                </a:solidFill>
+                <a:latin typeface="Malgun Gothic" pitchFamily="34" charset="0"/>
+                <a:ea typeface="Malgun Gothic" pitchFamily="34" charset="-122"/>
+                <a:cs typeface="Malgun Gothic" pitchFamily="34" charset="-120"/>
+              </a:rPr>
+              <a:t>UPTIME · LOAD · MOUNT</a:t>
+            </a:r>
+            <a:endParaRPr lang="en-US" sz="1300" dirty="0"/>
+          </a:p>
+        </p:txBody>
+      </p:sp>
+      <p:sp>
+        <p:nvSpPr>
+          <p:cNvPr id="18" name="Text 16"/>
+          <p:cNvSpPr txBox="1"/>
+          <p:nvPr/>
+        </p:nvSpPr>
+        <p:spPr>
+          <a:xfrm>
+            <a:off x="3566160" y="5020056"/>
+            <a:ext cx="2377440" cy="274320"/>
+          </a:xfrm>
+          <a:prstGeom prst="rect">
+            <a:avLst/>
+          </a:prstGeom>
+          <a:noFill/>
+          <a:ln/>
+        </p:spPr>
+        <p:txBody>
+          <a:bodyPr wrap="square" lIns="0" tIns="0" rIns="0" bIns="0" rtlCol="0" anchor="t"/>
+          <a:lstStyle/>
+          <a:p>
+            <a:pPr algn="l" indent="0" marL="0">
+              <a:lnSpc>
+                <a:spcPct val="100000"/>
+              </a:lnSpc>
+              <a:buNone/>
+            </a:pPr>
+            <a:r>
+              <a:rPr lang="en-US" sz="1300" b="1" dirty="0">
+                <a:solidFill>
+                  <a:srgbClr val="4C8DFF"/>
+                </a:solidFill>
+                <a:latin typeface="Malgun Gothic" pitchFamily="34" charset="0"/>
+                <a:ea typeface="Malgun Gothic" pitchFamily="34" charset="-122"/>
+                <a:cs typeface="Malgun Gothic" pitchFamily="34" charset="-120"/>
+              </a:rPr>
+              <a:t>labelSmall</a:t>
+            </a:r>
+            <a:endParaRPr lang="en-US" sz="1300" dirty="0"/>
+          </a:p>
+        </p:txBody>
+      </p:sp>
+      <p:sp>
+        <p:nvSpPr>
+          <p:cNvPr id="19" name="Text 17"/>
+          <p:cNvSpPr txBox="1"/>
+          <p:nvPr/>
+        </p:nvSpPr>
+        <p:spPr>
+          <a:xfrm>
+            <a:off x="3566160" y="5276088"/>
+            <a:ext cx="2926080" cy="274320"/>
+          </a:xfrm>
+          <a:prstGeom prst="rect">
+            <a:avLst/>
+          </a:prstGeom>
+          <a:noFill/>
+          <a:ln/>
+        </p:spPr>
+        <p:txBody>
+          <a:bodyPr wrap="square" lIns="0" tIns="0" rIns="0" bIns="0" rtlCol="0" anchor="t"/>
+          <a:lstStyle/>
+          <a:p>
+            <a:pPr algn="l" indent="0" marL="0">
+              <a:lnSpc>
+                <a:spcPct val="100000"/>
+              </a:lnSpc>
+              <a:buNone/>
+            </a:pPr>
+            <a:r>
+              <a:rPr lang="en-US" sz="1050" dirty="0">
+                <a:solidFill>
+                  <a:srgbClr val="8A9099"/>
+                </a:solidFill>
+                <a:latin typeface="Malgun Gothic" pitchFamily="34" charset="0"/>
+                <a:ea typeface="Malgun Gothic" pitchFamily="34" charset="-122"/>
+                <a:cs typeface="Malgun Gothic" pitchFamily="34" charset="-120"/>
+              </a:rPr>
+              <a:t>11 sp · 자간 0.4</a:t>
+            </a:r>
+            <a:endParaRPr lang="en-US" sz="1050" dirty="0"/>
+          </a:p>
+        </p:txBody>
+      </p:sp>
+      <p:sp>
+        <p:nvSpPr>
+          <p:cNvPr id="20" name="Text 18"/>
+          <p:cNvSpPr txBox="1"/>
+          <p:nvPr/>
+        </p:nvSpPr>
+        <p:spPr>
+          <a:xfrm>
+            <a:off x="6766560" y="5148072"/>
+            <a:ext cx="4754880" cy="365760"/>
+          </a:xfrm>
+          <a:prstGeom prst="rect">
+            <a:avLst/>
+          </a:prstGeom>
+          <a:noFill/>
+          <a:ln/>
+        </p:spPr>
+        <p:txBody>
+          <a:bodyPr wrap="square" lIns="0" tIns="0" rIns="0" bIns="0" rtlCol="0" anchor="ctr"/>
+          <a:lstStyle/>
+          <a:p>
+            <a:pPr algn="l" indent="0" marL="0">
+              <a:lnSpc>
+                <a:spcPct val="100000"/>
+              </a:lnSpc>
+              <a:buNone/>
+            </a:pPr>
+            <a:r>
+              <a:rPr lang="en-US" sz="1200" dirty="0">
+                <a:solidFill>
+                  <a:srgbClr val="E6E9EF"/>
+                </a:solidFill>
+                <a:latin typeface="Malgun Gothic" pitchFamily="34" charset="0"/>
+                <a:ea typeface="Malgun Gothic" pitchFamily="34" charset="-122"/>
+                <a:cs typeface="Malgun Gothic" pitchFamily="34" charset="-120"/>
+              </a:rPr>
+              <a:t>보조 라벨·단위</a:t>
+            </a:r>
+            <a:endParaRPr lang="en-US" sz="1200" dirty="0"/>
+          </a:p>
+        </p:txBody>
+      </p:sp>
+      <p:sp>
+        <p:nvSpPr>
+          <p:cNvPr id="21" name="Text 19"/>
+          <p:cNvSpPr txBox="1"/>
+          <p:nvPr/>
+        </p:nvSpPr>
+        <p:spPr>
+          <a:xfrm>
+            <a:off x="640080" y="6035040"/>
+            <a:ext cx="10881360" cy="274320"/>
+          </a:xfrm>
+          <a:prstGeom prst="rect">
+            <a:avLst/>
+          </a:prstGeom>
+          <a:noFill/>
+          <a:ln/>
+        </p:spPr>
+        <p:txBody>
+          <a:bodyPr wrap="square" lIns="0" tIns="0" rIns="0" bIns="0" rtlCol="0" anchor="t"/>
+          <a:lstStyle/>
+          <a:p>
+            <a:pPr algn="l" indent="0" marL="0">
+              <a:lnSpc>
+                <a:spcPct val="100000"/>
+              </a:lnSpc>
+              <a:buNone/>
+            </a:pPr>
+            <a:r>
+              <a:rPr lang="en-US" sz="1100" dirty="0">
+                <a:solidFill>
+                  <a:srgbClr val="8A9099"/>
+                </a:solidFill>
+                <a:latin typeface="Malgun Gothic" pitchFamily="34" charset="0"/>
+                <a:ea typeface="Malgun Gothic" pitchFamily="34" charset="-122"/>
+                <a:cs typeface="Malgun Gothic" pitchFamily="34" charset="-120"/>
+              </a:rPr>
+              <a:t>숫자는 tabular(고정폭) 정렬로 흔들리지 않게 하고, 본문 대비는 4.5:1 이상을 유지합니다.</a:t>
+            </a:r>
+            <a:endParaRPr lang="en-US" sz="1100" dirty="0"/>
+          </a:p>
+        </p:txBody>
+      </p:sp>
+      <p:sp>
+        <p:nvSpPr>
+          <p:cNvPr id="22" name="Shape 20"/>
+          <p:cNvSpPr/>
+          <p:nvPr/>
+        </p:nvSpPr>
+        <p:spPr>
+          <a:xfrm>
+            <a:off x="640080" y="6382512"/>
+            <a:ext cx="10911535" cy="0"/>
+          </a:xfrm>
+          <a:prstGeom prst="line">
+            <a:avLst/>
+          </a:prstGeom>
+          <a:noFill/>
+          <a:ln w="12700">
+            <a:solidFill>
+              <a:srgbClr val="2A2E38"/>
+            </a:solidFill>
+            <a:prstDash val="solid"/>
+          </a:ln>
+        </p:spPr>
+      </p:sp>
+      <p:sp>
+        <p:nvSpPr>
+          <p:cNvPr id="23" name="Text 21"/>
+          <p:cNvSpPr txBox="1"/>
+          <p:nvPr/>
+        </p:nvSpPr>
+        <p:spPr>
+          <a:xfrm>
+            <a:off x="640080" y="6455664"/>
+            <a:ext cx="5486400" cy="274320"/>
+          </a:xfrm>
+          <a:prstGeom prst="rect">
+            <a:avLst/>
+          </a:prstGeom>
+          <a:noFill/>
+          <a:ln/>
+        </p:spPr>
+        <p:txBody>
+          <a:bodyPr wrap="square" lIns="0" tIns="0" rIns="0" bIns="0" rtlCol="0" anchor="t"/>
+          <a:lstStyle/>
+          <a:p>
+            <a:pPr algn="l" indent="0" marL="0">
+              <a:lnSpc>
+                <a:spcPct val="100000"/>
+              </a:lnSpc>
+              <a:buNone/>
+            </a:pPr>
+            <a:r>
+              <a:rPr lang="en-US" sz="1000" dirty="0">
+                <a:solidFill>
+                  <a:srgbClr val="8A9099"/>
+                </a:solidFill>
+                <a:latin typeface="Malgun Gothic" pitchFamily="34" charset="0"/>
+                <a:ea typeface="Malgun Gothic" pitchFamily="34" charset="-122"/>
+                <a:cs typeface="Malgun Gothic" pitchFamily="34" charset="-120"/>
+              </a:rPr>
+              <a:t>Servex — 디자인 상세</a:t>
+            </a:r>
+            <a:endParaRPr lang="en-US" sz="1000" dirty="0"/>
+          </a:p>
+        </p:txBody>
+      </p:sp>
+      <p:sp>
+        <p:nvSpPr>
+          <p:cNvPr id="24" name="Text 22"/>
+          <p:cNvSpPr txBox="1"/>
+          <p:nvPr/>
+        </p:nvSpPr>
+        <p:spPr>
+          <a:xfrm>
+            <a:off x="9722815" y="6455664"/>
+            <a:ext cx="1828800" cy="274320"/>
+          </a:xfrm>
+          <a:prstGeom prst="rect">
+            <a:avLst/>
+          </a:prstGeom>
+          <a:noFill/>
+          <a:ln/>
+        </p:spPr>
+        <p:txBody>
+          <a:bodyPr wrap="square" lIns="0" tIns="0" rIns="0" bIns="0" rtlCol="0" anchor="t"/>
+          <a:lstStyle/>
+          <a:p>
+            <a:pPr algn="r" indent="0" marL="0">
+              <a:lnSpc>
+                <a:spcPct val="100000"/>
+              </a:lnSpc>
+              <a:buNone/>
+            </a:pPr>
+            <a:r>
+              <a:rPr lang="en-US" sz="1000" dirty="0">
+                <a:solidFill>
+                  <a:srgbClr val="8A9099"/>
+                </a:solidFill>
+                <a:latin typeface="Malgun Gothic" pitchFamily="34" charset="0"/>
+                <a:ea typeface="Malgun Gothic" pitchFamily="34" charset="-122"/>
+                <a:cs typeface="Malgun Gothic" pitchFamily="34" charset="-120"/>
+              </a:rPr>
+              <a:t>7 / 11</a:t>
+            </a:r>
+            <a:endParaRPr lang="en-US" sz="1000" dirty="0"/>
+          </a:p>
+        </p:txBody>
+      </p:sp>
+    </p:spTree>
+  </p:cSld>
+  <p:clrMapOvr>
+    <a:masterClrMapping/>
+  </p:clrMapOvr>
+</p:sld>
+</file>
+
+<file path=ppt/slides/slide6.xml><?xml version="1.0" encoding="utf-8"?>
+<p:sld xmlns:a="http://schemas.openxmlformats.org/drawingml/2006/main" xmlns:r="http://schemas.openxmlformats.org/officeDocument/2006/relationships" xmlns:p="http://schemas.openxmlformats.org/presentationml/2006/main">
+  <p:cSld name="Slide 6">
+    <p:bg>
+      <p:bgPr>
+        <a:solidFill>
+          <a:srgbClr val="06070A"/>
+        </a:solidFill>
+      </p:bgPr>
+    </p:bg>
+    <p:spTree>
+      <p:nvGrpSpPr>
+        <p:cNvPr id="1" name=""/>
+        <p:cNvGrpSpPr/>
+        <p:nvPr/>
+      </p:nvGrpSpPr>
+      <p:grpSpPr>
+        <a:xfrm>
+          <a:off x="0" y="0"/>
+          <a:ext cx="0" cy="0"/>
+          <a:chOff x="0" y="0"/>
+          <a:chExt cx="0" cy="0"/>
+        </a:xfrm>
+      </p:grpSpPr>
+      <p:sp>
+        <p:nvSpPr>
+          <p:cNvPr id="2" name="Text 0"/>
+          <p:cNvSpPr txBox="1"/>
+          <p:nvPr/>
+        </p:nvSpPr>
+        <p:spPr>
+          <a:xfrm>
+            <a:off x="640080" y="457200"/>
+            <a:ext cx="10911535" cy="274320"/>
+          </a:xfrm>
+          <a:prstGeom prst="rect">
+            <a:avLst/>
+          </a:prstGeom>
+          <a:noFill/>
+          <a:ln/>
+        </p:spPr>
+        <p:txBody>
+          <a:bodyPr wrap="square" lIns="0" tIns="0" rIns="0" bIns="0" rtlCol="0" anchor="t"/>
+          <a:lstStyle/>
+          <a:p>
+            <a:pPr algn="l" indent="0" marL="0">
+              <a:lnSpc>
+                <a:spcPct val="100000"/>
+              </a:lnSpc>
+              <a:buNone/>
+            </a:pPr>
+            <a:r>
+              <a:rPr lang="en-US" sz="1100" b="1" spc="200" kern="0" dirty="0">
+                <a:solidFill>
+                  <a:srgbClr val="4C8DFF"/>
+                </a:solidFill>
+                <a:latin typeface="Malgun Gothic" pitchFamily="34" charset="0"/>
+                <a:ea typeface="Malgun Gothic" pitchFamily="34" charset="-122"/>
+                <a:cs typeface="Malgun Gothic" pitchFamily="34" charset="-120"/>
+              </a:rPr>
+              <a:t>COLOR</a:t>
+            </a:r>
+            <a:endParaRPr lang="en-US" sz="1100" dirty="0"/>
+          </a:p>
+        </p:txBody>
+      </p:sp>
+      <p:sp>
+        <p:nvSpPr>
+          <p:cNvPr id="3" name="Text 1"/>
+          <p:cNvSpPr txBox="1"/>
+          <p:nvPr/>
+        </p:nvSpPr>
+        <p:spPr>
+          <a:xfrm>
+            <a:off x="640080" y="731520"/>
+            <a:ext cx="10911535" cy="548640"/>
+          </a:xfrm>
+          <a:prstGeom prst="rect">
+            <a:avLst/>
+          </a:prstGeom>
+          <a:noFill/>
+          <a:ln/>
+        </p:spPr>
+        <p:txBody>
+          <a:bodyPr wrap="square" lIns="0" tIns="0" rIns="0" bIns="0" rtlCol="0" anchor="t"/>
+          <a:lstStyle/>
+          <a:p>
+            <a:pPr algn="l" indent="0" marL="0">
+              <a:lnSpc>
+                <a:spcPct val="100000"/>
+              </a:lnSpc>
+              <a:buNone/>
+            </a:pPr>
+            <a:r>
+              <a:rPr lang="en-US" sz="2600" b="1" dirty="0">
+                <a:solidFill>
+                  <a:srgbClr val="E6E9EF"/>
+                </a:solidFill>
+                <a:latin typeface="Malgun Gothic" pitchFamily="34" charset="0"/>
+                <a:ea typeface="Malgun Gothic" pitchFamily="34" charset="-122"/>
+                <a:cs typeface="Malgun Gothic" pitchFamily="34" charset="-120"/>
+              </a:rPr>
+              <a:t>색상 토큰 상세</a:t>
+            </a:r>
+            <a:endParaRPr lang="en-US" sz="2600" dirty="0"/>
+          </a:p>
+        </p:txBody>
+      </p:sp>
+      <p:sp>
+        <p:nvSpPr>
+          <p:cNvPr id="4" name="Text 2"/>
+          <p:cNvSpPr txBox="1"/>
+          <p:nvPr/>
+        </p:nvSpPr>
+        <p:spPr>
+          <a:xfrm>
+            <a:off x="640080" y="1298448"/>
+            <a:ext cx="10911535" cy="347472"/>
+          </a:xfrm>
+          <a:prstGeom prst="rect">
+            <a:avLst/>
+          </a:prstGeom>
+          <a:noFill/>
+          <a:ln/>
+        </p:spPr>
+        <p:txBody>
+          <a:bodyPr wrap="square" lIns="0" tIns="0" rIns="0" bIns="0" rtlCol="0" anchor="t"/>
+          <a:lstStyle/>
+          <a:p>
+            <a:pPr algn="l" indent="0" marL="0">
+              <a:lnSpc>
+                <a:spcPct val="100000"/>
+              </a:lnSpc>
+              <a:buNone/>
+            </a:pPr>
+            <a:r>
+              <a:rPr lang="en-US" sz="1200" dirty="0">
+                <a:solidFill>
+                  <a:srgbClr val="8A9099"/>
+                </a:solidFill>
+                <a:latin typeface="Malgun Gothic" pitchFamily="34" charset="0"/>
+                <a:ea typeface="Malgun Gothic" pitchFamily="34" charset="-122"/>
+                <a:cs typeface="Malgun Gothic" pitchFamily="34" charset="-120"/>
+              </a:rPr>
+              <a:t>토큰만 사용하고 화면마다 임의의 색을 만들지 않습니다.</a:t>
+            </a:r>
+            <a:endParaRPr lang="en-US" sz="1200" dirty="0"/>
+          </a:p>
+        </p:txBody>
+      </p:sp>
+      <p:sp>
+        <p:nvSpPr>
+          <p:cNvPr id="5" name="Shape 3"/>
+          <p:cNvSpPr/>
+          <p:nvPr/>
+        </p:nvSpPr>
+        <p:spPr>
+          <a:xfrm>
+            <a:off x="640080" y="2011680"/>
+            <a:ext cx="640080" cy="640080"/>
+          </a:xfrm>
+          <a:prstGeom prst="roundRect">
+            <a:avLst>
+              <a:gd name="adj" fmla="val 11429"/>
+            </a:avLst>
+          </a:prstGeom>
+          <a:solidFill>
+            <a:srgbClr val="0F1115"/>
+          </a:solidFill>
+          <a:ln w="12700">
+            <a:solidFill>
+              <a:srgbClr val="2A2E38"/>
+            </a:solidFill>
+            <a:prstDash val="solid"/>
+          </a:ln>
+        </p:spPr>
+      </p:sp>
+      <p:sp>
+        <p:nvSpPr>
+          <p:cNvPr id="6" name="Text 4"/>
+          <p:cNvSpPr txBox="1"/>
+          <p:nvPr/>
+        </p:nvSpPr>
+        <p:spPr>
+          <a:xfrm>
+            <a:off x="1463040" y="2029968"/>
+            <a:ext cx="2194560" cy="274320"/>
+          </a:xfrm>
+          <a:prstGeom prst="rect">
+            <a:avLst/>
+          </a:prstGeom>
+          <a:noFill/>
+          <a:ln/>
+        </p:spPr>
+        <p:txBody>
+          <a:bodyPr wrap="square" lIns="0" tIns="0" rIns="0" bIns="0" rtlCol="0" anchor="t"/>
+          <a:lstStyle/>
+          <a:p>
+            <a:pPr algn="l" indent="0" marL="0">
+              <a:lnSpc>
+                <a:spcPct val="100000"/>
+              </a:lnSpc>
+              <a:buNone/>
+            </a:pPr>
+            <a:r>
+              <a:rPr lang="en-US" sz="1300" b="1" dirty="0">
+                <a:solidFill>
+                  <a:srgbClr val="E6E9EF"/>
+                </a:solidFill>
+                <a:latin typeface="Malgun Gothic" pitchFamily="34" charset="0"/>
+                <a:ea typeface="Malgun Gothic" pitchFamily="34" charset="-122"/>
+                <a:cs typeface="Malgun Gothic" pitchFamily="34" charset="-120"/>
+              </a:rPr>
+              <a:t>Background</a:t>
+            </a:r>
+            <a:endParaRPr lang="en-US" sz="1300" dirty="0"/>
+          </a:p>
+        </p:txBody>
+      </p:sp>
+      <p:sp>
+        <p:nvSpPr>
+          <p:cNvPr id="7" name="Text 5"/>
+          <p:cNvSpPr txBox="1"/>
+          <p:nvPr/>
+        </p:nvSpPr>
+        <p:spPr>
+          <a:xfrm>
+            <a:off x="1463040" y="2286000"/>
+            <a:ext cx="2194560" cy="274320"/>
+          </a:xfrm>
+          <a:prstGeom prst="rect">
+            <a:avLst/>
+          </a:prstGeom>
+          <a:noFill/>
+          <a:ln/>
+        </p:spPr>
+        <p:txBody>
+          <a:bodyPr wrap="square" lIns="0" tIns="0" rIns="0" bIns="0" rtlCol="0" anchor="t"/>
+          <a:lstStyle/>
+          <a:p>
+            <a:pPr algn="l" indent="0" marL="0">
+              <a:lnSpc>
+                <a:spcPct val="100000"/>
+              </a:lnSpc>
+              <a:buNone/>
+            </a:pPr>
+            <a:r>
+              <a:rPr lang="en-US" sz="1050" dirty="0">
+                <a:solidFill>
+                  <a:srgbClr val="8A9099"/>
+                </a:solidFill>
+                <a:latin typeface="Malgun Gothic" pitchFamily="34" charset="0"/>
+                <a:ea typeface="Malgun Gothic" pitchFamily="34" charset="-122"/>
+                <a:cs typeface="Malgun Gothic" pitchFamily="34" charset="-120"/>
+              </a:rPr>
+              <a:t>#0F1115</a:t>
+            </a:r>
+            <a:endParaRPr lang="en-US" sz="1050" dirty="0"/>
+          </a:p>
+        </p:txBody>
+      </p:sp>
+      <p:sp>
+        <p:nvSpPr>
+          <p:cNvPr id="8" name="Text 6"/>
+          <p:cNvSpPr txBox="1"/>
+          <p:nvPr/>
+        </p:nvSpPr>
+        <p:spPr>
+          <a:xfrm>
+            <a:off x="3657600" y="2148840"/>
+            <a:ext cx="2468880" cy="365760"/>
+          </a:xfrm>
+          <a:prstGeom prst="rect">
+            <a:avLst/>
+          </a:prstGeom>
+          <a:noFill/>
+          <a:ln/>
+        </p:spPr>
+        <p:txBody>
+          <a:bodyPr wrap="square" lIns="0" tIns="0" rIns="0" bIns="0" rtlCol="0" anchor="t"/>
+          <a:lstStyle/>
+          <a:p>
+            <a:pPr algn="l" indent="0" marL="0">
+              <a:lnSpc>
+                <a:spcPct val="100000"/>
+              </a:lnSpc>
+              <a:buNone/>
+            </a:pPr>
+            <a:r>
+              <a:rPr lang="en-US" sz="1100" dirty="0">
+                <a:solidFill>
+                  <a:srgbClr val="8A9099"/>
+                </a:solidFill>
+                <a:latin typeface="Malgun Gothic" pitchFamily="34" charset="0"/>
+                <a:ea typeface="Malgun Gothic" pitchFamily="34" charset="-122"/>
+                <a:cs typeface="Malgun Gothic" pitchFamily="34" charset="-120"/>
+              </a:rPr>
+              <a:t>화면 배경</a:t>
+            </a:r>
+            <a:endParaRPr lang="en-US" sz="1100" dirty="0"/>
+          </a:p>
+        </p:txBody>
+      </p:sp>
+      <p:sp>
+        <p:nvSpPr>
+          <p:cNvPr id="9" name="Shape 7"/>
+          <p:cNvSpPr/>
+          <p:nvPr/>
+        </p:nvSpPr>
+        <p:spPr>
+          <a:xfrm>
+            <a:off x="640080" y="2880360"/>
+            <a:ext cx="640080" cy="640080"/>
+          </a:xfrm>
+          <a:prstGeom prst="roundRect">
+            <a:avLst>
+              <a:gd name="adj" fmla="val 11429"/>
+            </a:avLst>
+          </a:prstGeom>
+          <a:solidFill>
+            <a:srgbClr val="1A1D23"/>
+          </a:solidFill>
+          <a:ln w="12700">
+            <a:solidFill>
+              <a:srgbClr val="2A2E38"/>
+            </a:solidFill>
+            <a:prstDash val="solid"/>
+          </a:ln>
+        </p:spPr>
+      </p:sp>
+      <p:sp>
+        <p:nvSpPr>
+          <p:cNvPr id="10" name="Text 8"/>
+          <p:cNvSpPr txBox="1"/>
+          <p:nvPr/>
+        </p:nvSpPr>
+        <p:spPr>
+          <a:xfrm>
+            <a:off x="1463040" y="2898648"/>
+            <a:ext cx="2194560" cy="274320"/>
+          </a:xfrm>
+          <a:prstGeom prst="rect">
+            <a:avLst/>
+          </a:prstGeom>
+          <a:noFill/>
+          <a:ln/>
+        </p:spPr>
+        <p:txBody>
+          <a:bodyPr wrap="square" lIns="0" tIns="0" rIns="0" bIns="0" rtlCol="0" anchor="t"/>
+          <a:lstStyle/>
+          <a:p>
+            <a:pPr algn="l" indent="0" marL="0">
+              <a:lnSpc>
+                <a:spcPct val="100000"/>
+              </a:lnSpc>
+              <a:buNone/>
+            </a:pPr>
+            <a:r>
+              <a:rPr lang="en-US" sz="1300" b="1" dirty="0">
+                <a:solidFill>
+                  <a:srgbClr val="E6E9EF"/>
+                </a:solidFill>
+                <a:latin typeface="Malgun Gothic" pitchFamily="34" charset="0"/>
+                <a:ea typeface="Malgun Gothic" pitchFamily="34" charset="-122"/>
+                <a:cs typeface="Malgun Gothic" pitchFamily="34" charset="-120"/>
+              </a:rPr>
+              <a:t>Surface</a:t>
+            </a:r>
+            <a:endParaRPr lang="en-US" sz="1300" dirty="0"/>
+          </a:p>
+        </p:txBody>
+      </p:sp>
+      <p:sp>
+        <p:nvSpPr>
+          <p:cNvPr id="11" name="Text 9"/>
+          <p:cNvSpPr txBox="1"/>
+          <p:nvPr/>
+        </p:nvSpPr>
+        <p:spPr>
+          <a:xfrm>
+            <a:off x="1463040" y="3154680"/>
+            <a:ext cx="2194560" cy="274320"/>
+          </a:xfrm>
+          <a:prstGeom prst="rect">
+            <a:avLst/>
+          </a:prstGeom>
+          <a:noFill/>
+          <a:ln/>
+        </p:spPr>
+        <p:txBody>
+          <a:bodyPr wrap="square" lIns="0" tIns="0" rIns="0" bIns="0" rtlCol="0" anchor="t"/>
+          <a:lstStyle/>
+          <a:p>
+            <a:pPr algn="l" indent="0" marL="0">
+              <a:lnSpc>
+                <a:spcPct val="100000"/>
+              </a:lnSpc>
+              <a:buNone/>
+            </a:pPr>
+            <a:r>
+              <a:rPr lang="en-US" sz="1050" dirty="0">
+                <a:solidFill>
+                  <a:srgbClr val="8A9099"/>
+                </a:solidFill>
+                <a:latin typeface="Malgun Gothic" pitchFamily="34" charset="0"/>
+                <a:ea typeface="Malgun Gothic" pitchFamily="34" charset="-122"/>
+                <a:cs typeface="Malgun Gothic" pitchFamily="34" charset="-120"/>
+              </a:rPr>
+              <a:t>#1A1D23</a:t>
+            </a:r>
+            <a:endParaRPr lang="en-US" sz="1050" dirty="0"/>
+          </a:p>
+        </p:txBody>
+      </p:sp>
+      <p:sp>
+        <p:nvSpPr>
+          <p:cNvPr id="12" name="Text 10"/>
+          <p:cNvSpPr txBox="1"/>
+          <p:nvPr/>
+        </p:nvSpPr>
+        <p:spPr>
+          <a:xfrm>
+            <a:off x="3657600" y="3017520"/>
+            <a:ext cx="2468880" cy="365760"/>
+          </a:xfrm>
+          <a:prstGeom prst="rect">
+            <a:avLst/>
+          </a:prstGeom>
+          <a:noFill/>
+          <a:ln/>
+        </p:spPr>
+        <p:txBody>
+          <a:bodyPr wrap="square" lIns="0" tIns="0" rIns="0" bIns="0" rtlCol="0" anchor="t"/>
+          <a:lstStyle/>
+          <a:p>
+            <a:pPr algn="l" indent="0" marL="0">
+              <a:lnSpc>
+                <a:spcPct val="100000"/>
+              </a:lnSpc>
+              <a:buNone/>
+            </a:pPr>
+            <a:r>
+              <a:rPr lang="en-US" sz="1100" dirty="0">
+                <a:solidFill>
+                  <a:srgbClr val="8A9099"/>
+                </a:solidFill>
+                <a:latin typeface="Malgun Gothic" pitchFamily="34" charset="0"/>
+                <a:ea typeface="Malgun Gothic" pitchFamily="34" charset="-122"/>
+                <a:cs typeface="Malgun Gothic" pitchFamily="34" charset="-120"/>
+              </a:rPr>
+              <a:t>카드·패널</a:t>
+            </a:r>
+            <a:endParaRPr lang="en-US" sz="1100" dirty="0"/>
+          </a:p>
+        </p:txBody>
+      </p:sp>
+      <p:sp>
+        <p:nvSpPr>
+          <p:cNvPr id="13" name="Shape 11"/>
+          <p:cNvSpPr/>
+          <p:nvPr/>
+        </p:nvSpPr>
+        <p:spPr>
+          <a:xfrm>
+            <a:off x="640080" y="3749040"/>
+            <a:ext cx="640080" cy="640080"/>
+          </a:xfrm>
+          <a:prstGeom prst="roundRect">
+            <a:avLst>
+              <a:gd name="adj" fmla="val 11429"/>
+            </a:avLst>
+          </a:prstGeom>
+          <a:solidFill>
+            <a:srgbClr val="232732"/>
+          </a:solidFill>
+          <a:ln w="12700">
+            <a:solidFill>
+              <a:srgbClr val="2A2E38"/>
+            </a:solidFill>
+            <a:prstDash val="solid"/>
+          </a:ln>
+        </p:spPr>
+      </p:sp>
+      <p:sp>
+        <p:nvSpPr>
+          <p:cNvPr id="14" name="Text 12"/>
+          <p:cNvSpPr txBox="1"/>
+          <p:nvPr/>
+        </p:nvSpPr>
+        <p:spPr>
+          <a:xfrm>
+            <a:off x="1463040" y="3767328"/>
+            <a:ext cx="2194560" cy="274320"/>
+          </a:xfrm>
+          <a:prstGeom prst="rect">
+            <a:avLst/>
+          </a:prstGeom>
+          <a:noFill/>
+          <a:ln/>
+        </p:spPr>
+        <p:txBody>
+          <a:bodyPr wrap="square" lIns="0" tIns="0" rIns="0" bIns="0" rtlCol="0" anchor="t"/>
+          <a:lstStyle/>
+          <a:p>
+            <a:pPr algn="l" indent="0" marL="0">
+              <a:lnSpc>
+                <a:spcPct val="100000"/>
+              </a:lnSpc>
+              <a:buNone/>
+            </a:pPr>
+            <a:r>
+              <a:rPr lang="en-US" sz="1300" b="1" dirty="0">
+                <a:solidFill>
+                  <a:srgbClr val="E6E9EF"/>
+                </a:solidFill>
+                <a:latin typeface="Malgun Gothic" pitchFamily="34" charset="0"/>
+                <a:ea typeface="Malgun Gothic" pitchFamily="34" charset="-122"/>
+                <a:cs typeface="Malgun Gothic" pitchFamily="34" charset="-120"/>
+              </a:rPr>
+              <a:t>Surface Variant</a:t>
+            </a:r>
+            <a:endParaRPr lang="en-US" sz="1300" dirty="0"/>
+          </a:p>
+        </p:txBody>
+      </p:sp>
+      <p:sp>
+        <p:nvSpPr>
+          <p:cNvPr id="15" name="Text 13"/>
+          <p:cNvSpPr txBox="1"/>
+          <p:nvPr/>
+        </p:nvSpPr>
+        <p:spPr>
+          <a:xfrm>
+            <a:off x="1463040" y="4023360"/>
+            <a:ext cx="2194560" cy="274320"/>
+          </a:xfrm>
+          <a:prstGeom prst="rect">
+            <a:avLst/>
+          </a:prstGeom>
+          <a:noFill/>
+          <a:ln/>
+        </p:spPr>
+        <p:txBody>
+          <a:bodyPr wrap="square" lIns="0" tIns="0" rIns="0" bIns="0" rtlCol="0" anchor="t"/>
+          <a:lstStyle/>
+          <a:p>
+            <a:pPr algn="l" indent="0" marL="0">
+              <a:lnSpc>
+                <a:spcPct val="100000"/>
+              </a:lnSpc>
+              <a:buNone/>
+            </a:pPr>
+            <a:r>
+              <a:rPr lang="en-US" sz="1050" dirty="0">
+                <a:solidFill>
+                  <a:srgbClr val="8A9099"/>
+                </a:solidFill>
+                <a:latin typeface="Malgun Gothic" pitchFamily="34" charset="0"/>
+                <a:ea typeface="Malgun Gothic" pitchFamily="34" charset="-122"/>
+                <a:cs typeface="Malgun Gothic" pitchFamily="34" charset="-120"/>
+              </a:rPr>
+              <a:t>#232732</a:t>
+            </a:r>
+            <a:endParaRPr lang="en-US" sz="1050" dirty="0"/>
+          </a:p>
+        </p:txBody>
+      </p:sp>
+      <p:sp>
+        <p:nvSpPr>
+          <p:cNvPr id="16" name="Text 14"/>
+          <p:cNvSpPr txBox="1"/>
+          <p:nvPr/>
+        </p:nvSpPr>
+        <p:spPr>
+          <a:xfrm>
+            <a:off x="3657600" y="3886200"/>
+            <a:ext cx="2468880" cy="365760"/>
+          </a:xfrm>
+          <a:prstGeom prst="rect">
+            <a:avLst/>
+          </a:prstGeom>
+          <a:noFill/>
+          <a:ln/>
+        </p:spPr>
+        <p:txBody>
+          <a:bodyPr wrap="square" lIns="0" tIns="0" rIns="0" bIns="0" rtlCol="0" anchor="t"/>
+          <a:lstStyle/>
+          <a:p>
+            <a:pPr algn="l" indent="0" marL="0">
+              <a:lnSpc>
+                <a:spcPct val="100000"/>
+              </a:lnSpc>
+              <a:buNone/>
+            </a:pPr>
+            <a:r>
+              <a:rPr lang="en-US" sz="1100" dirty="0">
+                <a:solidFill>
+                  <a:srgbClr val="8A9099"/>
+                </a:solidFill>
+                <a:latin typeface="Malgun Gothic" pitchFamily="34" charset="0"/>
+                <a:ea typeface="Malgun Gothic" pitchFamily="34" charset="-122"/>
+                <a:cs typeface="Malgun Gothic" pitchFamily="34" charset="-120"/>
+              </a:rPr>
+              <a:t>차트 배경·구분 영역</a:t>
+            </a:r>
+            <a:endParaRPr lang="en-US" sz="1100" dirty="0"/>
+          </a:p>
+        </p:txBody>
+      </p:sp>
+      <p:sp>
+        <p:nvSpPr>
+          <p:cNvPr id="17" name="Shape 15"/>
+          <p:cNvSpPr/>
+          <p:nvPr/>
+        </p:nvSpPr>
+        <p:spPr>
+          <a:xfrm>
+            <a:off x="640080" y="4617720"/>
+            <a:ext cx="640080" cy="640080"/>
+          </a:xfrm>
+          <a:prstGeom prst="roundRect">
+            <a:avLst>
+              <a:gd name="adj" fmla="val 11429"/>
+            </a:avLst>
+          </a:prstGeom>
+          <a:solidFill>
+            <a:srgbClr val="E6E9EF"/>
+          </a:solidFill>
+          <a:ln w="12700">
+            <a:solidFill>
+              <a:srgbClr val="2A2E38"/>
+            </a:solidFill>
+            <a:prstDash val="solid"/>
+          </a:ln>
+        </p:spPr>
+      </p:sp>
+      <p:sp>
+        <p:nvSpPr>
+          <p:cNvPr id="18" name="Text 16"/>
+          <p:cNvSpPr txBox="1"/>
+          <p:nvPr/>
+        </p:nvSpPr>
+        <p:spPr>
+          <a:xfrm>
+            <a:off x="1463040" y="4636008"/>
+            <a:ext cx="2194560" cy="274320"/>
+          </a:xfrm>
+          <a:prstGeom prst="rect">
+            <a:avLst/>
+          </a:prstGeom>
+          <a:noFill/>
+          <a:ln/>
+        </p:spPr>
+        <p:txBody>
+          <a:bodyPr wrap="square" lIns="0" tIns="0" rIns="0" bIns="0" rtlCol="0" anchor="t"/>
+          <a:lstStyle/>
+          <a:p>
+            <a:pPr algn="l" indent="0" marL="0">
+              <a:lnSpc>
+                <a:spcPct val="100000"/>
+              </a:lnSpc>
+              <a:buNone/>
+            </a:pPr>
+            <a:r>
+              <a:rPr lang="en-US" sz="1300" b="1" dirty="0">
+                <a:solidFill>
+                  <a:srgbClr val="E6E9EF"/>
+                </a:solidFill>
+                <a:latin typeface="Malgun Gothic" pitchFamily="34" charset="0"/>
+                <a:ea typeface="Malgun Gothic" pitchFamily="34" charset="-122"/>
+                <a:cs typeface="Malgun Gothic" pitchFamily="34" charset="-120"/>
+              </a:rPr>
+              <a:t>On-Surface</a:t>
+            </a:r>
+            <a:endParaRPr lang="en-US" sz="1300" dirty="0"/>
+          </a:p>
+        </p:txBody>
+      </p:sp>
+      <p:sp>
+        <p:nvSpPr>
+          <p:cNvPr id="19" name="Text 17"/>
+          <p:cNvSpPr txBox="1"/>
+          <p:nvPr/>
+        </p:nvSpPr>
+        <p:spPr>
+          <a:xfrm>
+            <a:off x="1463040" y="4892040"/>
+            <a:ext cx="2194560" cy="274320"/>
+          </a:xfrm>
+          <a:prstGeom prst="rect">
+            <a:avLst/>
+          </a:prstGeom>
+          <a:noFill/>
+          <a:ln/>
+        </p:spPr>
+        <p:txBody>
+          <a:bodyPr wrap="square" lIns="0" tIns="0" rIns="0" bIns="0" rtlCol="0" anchor="t"/>
+          <a:lstStyle/>
+          <a:p>
+            <a:pPr algn="l" indent="0" marL="0">
+              <a:lnSpc>
+                <a:spcPct val="100000"/>
+              </a:lnSpc>
+              <a:buNone/>
+            </a:pPr>
+            <a:r>
+              <a:rPr lang="en-US" sz="1050" dirty="0">
+                <a:solidFill>
+                  <a:srgbClr val="8A9099"/>
+                </a:solidFill>
+                <a:latin typeface="Malgun Gothic" pitchFamily="34" charset="0"/>
+                <a:ea typeface="Malgun Gothic" pitchFamily="34" charset="-122"/>
+                <a:cs typeface="Malgun Gothic" pitchFamily="34" charset="-120"/>
+              </a:rPr>
+              <a:t>#E6E9EF</a:t>
+            </a:r>
+            <a:endParaRPr lang="en-US" sz="1050" dirty="0"/>
+          </a:p>
+        </p:txBody>
+      </p:sp>
+      <p:sp>
+        <p:nvSpPr>
+          <p:cNvPr id="20" name="Text 18"/>
+          <p:cNvSpPr txBox="1"/>
+          <p:nvPr/>
+        </p:nvSpPr>
+        <p:spPr>
+          <a:xfrm>
+            <a:off x="3657600" y="4754880"/>
+            <a:ext cx="2468880" cy="365760"/>
+          </a:xfrm>
+          <a:prstGeom prst="rect">
+            <a:avLst/>
+          </a:prstGeom>
+          <a:noFill/>
+          <a:ln/>
+        </p:spPr>
+        <p:txBody>
+          <a:bodyPr wrap="square" lIns="0" tIns="0" rIns="0" bIns="0" rtlCol="0" anchor="t"/>
+          <a:lstStyle/>
+          <a:p>
+            <a:pPr algn="l" indent="0" marL="0">
+              <a:lnSpc>
+                <a:spcPct val="100000"/>
+              </a:lnSpc>
+              <a:buNone/>
+            </a:pPr>
+            <a:r>
+              <a:rPr lang="en-US" sz="1100" dirty="0">
+                <a:solidFill>
+                  <a:srgbClr val="8A9099"/>
+                </a:solidFill>
+                <a:latin typeface="Malgun Gothic" pitchFamily="34" charset="0"/>
+                <a:ea typeface="Malgun Gothic" pitchFamily="34" charset="-122"/>
+                <a:cs typeface="Malgun Gothic" pitchFamily="34" charset="-120"/>
+              </a:rPr>
+              <a:t>기본 글자·수치</a:t>
+            </a:r>
+            <a:endParaRPr lang="en-US" sz="1100" dirty="0"/>
+          </a:p>
+        </p:txBody>
+      </p:sp>
+      <p:sp>
+        <p:nvSpPr>
+          <p:cNvPr id="21" name="Shape 19"/>
+          <p:cNvSpPr/>
+          <p:nvPr/>
+        </p:nvSpPr>
+        <p:spPr>
+          <a:xfrm>
+            <a:off x="640080" y="5486400"/>
+            <a:ext cx="640080" cy="640080"/>
+          </a:xfrm>
+          <a:prstGeom prst="roundRect">
+            <a:avLst>
+              <a:gd name="adj" fmla="val 11429"/>
+            </a:avLst>
+          </a:prstGeom>
+          <a:solidFill>
+            <a:srgbClr val="8A9099"/>
+          </a:solidFill>
+          <a:ln w="12700">
+            <a:solidFill>
+              <a:srgbClr val="2A2E38"/>
+            </a:solidFill>
+            <a:prstDash val="solid"/>
+          </a:ln>
+        </p:spPr>
+      </p:sp>
+      <p:sp>
+        <p:nvSpPr>
+          <p:cNvPr id="22" name="Text 20"/>
+          <p:cNvSpPr txBox="1"/>
+          <p:nvPr/>
+        </p:nvSpPr>
+        <p:spPr>
+          <a:xfrm>
+            <a:off x="1463040" y="5504688"/>
+            <a:ext cx="2194560" cy="274320"/>
+          </a:xfrm>
+          <a:prstGeom prst="rect">
+            <a:avLst/>
+          </a:prstGeom>
+          <a:noFill/>
+          <a:ln/>
+        </p:spPr>
+        <p:txBody>
+          <a:bodyPr wrap="square" lIns="0" tIns="0" rIns="0" bIns="0" rtlCol="0" anchor="t"/>
+          <a:lstStyle/>
+          <a:p>
+            <a:pPr algn="l" indent="0" marL="0">
+              <a:lnSpc>
+                <a:spcPct val="100000"/>
+              </a:lnSpc>
+              <a:buNone/>
+            </a:pPr>
+            <a:r>
+              <a:rPr lang="en-US" sz="1300" b="1" dirty="0">
+                <a:solidFill>
+                  <a:srgbClr val="E6E9EF"/>
+                </a:solidFill>
+                <a:latin typeface="Malgun Gothic" pitchFamily="34" charset="0"/>
+                <a:ea typeface="Malgun Gothic" pitchFamily="34" charset="-122"/>
+                <a:cs typeface="Malgun Gothic" pitchFamily="34" charset="-120"/>
+              </a:rPr>
+              <a:t>On-Variant</a:t>
+            </a:r>
+            <a:endParaRPr lang="en-US" sz="1300" dirty="0"/>
+          </a:p>
+        </p:txBody>
+      </p:sp>
+      <p:sp>
+        <p:nvSpPr>
+          <p:cNvPr id="23" name="Text 21"/>
+          <p:cNvSpPr txBox="1"/>
+          <p:nvPr/>
+        </p:nvSpPr>
+        <p:spPr>
+          <a:xfrm>
+            <a:off x="1463040" y="5760720"/>
+            <a:ext cx="2194560" cy="274320"/>
+          </a:xfrm>
+          <a:prstGeom prst="rect">
+            <a:avLst/>
+          </a:prstGeom>
+          <a:noFill/>
+          <a:ln/>
+        </p:spPr>
+        <p:txBody>
+          <a:bodyPr wrap="square" lIns="0" tIns="0" rIns="0" bIns="0" rtlCol="0" anchor="t"/>
+          <a:lstStyle/>
+          <a:p>
+            <a:pPr algn="l" indent="0" marL="0">
+              <a:lnSpc>
+                <a:spcPct val="100000"/>
+              </a:lnSpc>
+              <a:buNone/>
+            </a:pPr>
+            <a:r>
+              <a:rPr lang="en-US" sz="1050" dirty="0">
+                <a:solidFill>
+                  <a:srgbClr val="8A9099"/>
+                </a:solidFill>
+                <a:latin typeface="Malgun Gothic" pitchFamily="34" charset="0"/>
+                <a:ea typeface="Malgun Gothic" pitchFamily="34" charset="-122"/>
+                <a:cs typeface="Malgun Gothic" pitchFamily="34" charset="-120"/>
+              </a:rPr>
+              <a:t>#8A9099</a:t>
+            </a:r>
+            <a:endParaRPr lang="en-US" sz="1050" dirty="0"/>
+          </a:p>
+        </p:txBody>
+      </p:sp>
+      <p:sp>
+        <p:nvSpPr>
+          <p:cNvPr id="24" name="Text 22"/>
+          <p:cNvSpPr txBox="1"/>
+          <p:nvPr/>
+        </p:nvSpPr>
+        <p:spPr>
+          <a:xfrm>
+            <a:off x="3657600" y="5623560"/>
+            <a:ext cx="2468880" cy="365760"/>
+          </a:xfrm>
+          <a:prstGeom prst="rect">
+            <a:avLst/>
+          </a:prstGeom>
+          <a:noFill/>
+          <a:ln/>
+        </p:spPr>
+        <p:txBody>
+          <a:bodyPr wrap="square" lIns="0" tIns="0" rIns="0" bIns="0" rtlCol="0" anchor="t"/>
+          <a:lstStyle/>
+          <a:p>
+            <a:pPr algn="l" indent="0" marL="0">
+              <a:lnSpc>
+                <a:spcPct val="100000"/>
+              </a:lnSpc>
+              <a:buNone/>
+            </a:pPr>
+            <a:r>
+              <a:rPr lang="en-US" sz="1100" dirty="0">
+                <a:solidFill>
+                  <a:srgbClr val="8A9099"/>
+                </a:solidFill>
+                <a:latin typeface="Malgun Gothic" pitchFamily="34" charset="0"/>
+                <a:ea typeface="Malgun Gothic" pitchFamily="34" charset="-122"/>
+                <a:cs typeface="Malgun Gothic" pitchFamily="34" charset="-120"/>
+              </a:rPr>
+              <a:t>보조 글자·라벨</a:t>
+            </a:r>
+            <a:endParaRPr lang="en-US" sz="1100" dirty="0"/>
+          </a:p>
+        </p:txBody>
+      </p:sp>
+      <p:sp>
+        <p:nvSpPr>
+          <p:cNvPr id="25" name="Shape 23"/>
+          <p:cNvSpPr/>
+          <p:nvPr/>
+        </p:nvSpPr>
+        <p:spPr>
+          <a:xfrm>
+            <a:off x="6309360" y="2011680"/>
+            <a:ext cx="640080" cy="640080"/>
+          </a:xfrm>
+          <a:prstGeom prst="roundRect">
+            <a:avLst>
+              <a:gd name="adj" fmla="val 11429"/>
+            </a:avLst>
+          </a:prstGeom>
+          <a:solidFill>
+            <a:srgbClr val="4C8DFF"/>
+          </a:solidFill>
+          <a:ln w="12700">
+            <a:solidFill>
+              <a:srgbClr val="2A2E38"/>
+            </a:solidFill>
+            <a:prstDash val="solid"/>
+          </a:ln>
+        </p:spPr>
+      </p:sp>
+      <p:sp>
+        <p:nvSpPr>
+          <p:cNvPr id="26" name="Text 24"/>
+          <p:cNvSpPr txBox="1"/>
+          <p:nvPr/>
+        </p:nvSpPr>
+        <p:spPr>
+          <a:xfrm>
+            <a:off x="7132320" y="2029968"/>
+            <a:ext cx="2194560" cy="274320"/>
+          </a:xfrm>
+          <a:prstGeom prst="rect">
+            <a:avLst/>
+          </a:prstGeom>
+          <a:noFill/>
+          <a:ln/>
+        </p:spPr>
+        <p:txBody>
+          <a:bodyPr wrap="square" lIns="0" tIns="0" rIns="0" bIns="0" rtlCol="0" anchor="t"/>
+          <a:lstStyle/>
+          <a:p>
+            <a:pPr algn="l" indent="0" marL="0">
+              <a:lnSpc>
+                <a:spcPct val="100000"/>
+              </a:lnSpc>
+              <a:buNone/>
+            </a:pPr>
+            <a:r>
+              <a:rPr lang="en-US" sz="1300" b="1" dirty="0">
+                <a:solidFill>
+                  <a:srgbClr val="E6E9EF"/>
+                </a:solidFill>
+                <a:latin typeface="Malgun Gothic" pitchFamily="34" charset="0"/>
+                <a:ea typeface="Malgun Gothic" pitchFamily="34" charset="-122"/>
+                <a:cs typeface="Malgun Gothic" pitchFamily="34" charset="-120"/>
+              </a:rPr>
+              <a:t>Primary</a:t>
+            </a:r>
+            <a:endParaRPr lang="en-US" sz="1300" dirty="0"/>
+          </a:p>
+        </p:txBody>
+      </p:sp>
+      <p:sp>
+        <p:nvSpPr>
+          <p:cNvPr id="27" name="Text 25"/>
+          <p:cNvSpPr txBox="1"/>
+          <p:nvPr/>
+        </p:nvSpPr>
+        <p:spPr>
+          <a:xfrm>
+            <a:off x="7132320" y="2286000"/>
+            <a:ext cx="2194560" cy="274320"/>
+          </a:xfrm>
+          <a:prstGeom prst="rect">
+            <a:avLst/>
+          </a:prstGeom>
+          <a:noFill/>
+          <a:ln/>
+        </p:spPr>
+        <p:txBody>
+          <a:bodyPr wrap="square" lIns="0" tIns="0" rIns="0" bIns="0" rtlCol="0" anchor="t"/>
+          <a:lstStyle/>
+          <a:p>
+            <a:pPr algn="l" indent="0" marL="0">
+              <a:lnSpc>
+                <a:spcPct val="100000"/>
+              </a:lnSpc>
+              <a:buNone/>
+            </a:pPr>
+            <a:r>
+              <a:rPr lang="en-US" sz="1050" dirty="0">
+                <a:solidFill>
+                  <a:srgbClr val="8A9099"/>
+                </a:solidFill>
+                <a:latin typeface="Malgun Gothic" pitchFamily="34" charset="0"/>
+                <a:ea typeface="Malgun Gothic" pitchFamily="34" charset="-122"/>
+                <a:cs typeface="Malgun Gothic" pitchFamily="34" charset="-120"/>
+              </a:rPr>
+              <a:t>#4C8DFF</a:t>
+            </a:r>
+            <a:endParaRPr lang="en-US" sz="1050" dirty="0"/>
+          </a:p>
+        </p:txBody>
+      </p:sp>
+      <p:sp>
+        <p:nvSpPr>
+          <p:cNvPr id="28" name="Text 26"/>
+          <p:cNvSpPr txBox="1"/>
+          <p:nvPr/>
+        </p:nvSpPr>
+        <p:spPr>
+          <a:xfrm>
+            <a:off x="9326880" y="2148840"/>
+            <a:ext cx="2468880" cy="365760"/>
+          </a:xfrm>
+          <a:prstGeom prst="rect">
+            <a:avLst/>
+          </a:prstGeom>
+          <a:noFill/>
+          <a:ln/>
+        </p:spPr>
+        <p:txBody>
+          <a:bodyPr wrap="square" lIns="0" tIns="0" rIns="0" bIns="0" rtlCol="0" anchor="t"/>
+          <a:lstStyle/>
+          <a:p>
+            <a:pPr algn="l" indent="0" marL="0">
+              <a:lnSpc>
+                <a:spcPct val="100000"/>
+              </a:lnSpc>
+              <a:buNone/>
+            </a:pPr>
+            <a:r>
+              <a:rPr lang="en-US" sz="1100" dirty="0">
+                <a:solidFill>
+                  <a:srgbClr val="8A9099"/>
+                </a:solidFill>
+                <a:latin typeface="Malgun Gothic" pitchFamily="34" charset="0"/>
+                <a:ea typeface="Malgun Gothic" pitchFamily="34" charset="-122"/>
+                <a:cs typeface="Malgun Gothic" pitchFamily="34" charset="-120"/>
+              </a:rPr>
+              <a:t>포인트·선택·버튼</a:t>
+            </a:r>
+            <a:endParaRPr lang="en-US" sz="1100" dirty="0"/>
+          </a:p>
+        </p:txBody>
+      </p:sp>
+      <p:sp>
+        <p:nvSpPr>
+          <p:cNvPr id="29" name="Shape 27"/>
+          <p:cNvSpPr/>
+          <p:nvPr/>
+        </p:nvSpPr>
+        <p:spPr>
+          <a:xfrm>
+            <a:off x="6309360" y="2880360"/>
+            <a:ext cx="640080" cy="640080"/>
+          </a:xfrm>
+          <a:prstGeom prst="roundRect">
+            <a:avLst>
+              <a:gd name="adj" fmla="val 11429"/>
+            </a:avLst>
+          </a:prstGeom>
+          <a:solidFill>
+            <a:srgbClr val="3DDC84"/>
+          </a:solidFill>
+          <a:ln w="12700">
+            <a:solidFill>
+              <a:srgbClr val="2A2E38"/>
+            </a:solidFill>
+            <a:prstDash val="solid"/>
+          </a:ln>
+        </p:spPr>
+      </p:sp>
+      <p:sp>
+        <p:nvSpPr>
+          <p:cNvPr id="30" name="Text 28"/>
+          <p:cNvSpPr txBox="1"/>
+          <p:nvPr/>
+        </p:nvSpPr>
+        <p:spPr>
+          <a:xfrm>
+            <a:off x="7132320" y="2898648"/>
+            <a:ext cx="2194560" cy="274320"/>
+          </a:xfrm>
+          <a:prstGeom prst="rect">
+            <a:avLst/>
+          </a:prstGeom>
+          <a:noFill/>
+          <a:ln/>
+        </p:spPr>
+        <p:txBody>
+          <a:bodyPr wrap="square" lIns="0" tIns="0" rIns="0" bIns="0" rtlCol="0" anchor="t"/>
+          <a:lstStyle/>
+          <a:p>
+            <a:pPr algn="l" indent="0" marL="0">
+              <a:lnSpc>
+                <a:spcPct val="100000"/>
+              </a:lnSpc>
+              <a:buNone/>
+            </a:pPr>
+            <a:r>
+              <a:rPr lang="en-US" sz="1300" b="1" dirty="0">
+                <a:solidFill>
+                  <a:srgbClr val="E6E9EF"/>
+                </a:solidFill>
+                <a:latin typeface="Malgun Gothic" pitchFamily="34" charset="0"/>
+                <a:ea typeface="Malgun Gothic" pitchFamily="34" charset="-122"/>
+                <a:cs typeface="Malgun Gothic" pitchFamily="34" charset="-120"/>
+              </a:rPr>
+              <a:t>Success</a:t>
+            </a:r>
+            <a:endParaRPr lang="en-US" sz="1300" dirty="0"/>
+          </a:p>
+        </p:txBody>
+      </p:sp>
+      <p:sp>
+        <p:nvSpPr>
+          <p:cNvPr id="31" name="Text 29"/>
+          <p:cNvSpPr txBox="1"/>
+          <p:nvPr/>
+        </p:nvSpPr>
+        <p:spPr>
+          <a:xfrm>
+            <a:off x="7132320" y="3154680"/>
+            <a:ext cx="2194560" cy="274320"/>
+          </a:xfrm>
+          <a:prstGeom prst="rect">
+            <a:avLst/>
+          </a:prstGeom>
+          <a:noFill/>
+          <a:ln/>
+        </p:spPr>
+        <p:txBody>
+          <a:bodyPr wrap="square" lIns="0" tIns="0" rIns="0" bIns="0" rtlCol="0" anchor="t"/>
+          <a:lstStyle/>
+          <a:p>
+            <a:pPr algn="l" indent="0" marL="0">
+              <a:lnSpc>
+                <a:spcPct val="100000"/>
+              </a:lnSpc>
+              <a:buNone/>
+            </a:pPr>
+            <a:r>
+              <a:rPr lang="en-US" sz="1050" dirty="0">
+                <a:solidFill>
+                  <a:srgbClr val="8A9099"/>
+                </a:solidFill>
+                <a:latin typeface="Malgun Gothic" pitchFamily="34" charset="0"/>
+                <a:ea typeface="Malgun Gothic" pitchFamily="34" charset="-122"/>
+                <a:cs typeface="Malgun Gothic" pitchFamily="34" charset="-120"/>
+              </a:rPr>
+              <a:t>#3DDC84</a:t>
+            </a:r>
+            <a:endParaRPr lang="en-US" sz="1050" dirty="0"/>
+          </a:p>
+        </p:txBody>
+      </p:sp>
+      <p:sp>
+        <p:nvSpPr>
+          <p:cNvPr id="32" name="Text 30"/>
+          <p:cNvSpPr txBox="1"/>
+          <p:nvPr/>
+        </p:nvSpPr>
+        <p:spPr>
+          <a:xfrm>
+            <a:off x="9326880" y="3017520"/>
+            <a:ext cx="2468880" cy="365760"/>
+          </a:xfrm>
+          <a:prstGeom prst="rect">
+            <a:avLst/>
+          </a:prstGeom>
+          <a:noFill/>
+          <a:ln/>
+        </p:spPr>
+        <p:txBody>
+          <a:bodyPr wrap="square" lIns="0" tIns="0" rIns="0" bIns="0" rtlCol="0" anchor="t"/>
+          <a:lstStyle/>
+          <a:p>
+            <a:pPr algn="l" indent="0" marL="0">
+              <a:lnSpc>
+                <a:spcPct val="100000"/>
+              </a:lnSpc>
+              <a:buNone/>
+            </a:pPr>
+            <a:r>
+              <a:rPr lang="en-US" sz="1100" dirty="0">
+                <a:solidFill>
+                  <a:srgbClr val="8A9099"/>
+                </a:solidFill>
+                <a:latin typeface="Malgun Gothic" pitchFamily="34" charset="0"/>
+                <a:ea typeface="Malgun Gothic" pitchFamily="34" charset="-122"/>
+                <a:cs typeface="Malgun Gothic" pitchFamily="34" charset="-120"/>
+              </a:rPr>
+              <a:t>정상</a:t>
+            </a:r>
+            <a:endParaRPr lang="en-US" sz="1100" dirty="0"/>
+          </a:p>
+        </p:txBody>
+      </p:sp>
+      <p:sp>
+        <p:nvSpPr>
+          <p:cNvPr id="33" name="Shape 31"/>
+          <p:cNvSpPr/>
+          <p:nvPr/>
+        </p:nvSpPr>
+        <p:spPr>
+          <a:xfrm>
+            <a:off x="6309360" y="3749040"/>
+            <a:ext cx="640080" cy="640080"/>
+          </a:xfrm>
+          <a:prstGeom prst="roundRect">
+            <a:avLst>
+              <a:gd name="adj" fmla="val 11429"/>
+            </a:avLst>
+          </a:prstGeom>
+          <a:solidFill>
+            <a:srgbClr val="FFC93C"/>
+          </a:solidFill>
+          <a:ln w="12700">
+            <a:solidFill>
+              <a:srgbClr val="2A2E38"/>
+            </a:solidFill>
+            <a:prstDash val="solid"/>
+          </a:ln>
+        </p:spPr>
+      </p:sp>
+      <p:sp>
+        <p:nvSpPr>
+          <p:cNvPr id="34" name="Text 32"/>
+          <p:cNvSpPr txBox="1"/>
+          <p:nvPr/>
+        </p:nvSpPr>
+        <p:spPr>
+          <a:xfrm>
+            <a:off x="7132320" y="3767328"/>
+            <a:ext cx="2194560" cy="274320"/>
+          </a:xfrm>
+          <a:prstGeom prst="rect">
+            <a:avLst/>
+          </a:prstGeom>
+          <a:noFill/>
+          <a:ln/>
+        </p:spPr>
+        <p:txBody>
+          <a:bodyPr wrap="square" lIns="0" tIns="0" rIns="0" bIns="0" rtlCol="0" anchor="t"/>
+          <a:lstStyle/>
+          <a:p>
+            <a:pPr algn="l" indent="0" marL="0">
+              <a:lnSpc>
+                <a:spcPct val="100000"/>
+              </a:lnSpc>
+              <a:buNone/>
+            </a:pPr>
+            <a:r>
+              <a:rPr lang="en-US" sz="1300" b="1" dirty="0">
+                <a:solidFill>
+                  <a:srgbClr val="E6E9EF"/>
+                </a:solidFill>
+                <a:latin typeface="Malgun Gothic" pitchFamily="34" charset="0"/>
+                <a:ea typeface="Malgun Gothic" pitchFamily="34" charset="-122"/>
+                <a:cs typeface="Malgun Gothic" pitchFamily="34" charset="-120"/>
+              </a:rPr>
+              <a:t>Warning</a:t>
+            </a:r>
+            <a:endParaRPr lang="en-US" sz="1300" dirty="0"/>
+          </a:p>
+        </p:txBody>
+      </p:sp>
+      <p:sp>
+        <p:nvSpPr>
+          <p:cNvPr id="35" name="Text 33"/>
+          <p:cNvSpPr txBox="1"/>
+          <p:nvPr/>
+        </p:nvSpPr>
+        <p:spPr>
+          <a:xfrm>
+            <a:off x="7132320" y="4023360"/>
+            <a:ext cx="2194560" cy="274320"/>
+          </a:xfrm>
+          <a:prstGeom prst="rect">
+            <a:avLst/>
+          </a:prstGeom>
+          <a:noFill/>
+          <a:ln/>
+        </p:spPr>
+        <p:txBody>
+          <a:bodyPr wrap="square" lIns="0" tIns="0" rIns="0" bIns="0" rtlCol="0" anchor="t"/>
+          <a:lstStyle/>
+          <a:p>
+            <a:pPr algn="l" indent="0" marL="0">
+              <a:lnSpc>
+                <a:spcPct val="100000"/>
+              </a:lnSpc>
+              <a:buNone/>
+            </a:pPr>
+            <a:r>
+              <a:rPr lang="en-US" sz="1050" dirty="0">
+                <a:solidFill>
+                  <a:srgbClr val="8A9099"/>
+                </a:solidFill>
+                <a:latin typeface="Malgun Gothic" pitchFamily="34" charset="0"/>
+                <a:ea typeface="Malgun Gothic" pitchFamily="34" charset="-122"/>
+                <a:cs typeface="Malgun Gothic" pitchFamily="34" charset="-120"/>
+              </a:rPr>
+              <a:t>#FFC93C</a:t>
+            </a:r>
+            <a:endParaRPr lang="en-US" sz="1050" dirty="0"/>
+          </a:p>
+        </p:txBody>
+      </p:sp>
+      <p:sp>
+        <p:nvSpPr>
+          <p:cNvPr id="36" name="Text 34"/>
+          <p:cNvSpPr txBox="1"/>
+          <p:nvPr/>
+        </p:nvSpPr>
+        <p:spPr>
+          <a:xfrm>
+            <a:off x="9326880" y="3886200"/>
+            <a:ext cx="2468880" cy="365760"/>
+          </a:xfrm>
+          <a:prstGeom prst="rect">
+            <a:avLst/>
+          </a:prstGeom>
+          <a:noFill/>
+          <a:ln/>
+        </p:spPr>
+        <p:txBody>
+          <a:bodyPr wrap="square" lIns="0" tIns="0" rIns="0" bIns="0" rtlCol="0" anchor="t"/>
+          <a:lstStyle/>
+          <a:p>
+            <a:pPr algn="l" indent="0" marL="0">
+              <a:lnSpc>
+                <a:spcPct val="100000"/>
+              </a:lnSpc>
+              <a:buNone/>
+            </a:pPr>
+            <a:r>
+              <a:rPr lang="en-US" sz="1100" dirty="0">
+                <a:solidFill>
+                  <a:srgbClr val="8A9099"/>
+                </a:solidFill>
+                <a:latin typeface="Malgun Gothic" pitchFamily="34" charset="0"/>
+                <a:ea typeface="Malgun Gothic" pitchFamily="34" charset="-122"/>
+                <a:cs typeface="Malgun Gothic" pitchFamily="34" charset="-120"/>
+              </a:rPr>
+              <a:t>주의 (≥ 75%)</a:t>
+            </a:r>
+            <a:endParaRPr lang="en-US" sz="1100" dirty="0"/>
+          </a:p>
+        </p:txBody>
+      </p:sp>
+      <p:sp>
+        <p:nvSpPr>
+          <p:cNvPr id="37" name="Shape 35"/>
+          <p:cNvSpPr/>
+          <p:nvPr/>
+        </p:nvSpPr>
+        <p:spPr>
+          <a:xfrm>
+            <a:off x="6309360" y="4617720"/>
+            <a:ext cx="640080" cy="640080"/>
+          </a:xfrm>
+          <a:prstGeom prst="roundRect">
+            <a:avLst>
+              <a:gd name="adj" fmla="val 11429"/>
+            </a:avLst>
+          </a:prstGeom>
+          <a:solidFill>
+            <a:srgbClr val="FF5C5C"/>
+          </a:solidFill>
+          <a:ln w="12700">
+            <a:solidFill>
+              <a:srgbClr val="2A2E38"/>
+            </a:solidFill>
+            <a:prstDash val="solid"/>
+          </a:ln>
+        </p:spPr>
+      </p:sp>
+      <p:sp>
+        <p:nvSpPr>
+          <p:cNvPr id="38" name="Text 36"/>
+          <p:cNvSpPr txBox="1"/>
+          <p:nvPr/>
+        </p:nvSpPr>
+        <p:spPr>
+          <a:xfrm>
+            <a:off x="7132320" y="4636008"/>
+            <a:ext cx="2194560" cy="274320"/>
+          </a:xfrm>
+          <a:prstGeom prst="rect">
+            <a:avLst/>
+          </a:prstGeom>
+          <a:noFill/>
+          <a:ln/>
+        </p:spPr>
+        <p:txBody>
+          <a:bodyPr wrap="square" lIns="0" tIns="0" rIns="0" bIns="0" rtlCol="0" anchor="t"/>
+          <a:lstStyle/>
+          <a:p>
+            <a:pPr algn="l" indent="0" marL="0">
+              <a:lnSpc>
+                <a:spcPct val="100000"/>
+              </a:lnSpc>
+              <a:buNone/>
+            </a:pPr>
+            <a:r>
+              <a:rPr lang="en-US" sz="1300" b="1" dirty="0">
+                <a:solidFill>
+                  <a:srgbClr val="E6E9EF"/>
+                </a:solidFill>
+                <a:latin typeface="Malgun Gothic" pitchFamily="34" charset="0"/>
+                <a:ea typeface="Malgun Gothic" pitchFamily="34" charset="-122"/>
+                <a:cs typeface="Malgun Gothic" pitchFamily="34" charset="-120"/>
+              </a:rPr>
+              <a:t>Error</a:t>
+            </a:r>
+            <a:endParaRPr lang="en-US" sz="1300" dirty="0"/>
+          </a:p>
+        </p:txBody>
+      </p:sp>
+      <p:sp>
+        <p:nvSpPr>
+          <p:cNvPr id="39" name="Text 37"/>
+          <p:cNvSpPr txBox="1"/>
+          <p:nvPr/>
+        </p:nvSpPr>
+        <p:spPr>
+          <a:xfrm>
+            <a:off x="7132320" y="4892040"/>
+            <a:ext cx="2194560" cy="274320"/>
+          </a:xfrm>
+          <a:prstGeom prst="rect">
+            <a:avLst/>
+          </a:prstGeom>
+          <a:noFill/>
+          <a:ln/>
+        </p:spPr>
+        <p:txBody>
+          <a:bodyPr wrap="square" lIns="0" tIns="0" rIns="0" bIns="0" rtlCol="0" anchor="t"/>
+          <a:lstStyle/>
+          <a:p>
+            <a:pPr algn="l" indent="0" marL="0">
+              <a:lnSpc>
+                <a:spcPct val="100000"/>
+              </a:lnSpc>
+              <a:buNone/>
+            </a:pPr>
+            <a:r>
+              <a:rPr lang="en-US" sz="1050" dirty="0">
+                <a:solidFill>
+                  <a:srgbClr val="8A9099"/>
+                </a:solidFill>
+                <a:latin typeface="Malgun Gothic" pitchFamily="34" charset="0"/>
+                <a:ea typeface="Malgun Gothic" pitchFamily="34" charset="-122"/>
+                <a:cs typeface="Malgun Gothic" pitchFamily="34" charset="-120"/>
+              </a:rPr>
+              <a:t>#FF5C5C</a:t>
+            </a:r>
+            <a:endParaRPr lang="en-US" sz="1050" dirty="0"/>
+          </a:p>
+        </p:txBody>
+      </p:sp>
+      <p:sp>
+        <p:nvSpPr>
+          <p:cNvPr id="40" name="Text 38"/>
+          <p:cNvSpPr txBox="1"/>
+          <p:nvPr/>
+        </p:nvSpPr>
+        <p:spPr>
+          <a:xfrm>
+            <a:off x="9326880" y="4754880"/>
+            <a:ext cx="2468880" cy="365760"/>
+          </a:xfrm>
+          <a:prstGeom prst="rect">
+            <a:avLst/>
+          </a:prstGeom>
+          <a:noFill/>
+          <a:ln/>
+        </p:spPr>
+        <p:txBody>
+          <a:bodyPr wrap="square" lIns="0" tIns="0" rIns="0" bIns="0" rtlCol="0" anchor="t"/>
+          <a:lstStyle/>
+          <a:p>
+            <a:pPr algn="l" indent="0" marL="0">
+              <a:lnSpc>
+                <a:spcPct val="100000"/>
+              </a:lnSpc>
+              <a:buNone/>
+            </a:pPr>
+            <a:r>
+              <a:rPr lang="en-US" sz="1100" dirty="0">
+                <a:solidFill>
+                  <a:srgbClr val="8A9099"/>
+                </a:solidFill>
+                <a:latin typeface="Malgun Gothic" pitchFamily="34" charset="0"/>
+                <a:ea typeface="Malgun Gothic" pitchFamily="34" charset="-122"/>
+                <a:cs typeface="Malgun Gothic" pitchFamily="34" charset="-120"/>
+              </a:rPr>
+              <a:t>오류 (≥ 90%)</a:t>
+            </a:r>
+            <a:endParaRPr lang="en-US" sz="1100" dirty="0"/>
+          </a:p>
+        </p:txBody>
+      </p:sp>
+      <p:sp>
+        <p:nvSpPr>
+          <p:cNvPr id="41" name="Shape 39"/>
+          <p:cNvSpPr/>
+          <p:nvPr/>
+        </p:nvSpPr>
+        <p:spPr>
+          <a:xfrm>
+            <a:off x="6309360" y="5486400"/>
+            <a:ext cx="640080" cy="640080"/>
+          </a:xfrm>
+          <a:prstGeom prst="roundRect">
+            <a:avLst>
+              <a:gd name="adj" fmla="val 11429"/>
+            </a:avLst>
+          </a:prstGeom>
+          <a:solidFill>
+            <a:srgbClr val="6B7280"/>
+          </a:solidFill>
+          <a:ln w="12700">
+            <a:solidFill>
+              <a:srgbClr val="2A2E38"/>
+            </a:solidFill>
+            <a:prstDash val="solid"/>
+          </a:ln>
+        </p:spPr>
+      </p:sp>
+      <p:sp>
+        <p:nvSpPr>
+          <p:cNvPr id="42" name="Text 40"/>
+          <p:cNvSpPr txBox="1"/>
+          <p:nvPr/>
+        </p:nvSpPr>
+        <p:spPr>
+          <a:xfrm>
+            <a:off x="7132320" y="5504688"/>
+            <a:ext cx="2194560" cy="274320"/>
+          </a:xfrm>
+          <a:prstGeom prst="rect">
+            <a:avLst/>
+          </a:prstGeom>
+          <a:noFill/>
+          <a:ln/>
+        </p:spPr>
+        <p:txBody>
+          <a:bodyPr wrap="square" lIns="0" tIns="0" rIns="0" bIns="0" rtlCol="0" anchor="t"/>
+          <a:lstStyle/>
+          <a:p>
+            <a:pPr algn="l" indent="0" marL="0">
+              <a:lnSpc>
+                <a:spcPct val="100000"/>
+              </a:lnSpc>
+              <a:buNone/>
+            </a:pPr>
+            <a:r>
+              <a:rPr lang="en-US" sz="1300" b="1" dirty="0">
+                <a:solidFill>
+                  <a:srgbClr val="E6E9EF"/>
+                </a:solidFill>
+                <a:latin typeface="Malgun Gothic" pitchFamily="34" charset="0"/>
+                <a:ea typeface="Malgun Gothic" pitchFamily="34" charset="-122"/>
+                <a:cs typeface="Malgun Gothic" pitchFamily="34" charset="-120"/>
+              </a:rPr>
+              <a:t>Offline</a:t>
+            </a:r>
+            <a:endParaRPr lang="en-US" sz="1300" dirty="0"/>
+          </a:p>
+        </p:txBody>
+      </p:sp>
+      <p:sp>
+        <p:nvSpPr>
+          <p:cNvPr id="43" name="Text 41"/>
+          <p:cNvSpPr txBox="1"/>
+          <p:nvPr/>
+        </p:nvSpPr>
+        <p:spPr>
+          <a:xfrm>
+            <a:off x="7132320" y="5760720"/>
+            <a:ext cx="2194560" cy="274320"/>
+          </a:xfrm>
+          <a:prstGeom prst="rect">
+            <a:avLst/>
+          </a:prstGeom>
+          <a:noFill/>
+          <a:ln/>
+        </p:spPr>
+        <p:txBody>
+          <a:bodyPr wrap="square" lIns="0" tIns="0" rIns="0" bIns="0" rtlCol="0" anchor="t"/>
+          <a:lstStyle/>
+          <a:p>
+            <a:pPr algn="l" indent="0" marL="0">
+              <a:lnSpc>
+                <a:spcPct val="100000"/>
+              </a:lnSpc>
+              <a:buNone/>
+            </a:pPr>
+            <a:r>
+              <a:rPr lang="en-US" sz="1050" dirty="0">
+                <a:solidFill>
+                  <a:srgbClr val="8A9099"/>
+                </a:solidFill>
+                <a:latin typeface="Malgun Gothic" pitchFamily="34" charset="0"/>
+                <a:ea typeface="Malgun Gothic" pitchFamily="34" charset="-122"/>
+                <a:cs typeface="Malgun Gothic" pitchFamily="34" charset="-120"/>
+              </a:rPr>
+              <a:t>#6B7280</a:t>
+            </a:r>
+            <a:endParaRPr lang="en-US" sz="1050" dirty="0"/>
+          </a:p>
+        </p:txBody>
+      </p:sp>
+      <p:sp>
+        <p:nvSpPr>
+          <p:cNvPr id="44" name="Text 42"/>
+          <p:cNvSpPr txBox="1"/>
+          <p:nvPr/>
+        </p:nvSpPr>
+        <p:spPr>
+          <a:xfrm>
+            <a:off x="9326880" y="5623560"/>
+            <a:ext cx="2468880" cy="365760"/>
+          </a:xfrm>
+          <a:prstGeom prst="rect">
+            <a:avLst/>
+          </a:prstGeom>
+          <a:noFill/>
+          <a:ln/>
+        </p:spPr>
+        <p:txBody>
+          <a:bodyPr wrap="square" lIns="0" tIns="0" rIns="0" bIns="0" rtlCol="0" anchor="t"/>
+          <a:lstStyle/>
+          <a:p>
+            <a:pPr algn="l" indent="0" marL="0">
+              <a:lnSpc>
+                <a:spcPct val="100000"/>
+              </a:lnSpc>
+              <a:buNone/>
+            </a:pPr>
+            <a:r>
+              <a:rPr lang="en-US" sz="1100" dirty="0">
+                <a:solidFill>
+                  <a:srgbClr val="8A9099"/>
+                </a:solidFill>
+                <a:latin typeface="Malgun Gothic" pitchFamily="34" charset="0"/>
+                <a:ea typeface="Malgun Gothic" pitchFamily="34" charset="-122"/>
+                <a:cs typeface="Malgun Gothic" pitchFamily="34" charset="-120"/>
+              </a:rPr>
+              <a:t>오프라인</a:t>
+            </a:r>
+            <a:endParaRPr lang="en-US" sz="1100" dirty="0"/>
+          </a:p>
+        </p:txBody>
+      </p:sp>
+      <p:sp>
+        <p:nvSpPr>
+          <p:cNvPr id="45" name="Shape 43"/>
+          <p:cNvSpPr/>
+          <p:nvPr/>
+        </p:nvSpPr>
+        <p:spPr>
+          <a:xfrm>
+            <a:off x="640080" y="6382512"/>
+            <a:ext cx="10911535" cy="0"/>
+          </a:xfrm>
+          <a:prstGeom prst="line">
+            <a:avLst/>
+          </a:prstGeom>
+          <a:noFill/>
+          <a:ln w="12700">
+            <a:solidFill>
+              <a:srgbClr val="2A2E38"/>
+            </a:solidFill>
+            <a:prstDash val="solid"/>
+          </a:ln>
+        </p:spPr>
+      </p:sp>
+      <p:sp>
+        <p:nvSpPr>
+          <p:cNvPr id="46" name="Text 44"/>
+          <p:cNvSpPr txBox="1"/>
+          <p:nvPr/>
+        </p:nvSpPr>
+        <p:spPr>
+          <a:xfrm>
+            <a:off x="640080" y="6455664"/>
+            <a:ext cx="5486400" cy="274320"/>
+          </a:xfrm>
+          <a:prstGeom prst="rect">
+            <a:avLst/>
+          </a:prstGeom>
+          <a:noFill/>
+          <a:ln/>
+        </p:spPr>
+        <p:txBody>
+          <a:bodyPr wrap="square" lIns="0" tIns="0" rIns="0" bIns="0" rtlCol="0" anchor="t"/>
+          <a:lstStyle/>
+          <a:p>
+            <a:pPr algn="l" indent="0" marL="0">
+              <a:lnSpc>
+                <a:spcPct val="100000"/>
+              </a:lnSpc>
+              <a:buNone/>
+            </a:pPr>
+            <a:r>
+              <a:rPr lang="en-US" sz="1000" dirty="0">
+                <a:solidFill>
+                  <a:srgbClr val="8A9099"/>
+                </a:solidFill>
+                <a:latin typeface="Malgun Gothic" pitchFamily="34" charset="0"/>
+                <a:ea typeface="Malgun Gothic" pitchFamily="34" charset="-122"/>
+                <a:cs typeface="Malgun Gothic" pitchFamily="34" charset="-120"/>
+              </a:rPr>
+              <a:t>Servex — 디자인 상세</a:t>
+            </a:r>
+            <a:endParaRPr lang="en-US" sz="1000" dirty="0"/>
+          </a:p>
+        </p:txBody>
+      </p:sp>
+      <p:sp>
+        <p:nvSpPr>
+          <p:cNvPr id="47" name="Text 45"/>
+          <p:cNvSpPr txBox="1"/>
+          <p:nvPr/>
+        </p:nvSpPr>
+        <p:spPr>
+          <a:xfrm>
+            <a:off x="9722815" y="6455664"/>
+            <a:ext cx="1828800" cy="274320"/>
+          </a:xfrm>
+          <a:prstGeom prst="rect">
+            <a:avLst/>
+          </a:prstGeom>
+          <a:noFill/>
+          <a:ln/>
+        </p:spPr>
+        <p:txBody>
+          <a:bodyPr wrap="square" lIns="0" tIns="0" rIns="0" bIns="0" rtlCol="0" anchor="t"/>
+          <a:lstStyle/>
+          <a:p>
+            <a:pPr algn="r" indent="0" marL="0">
+              <a:lnSpc>
+                <a:spcPct val="100000"/>
+              </a:lnSpc>
+              <a:buNone/>
+            </a:pPr>
+            <a:r>
+              <a:rPr lang="en-US" sz="1000" dirty="0">
+                <a:solidFill>
+                  <a:srgbClr val="8A9099"/>
+                </a:solidFill>
+                <a:latin typeface="Malgun Gothic" pitchFamily="34" charset="0"/>
+                <a:ea typeface="Malgun Gothic" pitchFamily="34" charset="-122"/>
+                <a:cs typeface="Malgun Gothic" pitchFamily="34" charset="-120"/>
+              </a:rPr>
+              <a:t>8 / 11</a:t>
+            </a:r>
+            <a:endParaRPr lang="en-US" sz="1000" dirty="0"/>
+          </a:p>
+        </p:txBody>
+      </p:sp>
+    </p:spTree>
+  </p:cSld>
+  <p:clrMapOvr>
+    <a:masterClrMapping/>
+  </p:clrMapOvr>
+</p:sld>
+</file>
+
+<file path=ppt/slides/slide7.xml><?xml version="1.0" encoding="utf-8"?>
+<p:sld xmlns:a="http://schemas.openxmlformats.org/drawingml/2006/main" xmlns:r="http://schemas.openxmlformats.org/officeDocument/2006/relationships" xmlns:p="http://schemas.openxmlformats.org/presentationml/2006/main">
+  <p:cSld name="Slide 7">
+    <p:bg>
+      <p:bgPr>
+        <a:solidFill>
+          <a:srgbClr val="06070A"/>
+        </a:solidFill>
+      </p:bgPr>
+    </p:bg>
+    <p:spTree>
+      <p:nvGrpSpPr>
+        <p:cNvPr id="1" name=""/>
+        <p:cNvGrpSpPr/>
+        <p:nvPr/>
+      </p:nvGrpSpPr>
+      <p:grpSpPr>
+        <a:xfrm>
+          <a:off x="0" y="0"/>
+          <a:ext cx="0" cy="0"/>
+          <a:chOff x="0" y="0"/>
+          <a:chExt cx="0" cy="0"/>
+        </a:xfrm>
+      </p:grpSpPr>
+      <p:sp>
+        <p:nvSpPr>
+          <p:cNvPr id="2" name="Text 0"/>
+          <p:cNvSpPr txBox="1"/>
+          <p:nvPr/>
+        </p:nvSpPr>
+        <p:spPr>
+          <a:xfrm>
+            <a:off x="640080" y="457200"/>
+            <a:ext cx="10911535" cy="274320"/>
+          </a:xfrm>
+          <a:prstGeom prst="rect">
+            <a:avLst/>
+          </a:prstGeom>
+          <a:noFill/>
+          <a:ln/>
+        </p:spPr>
+        <p:txBody>
+          <a:bodyPr wrap="square" lIns="0" tIns="0" rIns="0" bIns="0" rtlCol="0" anchor="t"/>
+          <a:lstStyle/>
+          <a:p>
+            <a:pPr algn="l" indent="0" marL="0">
+              <a:lnSpc>
+                <a:spcPct val="100000"/>
+              </a:lnSpc>
+              <a:buNone/>
+            </a:pPr>
+            <a:r>
+              <a:rPr lang="en-US" sz="1100" b="1" spc="200" kern="0" dirty="0">
+                <a:solidFill>
+                  <a:srgbClr val="4C8DFF"/>
+                </a:solidFill>
+                <a:latin typeface="Malgun Gothic" pitchFamily="34" charset="0"/>
+                <a:ea typeface="Malgun Gothic" pitchFamily="34" charset="-122"/>
+                <a:cs typeface="Malgun Gothic" pitchFamily="34" charset="-120"/>
+              </a:rPr>
+              <a:t>COMPONENTS</a:t>
+            </a:r>
+            <a:endParaRPr lang="en-US" sz="1100" dirty="0"/>
+          </a:p>
+        </p:txBody>
+      </p:sp>
+      <p:sp>
+        <p:nvSpPr>
+          <p:cNvPr id="3" name="Text 1"/>
+          <p:cNvSpPr txBox="1"/>
+          <p:nvPr/>
+        </p:nvSpPr>
+        <p:spPr>
+          <a:xfrm>
+            <a:off x="640080" y="731520"/>
+            <a:ext cx="10911535" cy="548640"/>
+          </a:xfrm>
+          <a:prstGeom prst="rect">
+            <a:avLst/>
+          </a:prstGeom>
+          <a:noFill/>
+          <a:ln/>
+        </p:spPr>
+        <p:txBody>
+          <a:bodyPr wrap="square" lIns="0" tIns="0" rIns="0" bIns="0" rtlCol="0" anchor="t"/>
+          <a:lstStyle/>
+          <a:p>
+            <a:pPr algn="l" indent="0" marL="0">
+              <a:lnSpc>
+                <a:spcPct val="100000"/>
+              </a:lnSpc>
+              <a:buNone/>
+            </a:pPr>
+            <a:r>
+              <a:rPr lang="en-US" sz="2600" b="1" dirty="0">
+                <a:solidFill>
+                  <a:srgbClr val="E6E9EF"/>
+                </a:solidFill>
+                <a:latin typeface="Malgun Gothic" pitchFamily="34" charset="0"/>
+                <a:ea typeface="Malgun Gothic" pitchFamily="34" charset="-122"/>
+                <a:cs typeface="Malgun Gothic" pitchFamily="34" charset="-120"/>
+              </a:rPr>
+              <a:t>컴포넌트</a:t>
+            </a:r>
+            <a:endParaRPr lang="en-US" sz="2600" dirty="0"/>
+          </a:p>
+        </p:txBody>
+      </p:sp>
+      <p:sp>
+        <p:nvSpPr>
+          <p:cNvPr id="4" name="Text 2"/>
+          <p:cNvSpPr txBox="1"/>
+          <p:nvPr/>
+        </p:nvSpPr>
+        <p:spPr>
+          <a:xfrm>
+            <a:off x="640080" y="1298448"/>
+            <a:ext cx="10911535" cy="347472"/>
+          </a:xfrm>
+          <a:prstGeom prst="rect">
+            <a:avLst/>
+          </a:prstGeom>
+          <a:noFill/>
+          <a:ln/>
+        </p:spPr>
+        <p:txBody>
+          <a:bodyPr wrap="square" lIns="0" tIns="0" rIns="0" bIns="0" rtlCol="0" anchor="t"/>
+          <a:lstStyle/>
+          <a:p>
+            <a:pPr algn="l" indent="0" marL="0">
+              <a:lnSpc>
+                <a:spcPct val="100000"/>
+              </a:lnSpc>
+              <a:buNone/>
+            </a:pPr>
+            <a:r>
+              <a:rPr lang="en-US" sz="1200" dirty="0">
+                <a:solidFill>
+                  <a:srgbClr val="8A9099"/>
+                </a:solidFill>
+                <a:latin typeface="Malgun Gothic" pitchFamily="34" charset="0"/>
+                <a:ea typeface="Malgun Gothic" pitchFamily="34" charset="-122"/>
+                <a:cs typeface="Malgun Gothic" pitchFamily="34" charset="-120"/>
+              </a:rPr>
+              <a:t>버튼·상태칩·입력·스위치의 상태를 일관되게 유지합니다.</a:t>
+            </a:r>
+            <a:endParaRPr lang="en-US" sz="1200" dirty="0"/>
+          </a:p>
+        </p:txBody>
+      </p:sp>
+      <p:sp>
+        <p:nvSpPr>
+          <p:cNvPr id="5" name="Text 3"/>
+          <p:cNvSpPr txBox="1"/>
+          <p:nvPr/>
+        </p:nvSpPr>
+        <p:spPr>
+          <a:xfrm>
+            <a:off x="640080" y="1965960"/>
+            <a:ext cx="5486400" cy="228600"/>
+          </a:xfrm>
+          <a:prstGeom prst="rect">
+            <a:avLst/>
+          </a:prstGeom>
+          <a:noFill/>
+          <a:ln/>
+        </p:spPr>
+        <p:txBody>
+          <a:bodyPr wrap="square" lIns="0" tIns="0" rIns="0" bIns="0" rtlCol="0" anchor="t"/>
+          <a:lstStyle/>
+          <a:p>
+            <a:pPr algn="l" indent="0" marL="0">
+              <a:lnSpc>
+                <a:spcPct val="100000"/>
+              </a:lnSpc>
+              <a:buNone/>
+            </a:pPr>
+            <a:r>
+              <a:rPr lang="en-US" sz="1050" b="1" spc="150" kern="0" dirty="0">
+                <a:solidFill>
+                  <a:srgbClr val="8A9099"/>
+                </a:solidFill>
+                <a:latin typeface="Malgun Gothic" pitchFamily="34" charset="0"/>
+                <a:ea typeface="Malgun Gothic" pitchFamily="34" charset="-122"/>
+                <a:cs typeface="Malgun Gothic" pitchFamily="34" charset="-120"/>
+              </a:rPr>
+              <a:t>BUTTONS</a:t>
+            </a:r>
+            <a:endParaRPr lang="en-US" sz="1050" dirty="0"/>
+          </a:p>
+        </p:txBody>
+      </p:sp>
+      <p:sp>
+        <p:nvSpPr>
+          <p:cNvPr id="6" name="Shape 4"/>
+          <p:cNvSpPr/>
+          <p:nvPr/>
+        </p:nvSpPr>
+        <p:spPr>
+          <a:xfrm>
+            <a:off x="640080" y="2240280"/>
+            <a:ext cx="1554480" cy="457200"/>
+          </a:xfrm>
+          <a:prstGeom prst="roundRect">
+            <a:avLst>
+              <a:gd name="adj" fmla="val 20000"/>
+            </a:avLst>
+          </a:prstGeom>
+          <a:solidFill>
+            <a:srgbClr val="4C8DFF"/>
+          </a:solidFill>
+          <a:ln/>
+        </p:spPr>
+      </p:sp>
+      <p:sp>
+        <p:nvSpPr>
+          <p:cNvPr id="7" name="Text 5"/>
+          <p:cNvSpPr txBox="1"/>
+          <p:nvPr/>
+        </p:nvSpPr>
+        <p:spPr>
+          <a:xfrm>
+            <a:off x="640080" y="2240280"/>
+            <a:ext cx="1554480" cy="457200"/>
+          </a:xfrm>
+          <a:prstGeom prst="rect">
+            <a:avLst/>
+          </a:prstGeom>
+          <a:noFill/>
+          <a:ln/>
+        </p:spPr>
+        <p:txBody>
+          <a:bodyPr wrap="square" lIns="0" tIns="0" rIns="0" bIns="0" rtlCol="0" anchor="ctr"/>
+          <a:lstStyle/>
+          <a:p>
+            <a:pPr algn="ctr" indent="0" marL="0">
+              <a:lnSpc>
+                <a:spcPct val="100000"/>
+              </a:lnSpc>
+              <a:buNone/>
+            </a:pPr>
+            <a:r>
+              <a:rPr lang="en-US" sz="1200" b="1" dirty="0">
+                <a:solidFill>
+                  <a:srgbClr val="07101F"/>
+                </a:solidFill>
+                <a:latin typeface="Malgun Gothic" pitchFamily="34" charset="0"/>
+                <a:ea typeface="Malgun Gothic" pitchFamily="34" charset="-122"/>
+                <a:cs typeface="Malgun Gothic" pitchFamily="34" charset="-120"/>
+              </a:rPr>
+              <a:t>Primary</a:t>
+            </a:r>
+            <a:endParaRPr lang="en-US" sz="1200" dirty="0"/>
+          </a:p>
+        </p:txBody>
+      </p:sp>
+      <p:sp>
+        <p:nvSpPr>
+          <p:cNvPr id="8" name="Shape 6"/>
+          <p:cNvSpPr/>
+          <p:nvPr/>
+        </p:nvSpPr>
+        <p:spPr>
+          <a:xfrm>
+            <a:off x="2377440" y="2240280"/>
+            <a:ext cx="1554480" cy="457200"/>
+          </a:xfrm>
+          <a:prstGeom prst="roundRect">
+            <a:avLst>
+              <a:gd name="adj" fmla="val 20000"/>
+            </a:avLst>
+          </a:prstGeom>
+          <a:solidFill>
+            <a:srgbClr val="0F1115"/>
+          </a:solidFill>
+          <a:ln w="19050">
+            <a:solidFill>
+              <a:srgbClr val="4C8DFF"/>
+            </a:solidFill>
+            <a:prstDash val="solid"/>
+          </a:ln>
+        </p:spPr>
+      </p:sp>
+      <p:sp>
+        <p:nvSpPr>
+          <p:cNvPr id="9" name="Text 7"/>
+          <p:cNvSpPr txBox="1"/>
+          <p:nvPr/>
+        </p:nvSpPr>
+        <p:spPr>
+          <a:xfrm>
+            <a:off x="2377440" y="2240280"/>
+            <a:ext cx="1554480" cy="457200"/>
+          </a:xfrm>
+          <a:prstGeom prst="rect">
+            <a:avLst/>
+          </a:prstGeom>
+          <a:noFill/>
+          <a:ln/>
+        </p:spPr>
+        <p:txBody>
+          <a:bodyPr wrap="square" lIns="0" tIns="0" rIns="0" bIns="0" rtlCol="0" anchor="ctr"/>
+          <a:lstStyle/>
+          <a:p>
+            <a:pPr algn="ctr" indent="0" marL="0">
+              <a:lnSpc>
+                <a:spcPct val="100000"/>
+              </a:lnSpc>
+              <a:buNone/>
+            </a:pPr>
+            <a:r>
+              <a:rPr lang="en-US" sz="1200" b="1" dirty="0">
+                <a:solidFill>
+                  <a:srgbClr val="4C8DFF"/>
+                </a:solidFill>
+                <a:latin typeface="Malgun Gothic" pitchFamily="34" charset="0"/>
+                <a:ea typeface="Malgun Gothic" pitchFamily="34" charset="-122"/>
+                <a:cs typeface="Malgun Gothic" pitchFamily="34" charset="-120"/>
+              </a:rPr>
+              <a:t>Outlined</a:t>
+            </a:r>
+            <a:endParaRPr lang="en-US" sz="1200" dirty="0"/>
+          </a:p>
+        </p:txBody>
+      </p:sp>
+      <p:sp>
+        <p:nvSpPr>
+          <p:cNvPr id="10" name="Shape 8"/>
+          <p:cNvSpPr/>
+          <p:nvPr/>
+        </p:nvSpPr>
+        <p:spPr>
+          <a:xfrm>
+            <a:off x="4114800" y="2240280"/>
+            <a:ext cx="1371600" cy="457200"/>
+          </a:xfrm>
+          <a:prstGeom prst="roundRect">
+            <a:avLst>
+              <a:gd name="adj" fmla="val 20000"/>
+            </a:avLst>
+          </a:prstGeom>
+          <a:solidFill>
+            <a:srgbClr val="0F1115"/>
+          </a:solidFill>
+          <a:ln/>
+        </p:spPr>
+      </p:sp>
+      <p:sp>
+        <p:nvSpPr>
+          <p:cNvPr id="11" name="Text 9"/>
+          <p:cNvSpPr txBox="1"/>
+          <p:nvPr/>
+        </p:nvSpPr>
+        <p:spPr>
+          <a:xfrm>
+            <a:off x="4114800" y="2240280"/>
+            <a:ext cx="1371600" cy="457200"/>
+          </a:xfrm>
+          <a:prstGeom prst="rect">
+            <a:avLst/>
+          </a:prstGeom>
+          <a:noFill/>
+          <a:ln/>
+        </p:spPr>
+        <p:txBody>
+          <a:bodyPr wrap="square" lIns="0" tIns="0" rIns="0" bIns="0" rtlCol="0" anchor="ctr"/>
+          <a:lstStyle/>
+          <a:p>
+            <a:pPr algn="ctr" indent="0" marL="0">
+              <a:lnSpc>
+                <a:spcPct val="100000"/>
+              </a:lnSpc>
+              <a:buNone/>
+            </a:pPr>
+            <a:r>
+              <a:rPr lang="en-US" sz="1200" dirty="0">
+                <a:solidFill>
+                  <a:srgbClr val="E6E9EF"/>
+                </a:solidFill>
+                <a:latin typeface="Malgun Gothic" pitchFamily="34" charset="0"/>
+                <a:ea typeface="Malgun Gothic" pitchFamily="34" charset="-122"/>
+                <a:cs typeface="Malgun Gothic" pitchFamily="34" charset="-120"/>
+              </a:rPr>
+              <a:t>Ghost</a:t>
+            </a:r>
+            <a:endParaRPr lang="en-US" sz="1200" dirty="0"/>
+          </a:p>
+        </p:txBody>
+      </p:sp>
+      <p:sp>
+        <p:nvSpPr>
+          <p:cNvPr id="12" name="Text 10"/>
+          <p:cNvSpPr txBox="1"/>
+          <p:nvPr/>
+        </p:nvSpPr>
+        <p:spPr>
+          <a:xfrm>
+            <a:off x="640080" y="2788920"/>
+            <a:ext cx="5669280" cy="274320"/>
+          </a:xfrm>
+          <a:prstGeom prst="rect">
+            <a:avLst/>
+          </a:prstGeom>
+          <a:noFill/>
+          <a:ln/>
+        </p:spPr>
+        <p:txBody>
+          <a:bodyPr wrap="square" lIns="0" tIns="0" rIns="0" bIns="0" rtlCol="0" anchor="t"/>
+          <a:lstStyle/>
+          <a:p>
+            <a:pPr algn="l" indent="0" marL="0">
+              <a:lnSpc>
+                <a:spcPct val="100000"/>
+              </a:lnSpc>
+              <a:buNone/>
+            </a:pPr>
+            <a:r>
+              <a:rPr lang="en-US" sz="1050" dirty="0">
+                <a:solidFill>
+                  <a:srgbClr val="8A9099"/>
+                </a:solidFill>
+                <a:latin typeface="Malgun Gothic" pitchFamily="34" charset="0"/>
+                <a:ea typeface="Malgun Gothic" pitchFamily="34" charset="-122"/>
+                <a:cs typeface="Malgun Gothic" pitchFamily="34" charset="-120"/>
+              </a:rPr>
+              <a:t>Pressed 는 색만 어둡게(위치 이동 없음), Disabled 는 35% 투명도.</a:t>
+            </a:r>
+            <a:endParaRPr lang="en-US" sz="1050" dirty="0"/>
+          </a:p>
+        </p:txBody>
+      </p:sp>
+      <p:sp>
+        <p:nvSpPr>
+          <p:cNvPr id="13" name="Text 11"/>
+          <p:cNvSpPr txBox="1"/>
+          <p:nvPr/>
+        </p:nvSpPr>
+        <p:spPr>
+          <a:xfrm>
+            <a:off x="640080" y="3246120"/>
+            <a:ext cx="5486400" cy="228600"/>
+          </a:xfrm>
+          <a:prstGeom prst="rect">
+            <a:avLst/>
+          </a:prstGeom>
+          <a:noFill/>
+          <a:ln/>
+        </p:spPr>
+        <p:txBody>
+          <a:bodyPr wrap="square" lIns="0" tIns="0" rIns="0" bIns="0" rtlCol="0" anchor="t"/>
+          <a:lstStyle/>
+          <a:p>
+            <a:pPr algn="l" indent="0" marL="0">
+              <a:lnSpc>
+                <a:spcPct val="100000"/>
+              </a:lnSpc>
+              <a:buNone/>
+            </a:pPr>
+            <a:r>
+              <a:rPr lang="en-US" sz="1050" b="1" spc="150" kern="0" dirty="0">
+                <a:solidFill>
+                  <a:srgbClr val="8A9099"/>
+                </a:solidFill>
+                <a:latin typeface="Malgun Gothic" pitchFamily="34" charset="0"/>
+                <a:ea typeface="Malgun Gothic" pitchFamily="34" charset="-122"/>
+                <a:cs typeface="Malgun Gothic" pitchFamily="34" charset="-120"/>
+              </a:rPr>
+              <a:t>STATUS</a:t>
+            </a:r>
+            <a:endParaRPr lang="en-US" sz="1050" dirty="0"/>
+          </a:p>
+        </p:txBody>
+      </p:sp>
+      <p:sp>
+        <p:nvSpPr>
+          <p:cNvPr id="14" name="Shape 12"/>
+          <p:cNvSpPr/>
+          <p:nvPr/>
+        </p:nvSpPr>
+        <p:spPr>
+          <a:xfrm>
+            <a:off x="640080" y="3520440"/>
+            <a:ext cx="1097280" cy="384048"/>
+          </a:xfrm>
+          <a:prstGeom prst="roundRect">
+            <a:avLst>
+              <a:gd name="adj" fmla="val 50000"/>
+            </a:avLst>
+          </a:prstGeom>
+          <a:solidFill>
+            <a:srgbClr val="232732"/>
+          </a:solidFill>
+          <a:ln/>
+        </p:spPr>
+      </p:sp>
+      <p:sp>
+        <p:nvSpPr>
+          <p:cNvPr id="15" name="Text 13"/>
+          <p:cNvSpPr txBox="1"/>
+          <p:nvPr/>
+        </p:nvSpPr>
+        <p:spPr>
+          <a:xfrm>
+            <a:off x="640080" y="3520440"/>
+            <a:ext cx="1097280" cy="384048"/>
+          </a:xfrm>
+          <a:prstGeom prst="rect">
+            <a:avLst/>
+          </a:prstGeom>
+          <a:noFill/>
+          <a:ln/>
+        </p:spPr>
+        <p:txBody>
+          <a:bodyPr wrap="square" lIns="0" tIns="0" rIns="0" bIns="0" rtlCol="0" anchor="ctr"/>
+          <a:lstStyle/>
+          <a:p>
+            <a:pPr algn="ctr" indent="0" marL="0">
+              <a:lnSpc>
+                <a:spcPct val="100000"/>
+              </a:lnSpc>
+              <a:buNone/>
+            </a:pPr>
+            <a:r>
+              <a:rPr lang="en-US" sz="1100" b="1" dirty="0">
+                <a:solidFill>
+                  <a:srgbClr val="3DDC84"/>
+                </a:solidFill>
+                <a:latin typeface="Malgun Gothic" pitchFamily="34" charset="0"/>
+                <a:ea typeface="Malgun Gothic" pitchFamily="34" charset="-122"/>
+                <a:cs typeface="Malgun Gothic" pitchFamily="34" charset="-120"/>
+              </a:rPr>
+              <a:t>Normal</a:t>
+            </a:r>
+            <a:endParaRPr lang="en-US" sz="1100" dirty="0"/>
+          </a:p>
+        </p:txBody>
+      </p:sp>
+      <p:sp>
+        <p:nvSpPr>
+          <p:cNvPr id="16" name="Shape 14"/>
+          <p:cNvSpPr/>
+          <p:nvPr/>
+        </p:nvSpPr>
+        <p:spPr>
+          <a:xfrm>
+            <a:off x="1828800" y="3520440"/>
+            <a:ext cx="1188720" cy="384048"/>
+          </a:xfrm>
+          <a:prstGeom prst="roundRect">
+            <a:avLst>
+              <a:gd name="adj" fmla="val 50000"/>
+            </a:avLst>
+          </a:prstGeom>
+          <a:solidFill>
+            <a:srgbClr val="232732"/>
+          </a:solidFill>
+          <a:ln/>
+        </p:spPr>
+      </p:sp>
+      <p:sp>
+        <p:nvSpPr>
+          <p:cNvPr id="17" name="Text 15"/>
+          <p:cNvSpPr txBox="1"/>
+          <p:nvPr/>
+        </p:nvSpPr>
+        <p:spPr>
+          <a:xfrm>
+            <a:off x="1828800" y="3520440"/>
+            <a:ext cx="1188720" cy="384048"/>
+          </a:xfrm>
+          <a:prstGeom prst="rect">
+            <a:avLst/>
+          </a:prstGeom>
+          <a:noFill/>
+          <a:ln/>
+        </p:spPr>
+        <p:txBody>
+          <a:bodyPr wrap="square" lIns="0" tIns="0" rIns="0" bIns="0" rtlCol="0" anchor="ctr"/>
+          <a:lstStyle/>
+          <a:p>
+            <a:pPr algn="ctr" indent="0" marL="0">
+              <a:lnSpc>
+                <a:spcPct val="100000"/>
+              </a:lnSpc>
+              <a:buNone/>
+            </a:pPr>
+            <a:r>
+              <a:rPr lang="en-US" sz="1100" b="1" dirty="0">
+                <a:solidFill>
+                  <a:srgbClr val="FFC93C"/>
+                </a:solidFill>
+                <a:latin typeface="Malgun Gothic" pitchFamily="34" charset="0"/>
+                <a:ea typeface="Malgun Gothic" pitchFamily="34" charset="-122"/>
+                <a:cs typeface="Malgun Gothic" pitchFamily="34" charset="-120"/>
+              </a:rPr>
+              <a:t>Warning</a:t>
+            </a:r>
+            <a:endParaRPr lang="en-US" sz="1100" dirty="0"/>
+          </a:p>
+        </p:txBody>
+      </p:sp>
+      <p:sp>
+        <p:nvSpPr>
+          <p:cNvPr id="18" name="Shape 16"/>
+          <p:cNvSpPr/>
+          <p:nvPr/>
+        </p:nvSpPr>
+        <p:spPr>
+          <a:xfrm>
+            <a:off x="3108960" y="3520440"/>
+            <a:ext cx="1005840" cy="384048"/>
+          </a:xfrm>
+          <a:prstGeom prst="roundRect">
+            <a:avLst>
+              <a:gd name="adj" fmla="val 50000"/>
+            </a:avLst>
+          </a:prstGeom>
+          <a:solidFill>
+            <a:srgbClr val="232732"/>
+          </a:solidFill>
+          <a:ln/>
+        </p:spPr>
+      </p:sp>
+      <p:sp>
+        <p:nvSpPr>
+          <p:cNvPr id="19" name="Text 17"/>
+          <p:cNvSpPr txBox="1"/>
+          <p:nvPr/>
+        </p:nvSpPr>
+        <p:spPr>
+          <a:xfrm>
+            <a:off x="3108960" y="3520440"/>
+            <a:ext cx="1005840" cy="384048"/>
+          </a:xfrm>
+          <a:prstGeom prst="rect">
+            <a:avLst/>
+          </a:prstGeom>
+          <a:noFill/>
+          <a:ln/>
+        </p:spPr>
+        <p:txBody>
+          <a:bodyPr wrap="square" lIns="0" tIns="0" rIns="0" bIns="0" rtlCol="0" anchor="ctr"/>
+          <a:lstStyle/>
+          <a:p>
+            <a:pPr algn="ctr" indent="0" marL="0">
+              <a:lnSpc>
+                <a:spcPct val="100000"/>
+              </a:lnSpc>
+              <a:buNone/>
+            </a:pPr>
+            <a:r>
+              <a:rPr lang="en-US" sz="1100" b="1" dirty="0">
+                <a:solidFill>
+                  <a:srgbClr val="FF5C5C"/>
+                </a:solidFill>
+                <a:latin typeface="Malgun Gothic" pitchFamily="34" charset="0"/>
+                <a:ea typeface="Malgun Gothic" pitchFamily="34" charset="-122"/>
+                <a:cs typeface="Malgun Gothic" pitchFamily="34" charset="-120"/>
+              </a:rPr>
+              <a:t>Error</a:t>
+            </a:r>
+            <a:endParaRPr lang="en-US" sz="1100" dirty="0"/>
+          </a:p>
+        </p:txBody>
+      </p:sp>
+      <p:sp>
+        <p:nvSpPr>
+          <p:cNvPr id="20" name="Shape 18"/>
+          <p:cNvSpPr/>
+          <p:nvPr/>
+        </p:nvSpPr>
+        <p:spPr>
+          <a:xfrm>
+            <a:off x="4206240" y="3520440"/>
+            <a:ext cx="1188720" cy="384048"/>
+          </a:xfrm>
+          <a:prstGeom prst="roundRect">
+            <a:avLst>
+              <a:gd name="adj" fmla="val 50000"/>
+            </a:avLst>
+          </a:prstGeom>
+          <a:solidFill>
+            <a:srgbClr val="232732"/>
+          </a:solidFill>
+          <a:ln/>
+        </p:spPr>
+      </p:sp>
+      <p:sp>
+        <p:nvSpPr>
+          <p:cNvPr id="21" name="Text 19"/>
+          <p:cNvSpPr txBox="1"/>
+          <p:nvPr/>
+        </p:nvSpPr>
+        <p:spPr>
+          <a:xfrm>
+            <a:off x="4206240" y="3520440"/>
+            <a:ext cx="1188720" cy="384048"/>
+          </a:xfrm>
+          <a:prstGeom prst="rect">
+            <a:avLst/>
+          </a:prstGeom>
+          <a:noFill/>
+          <a:ln/>
+        </p:spPr>
+        <p:txBody>
+          <a:bodyPr wrap="square" lIns="0" tIns="0" rIns="0" bIns="0" rtlCol="0" anchor="ctr"/>
+          <a:lstStyle/>
+          <a:p>
+            <a:pPr algn="ctr" indent="0" marL="0">
+              <a:lnSpc>
+                <a:spcPct val="100000"/>
+              </a:lnSpc>
+              <a:buNone/>
+            </a:pPr>
+            <a:r>
+              <a:rPr lang="en-US" sz="1100" b="1" dirty="0">
+                <a:solidFill>
+                  <a:srgbClr val="6B7280"/>
+                </a:solidFill>
+                <a:latin typeface="Malgun Gothic" pitchFamily="34" charset="0"/>
+                <a:ea typeface="Malgun Gothic" pitchFamily="34" charset="-122"/>
+                <a:cs typeface="Malgun Gothic" pitchFamily="34" charset="-120"/>
+              </a:rPr>
+              <a:t>Offline</a:t>
+            </a:r>
+            <a:endParaRPr lang="en-US" sz="1100" dirty="0"/>
+          </a:p>
+        </p:txBody>
+      </p:sp>
+      <p:sp>
+        <p:nvSpPr>
+          <p:cNvPr id="22" name="Text 20"/>
+          <p:cNvSpPr txBox="1"/>
+          <p:nvPr/>
+        </p:nvSpPr>
+        <p:spPr>
+          <a:xfrm>
+            <a:off x="640080" y="4023360"/>
+            <a:ext cx="5669280" cy="274320"/>
+          </a:xfrm>
+          <a:prstGeom prst="rect">
+            <a:avLst/>
+          </a:prstGeom>
+          <a:noFill/>
+          <a:ln/>
+        </p:spPr>
+        <p:txBody>
+          <a:bodyPr wrap="square" lIns="0" tIns="0" rIns="0" bIns="0" rtlCol="0" anchor="t"/>
+          <a:lstStyle/>
+          <a:p>
+            <a:pPr algn="l" indent="0" marL="0">
+              <a:lnSpc>
+                <a:spcPct val="100000"/>
+              </a:lnSpc>
+              <a:buNone/>
+            </a:pPr>
+            <a:r>
+              <a:rPr lang="en-US" sz="1050" dirty="0">
+                <a:solidFill>
+                  <a:srgbClr val="8A9099"/>
+                </a:solidFill>
+                <a:latin typeface="Malgun Gothic" pitchFamily="34" charset="0"/>
+                <a:ea typeface="Malgun Gothic" pitchFamily="34" charset="-122"/>
+                <a:cs typeface="Malgun Gothic" pitchFamily="34" charset="-120"/>
+              </a:rPr>
+              <a:t>상태는 항상 색 + 아이콘 + 텍스트 3요소로 표시합니다.</a:t>
+            </a:r>
+            <a:endParaRPr lang="en-US" sz="1050" dirty="0"/>
+          </a:p>
+        </p:txBody>
+      </p:sp>
+      <p:sp>
+        <p:nvSpPr>
+          <p:cNvPr id="23" name="Text 21"/>
+          <p:cNvSpPr txBox="1"/>
+          <p:nvPr/>
+        </p:nvSpPr>
+        <p:spPr>
+          <a:xfrm>
+            <a:off x="6675120" y="1965960"/>
+            <a:ext cx="4876495" cy="228600"/>
+          </a:xfrm>
+          <a:prstGeom prst="rect">
+            <a:avLst/>
+          </a:prstGeom>
+          <a:noFill/>
+          <a:ln/>
+        </p:spPr>
+        <p:txBody>
+          <a:bodyPr wrap="square" lIns="0" tIns="0" rIns="0" bIns="0" rtlCol="0" anchor="t"/>
+          <a:lstStyle/>
+          <a:p>
+            <a:pPr algn="l" indent="0" marL="0">
+              <a:lnSpc>
+                <a:spcPct val="100000"/>
+              </a:lnSpc>
+              <a:buNone/>
+            </a:pPr>
+            <a:r>
+              <a:rPr lang="en-US" sz="1050" b="1" spc="150" kern="0" dirty="0">
+                <a:solidFill>
+                  <a:srgbClr val="8A9099"/>
+                </a:solidFill>
+                <a:latin typeface="Malgun Gothic" pitchFamily="34" charset="0"/>
+                <a:ea typeface="Malgun Gothic" pitchFamily="34" charset="-122"/>
+                <a:cs typeface="Malgun Gothic" pitchFamily="34" charset="-120"/>
+              </a:rPr>
+              <a:t>FIELD</a:t>
+            </a:r>
+            <a:endParaRPr lang="en-US" sz="1050" dirty="0"/>
+          </a:p>
+        </p:txBody>
+      </p:sp>
+      <p:sp>
+        <p:nvSpPr>
+          <p:cNvPr id="24" name="Shape 22"/>
+          <p:cNvSpPr/>
+          <p:nvPr/>
+        </p:nvSpPr>
+        <p:spPr>
+          <a:xfrm>
+            <a:off x="6675120" y="2240280"/>
+            <a:ext cx="4876495" cy="731520"/>
+          </a:xfrm>
+          <a:prstGeom prst="roundRect">
+            <a:avLst>
+              <a:gd name="adj" fmla="val 10000"/>
+            </a:avLst>
+          </a:prstGeom>
+          <a:solidFill>
+            <a:srgbClr val="1A1D23"/>
+          </a:solidFill>
+          <a:ln w="19050">
+            <a:solidFill>
+              <a:srgbClr val="4C8DFF"/>
+            </a:solidFill>
+            <a:prstDash val="solid"/>
+          </a:ln>
+        </p:spPr>
+      </p:sp>
+      <p:sp>
+        <p:nvSpPr>
+          <p:cNvPr id="25" name="Text 23"/>
+          <p:cNvSpPr txBox="1"/>
+          <p:nvPr/>
+        </p:nvSpPr>
+        <p:spPr>
+          <a:xfrm>
+            <a:off x="6839712" y="2331720"/>
+            <a:ext cx="4547311" cy="228600"/>
+          </a:xfrm>
+          <a:prstGeom prst="rect">
+            <a:avLst/>
+          </a:prstGeom>
+          <a:noFill/>
+          <a:ln/>
+        </p:spPr>
+        <p:txBody>
+          <a:bodyPr wrap="square" lIns="0" tIns="0" rIns="0" bIns="0" rtlCol="0" anchor="t"/>
+          <a:lstStyle/>
+          <a:p>
+            <a:pPr algn="l" indent="0" marL="0">
+              <a:lnSpc>
+                <a:spcPct val="100000"/>
+              </a:lnSpc>
+              <a:buNone/>
+            </a:pPr>
+            <a:r>
+              <a:rPr lang="en-US" sz="950" dirty="0">
+                <a:solidFill>
+                  <a:srgbClr val="8A9099"/>
+                </a:solidFill>
+                <a:latin typeface="Malgun Gothic" pitchFamily="34" charset="0"/>
+                <a:ea typeface="Malgun Gothic" pitchFamily="34" charset="-122"/>
+                <a:cs typeface="Malgun Gothic" pitchFamily="34" charset="-120"/>
+              </a:rPr>
+              <a:t>Address (host or host:port)</a:t>
+            </a:r>
+            <a:endParaRPr lang="en-US" sz="950" dirty="0"/>
+          </a:p>
+        </p:txBody>
+      </p:sp>
+      <p:sp>
+        <p:nvSpPr>
+          <p:cNvPr id="26" name="Text 24"/>
+          <p:cNvSpPr txBox="1"/>
+          <p:nvPr/>
+        </p:nvSpPr>
+        <p:spPr>
+          <a:xfrm>
+            <a:off x="6839712" y="2578608"/>
+            <a:ext cx="4547311" cy="274320"/>
+          </a:xfrm>
+          <a:prstGeom prst="rect">
+            <a:avLst/>
+          </a:prstGeom>
+          <a:noFill/>
+          <a:ln/>
+        </p:spPr>
+        <p:txBody>
+          <a:bodyPr wrap="square" lIns="0" tIns="0" rIns="0" bIns="0" rtlCol="0" anchor="t"/>
+          <a:lstStyle/>
+          <a:p>
+            <a:pPr algn="l" indent="0" marL="0">
+              <a:lnSpc>
+                <a:spcPct val="100000"/>
+              </a:lnSpc>
+              <a:buNone/>
+            </a:pPr>
+            <a:r>
+              <a:rPr lang="en-US" sz="1200" dirty="0">
+                <a:solidFill>
+                  <a:srgbClr val="E6E9EF"/>
+                </a:solidFill>
+                <a:latin typeface="Malgun Gothic" pitchFamily="34" charset="0"/>
+                <a:ea typeface="Malgun Gothic" pitchFamily="34" charset="-122"/>
+                <a:cs typeface="Malgun Gothic" pitchFamily="34" charset="-120"/>
+              </a:rPr>
+              <a:t>192.168.0.10:8765</a:t>
+            </a:r>
+            <a:endParaRPr lang="en-US" sz="1200" dirty="0"/>
+          </a:p>
+        </p:txBody>
+      </p:sp>
+      <p:sp>
+        <p:nvSpPr>
+          <p:cNvPr id="27" name="Text 25"/>
+          <p:cNvSpPr txBox="1"/>
+          <p:nvPr/>
+        </p:nvSpPr>
+        <p:spPr>
+          <a:xfrm>
+            <a:off x="6675120" y="3063240"/>
+            <a:ext cx="4876495" cy="274320"/>
+          </a:xfrm>
+          <a:prstGeom prst="rect">
+            <a:avLst/>
+          </a:prstGeom>
+          <a:noFill/>
+          <a:ln/>
+        </p:spPr>
+        <p:txBody>
+          <a:bodyPr wrap="square" lIns="0" tIns="0" rIns="0" bIns="0" rtlCol="0" anchor="t"/>
+          <a:lstStyle/>
+          <a:p>
+            <a:pPr algn="l" indent="0" marL="0">
+              <a:lnSpc>
+                <a:spcPct val="100000"/>
+              </a:lnSpc>
+              <a:buNone/>
+            </a:pPr>
+            <a:r>
+              <a:rPr lang="en-US" sz="1050" dirty="0">
+                <a:solidFill>
+                  <a:srgbClr val="8A9099"/>
+                </a:solidFill>
+                <a:latin typeface="Malgun Gothic" pitchFamily="34" charset="0"/>
+                <a:ea typeface="Malgun Gothic" pitchFamily="34" charset="-122"/>
+                <a:cs typeface="Malgun Gothic" pitchFamily="34" charset="-120"/>
+              </a:rPr>
+              <a:t>포커스는 primary 테두리(1.5)로만 표시합니다.</a:t>
+            </a:r>
+            <a:endParaRPr lang="en-US" sz="1050" dirty="0"/>
+          </a:p>
+        </p:txBody>
+      </p:sp>
+      <p:sp>
+        <p:nvSpPr>
+          <p:cNvPr id="28" name="Text 26"/>
+          <p:cNvSpPr txBox="1"/>
+          <p:nvPr/>
+        </p:nvSpPr>
+        <p:spPr>
+          <a:xfrm>
+            <a:off x="6675120" y="3520440"/>
+            <a:ext cx="4876495" cy="228600"/>
+          </a:xfrm>
+          <a:prstGeom prst="rect">
+            <a:avLst/>
+          </a:prstGeom>
+          <a:noFill/>
+          <a:ln/>
+        </p:spPr>
+        <p:txBody>
+          <a:bodyPr wrap="square" lIns="0" tIns="0" rIns="0" bIns="0" rtlCol="0" anchor="t"/>
+          <a:lstStyle/>
+          <a:p>
+            <a:pPr algn="l" indent="0" marL="0">
+              <a:lnSpc>
+                <a:spcPct val="100000"/>
+              </a:lnSpc>
+              <a:buNone/>
+            </a:pPr>
+            <a:r>
+              <a:rPr lang="en-US" sz="1050" b="1" spc="150" kern="0" dirty="0">
+                <a:solidFill>
+                  <a:srgbClr val="8A9099"/>
+                </a:solidFill>
+                <a:latin typeface="Malgun Gothic" pitchFamily="34" charset="0"/>
+                <a:ea typeface="Malgun Gothic" pitchFamily="34" charset="-122"/>
+                <a:cs typeface="Malgun Gothic" pitchFamily="34" charset="-120"/>
+              </a:rPr>
+              <a:t>SWITCH</a:t>
+            </a:r>
+            <a:endParaRPr lang="en-US" sz="1050" dirty="0"/>
+          </a:p>
+        </p:txBody>
+      </p:sp>
+      <p:sp>
+        <p:nvSpPr>
+          <p:cNvPr id="29" name="Text 27"/>
+          <p:cNvSpPr txBox="1"/>
+          <p:nvPr/>
+        </p:nvSpPr>
+        <p:spPr>
+          <a:xfrm>
+            <a:off x="6675120" y="3794760"/>
+            <a:ext cx="3687775" cy="365760"/>
+          </a:xfrm>
+          <a:prstGeom prst="rect">
+            <a:avLst/>
+          </a:prstGeom>
+          <a:noFill/>
+          <a:ln/>
+        </p:spPr>
+        <p:txBody>
+          <a:bodyPr wrap="square" lIns="0" tIns="0" rIns="0" bIns="0" rtlCol="0" anchor="ctr"/>
+          <a:lstStyle/>
+          <a:p>
+            <a:pPr algn="l" indent="0" marL="0">
+              <a:lnSpc>
+                <a:spcPct val="100000"/>
+              </a:lnSpc>
+              <a:buNone/>
+            </a:pPr>
+            <a:r>
+              <a:rPr lang="en-US" sz="1200" dirty="0">
+                <a:solidFill>
+                  <a:srgbClr val="E6E9EF"/>
+                </a:solidFill>
+                <a:latin typeface="Malgun Gothic" pitchFamily="34" charset="0"/>
+                <a:ea typeface="Malgun Gothic" pitchFamily="34" charset="-122"/>
+                <a:cs typeface="Malgun Gothic" pitchFamily="34" charset="-120"/>
+              </a:rPr>
+              <a:t>Background alerts</a:t>
+            </a:r>
+            <a:endParaRPr lang="en-US" sz="1200" dirty="0"/>
+          </a:p>
+        </p:txBody>
+      </p:sp>
+      <p:sp>
+        <p:nvSpPr>
+          <p:cNvPr id="30" name="Shape 28"/>
+          <p:cNvSpPr/>
+          <p:nvPr/>
+        </p:nvSpPr>
+        <p:spPr>
+          <a:xfrm>
+            <a:off x="10545775" y="3822192"/>
+            <a:ext cx="914400" cy="310896"/>
+          </a:xfrm>
+          <a:prstGeom prst="roundRect">
+            <a:avLst>
+              <a:gd name="adj" fmla="val 50000"/>
+            </a:avLst>
+          </a:prstGeom>
+          <a:solidFill>
+            <a:srgbClr val="4C8DFF"/>
+          </a:solidFill>
+          <a:ln/>
+        </p:spPr>
+      </p:sp>
+      <p:sp>
+        <p:nvSpPr>
+          <p:cNvPr id="31" name="Shape 29"/>
+          <p:cNvSpPr/>
+          <p:nvPr/>
+        </p:nvSpPr>
+        <p:spPr>
+          <a:xfrm>
+            <a:off x="11140135" y="3849624"/>
+            <a:ext cx="256032" cy="256032"/>
+          </a:xfrm>
+          <a:prstGeom prst="roundRect">
+            <a:avLst>
+              <a:gd name="adj" fmla="val 50000"/>
+            </a:avLst>
+          </a:prstGeom>
+          <a:solidFill>
+            <a:srgbClr val="FFFFFF"/>
+          </a:solidFill>
+          <a:ln/>
+        </p:spPr>
+      </p:sp>
+      <p:sp>
+        <p:nvSpPr>
+          <p:cNvPr id="32" name="Shape 30"/>
+          <p:cNvSpPr/>
+          <p:nvPr/>
+        </p:nvSpPr>
+        <p:spPr>
+          <a:xfrm>
+            <a:off x="640080" y="6382512"/>
+            <a:ext cx="10911535" cy="0"/>
+          </a:xfrm>
+          <a:prstGeom prst="line">
+            <a:avLst/>
+          </a:prstGeom>
+          <a:noFill/>
+          <a:ln w="12700">
+            <a:solidFill>
+              <a:srgbClr val="2A2E38"/>
+            </a:solidFill>
+            <a:prstDash val="solid"/>
+          </a:ln>
+        </p:spPr>
+      </p:sp>
+      <p:sp>
+        <p:nvSpPr>
+          <p:cNvPr id="33" name="Text 31"/>
+          <p:cNvSpPr txBox="1"/>
+          <p:nvPr/>
+        </p:nvSpPr>
+        <p:spPr>
+          <a:xfrm>
+            <a:off x="640080" y="6455664"/>
+            <a:ext cx="5486400" cy="274320"/>
+          </a:xfrm>
+          <a:prstGeom prst="rect">
+            <a:avLst/>
+          </a:prstGeom>
+          <a:noFill/>
+          <a:ln/>
+        </p:spPr>
+        <p:txBody>
+          <a:bodyPr wrap="square" lIns="0" tIns="0" rIns="0" bIns="0" rtlCol="0" anchor="t"/>
+          <a:lstStyle/>
+          <a:p>
+            <a:pPr algn="l" indent="0" marL="0">
+              <a:lnSpc>
+                <a:spcPct val="100000"/>
+              </a:lnSpc>
+              <a:buNone/>
+            </a:pPr>
+            <a:r>
+              <a:rPr lang="en-US" sz="1000" dirty="0">
+                <a:solidFill>
+                  <a:srgbClr val="8A9099"/>
+                </a:solidFill>
+                <a:latin typeface="Malgun Gothic" pitchFamily="34" charset="0"/>
+                <a:ea typeface="Malgun Gothic" pitchFamily="34" charset="-122"/>
+                <a:cs typeface="Malgun Gothic" pitchFamily="34" charset="-120"/>
+              </a:rPr>
+              <a:t>Servex — 디자인 상세</a:t>
+            </a:r>
+            <a:endParaRPr lang="en-US" sz="1000" dirty="0"/>
+          </a:p>
+        </p:txBody>
+      </p:sp>
+      <p:sp>
+        <p:nvSpPr>
+          <p:cNvPr id="34" name="Text 32"/>
+          <p:cNvSpPr txBox="1"/>
+          <p:nvPr/>
+        </p:nvSpPr>
+        <p:spPr>
+          <a:xfrm>
+            <a:off x="9722815" y="6455664"/>
+            <a:ext cx="1828800" cy="274320"/>
+          </a:xfrm>
+          <a:prstGeom prst="rect">
+            <a:avLst/>
+          </a:prstGeom>
+          <a:noFill/>
+          <a:ln/>
+        </p:spPr>
+        <p:txBody>
+          <a:bodyPr wrap="square" lIns="0" tIns="0" rIns="0" bIns="0" rtlCol="0" anchor="t"/>
+          <a:lstStyle/>
+          <a:p>
+            <a:pPr algn="r" indent="0" marL="0">
+              <a:lnSpc>
+                <a:spcPct val="100000"/>
+              </a:lnSpc>
+              <a:buNone/>
+            </a:pPr>
+            <a:r>
+              <a:rPr lang="en-US" sz="1000" dirty="0">
+                <a:solidFill>
+                  <a:srgbClr val="8A9099"/>
+                </a:solidFill>
+                <a:latin typeface="Malgun Gothic" pitchFamily="34" charset="0"/>
+                <a:ea typeface="Malgun Gothic" pitchFamily="34" charset="-122"/>
+                <a:cs typeface="Malgun Gothic" pitchFamily="34" charset="-120"/>
+              </a:rPr>
+              <a:t>9 / 11</a:t>
+            </a:r>
+            <a:endParaRPr lang="en-US" sz="1000" dirty="0"/>
+          </a:p>
+        </p:txBody>
+      </p:sp>
+    </p:spTree>
+  </p:cSld>
+  <p:clrMapOvr>
+    <a:masterClrMapping/>
+  </p:clrMapOvr>
+</p:sld>
+</file>
+
+<file path=ppt/slides/slide8.xml><?xml version="1.0" encoding="utf-8"?>
+<p:sld xmlns:a="http://schemas.openxmlformats.org/drawingml/2006/main" xmlns:r="http://schemas.openxmlformats.org/officeDocument/2006/relationships" xmlns:p="http://schemas.openxmlformats.org/presentationml/2006/main">
+  <p:cSld name="Slide 8">
+    <p:bg>
+      <p:bgPr>
+        <a:solidFill>
+          <a:srgbClr val="06070A"/>
+        </a:solidFill>
+      </p:bgPr>
+    </p:bg>
+    <p:spTree>
+      <p:nvGrpSpPr>
+        <p:cNvPr id="1" name=""/>
+        <p:cNvGrpSpPr/>
+        <p:nvPr/>
+      </p:nvGrpSpPr>
+      <p:grpSpPr>
+        <a:xfrm>
+          <a:off x="0" y="0"/>
+          <a:ext cx="0" cy="0"/>
+          <a:chOff x="0" y="0"/>
+          <a:chExt cx="0" cy="0"/>
+        </a:xfrm>
+      </p:grpSpPr>
+      <p:sp>
+        <p:nvSpPr>
+          <p:cNvPr id="2" name="Text 0"/>
+          <p:cNvSpPr txBox="1"/>
+          <p:nvPr/>
+        </p:nvSpPr>
+        <p:spPr>
+          <a:xfrm>
+            <a:off x="640080" y="457200"/>
+            <a:ext cx="10911535" cy="274320"/>
+          </a:xfrm>
+          <a:prstGeom prst="rect">
+            <a:avLst/>
+          </a:prstGeom>
+          <a:noFill/>
+          <a:ln/>
+        </p:spPr>
+        <p:txBody>
+          <a:bodyPr wrap="square" lIns="0" tIns="0" rIns="0" bIns="0" rtlCol="0" anchor="t"/>
+          <a:lstStyle/>
+          <a:p>
+            <a:pPr algn="l" indent="0" marL="0">
+              <a:lnSpc>
+                <a:spcPct val="100000"/>
+              </a:lnSpc>
+              <a:buNone/>
+            </a:pPr>
+            <a:r>
+              <a:rPr lang="en-US" sz="1100" b="1" spc="200" kern="0" dirty="0">
+                <a:solidFill>
+                  <a:srgbClr val="4C8DFF"/>
+                </a:solidFill>
+                <a:latin typeface="Malgun Gothic" pitchFamily="34" charset="0"/>
+                <a:ea typeface="Malgun Gothic" pitchFamily="34" charset="-122"/>
+                <a:cs typeface="Malgun Gothic" pitchFamily="34" charset="-120"/>
+              </a:rPr>
+              <a:t>ICONS</a:t>
+            </a:r>
+            <a:endParaRPr lang="en-US" sz="1100" dirty="0"/>
+          </a:p>
+        </p:txBody>
+      </p:sp>
+      <p:sp>
+        <p:nvSpPr>
+          <p:cNvPr id="3" name="Text 1"/>
+          <p:cNvSpPr txBox="1"/>
+          <p:nvPr/>
+        </p:nvSpPr>
+        <p:spPr>
+          <a:xfrm>
+            <a:off x="640080" y="731520"/>
+            <a:ext cx="10911535" cy="548640"/>
+          </a:xfrm>
+          <a:prstGeom prst="rect">
+            <a:avLst/>
+          </a:prstGeom>
+          <a:noFill/>
+          <a:ln/>
+        </p:spPr>
+        <p:txBody>
+          <a:bodyPr wrap="square" lIns="0" tIns="0" rIns="0" bIns="0" rtlCol="0" anchor="t"/>
+          <a:lstStyle/>
+          <a:p>
+            <a:pPr algn="l" indent="0" marL="0">
+              <a:lnSpc>
+                <a:spcPct val="100000"/>
+              </a:lnSpc>
+              <a:buNone/>
+            </a:pPr>
+            <a:r>
+              <a:rPr lang="en-US" sz="2600" b="1" dirty="0">
+                <a:solidFill>
+                  <a:srgbClr val="E6E9EF"/>
+                </a:solidFill>
+                <a:latin typeface="Malgun Gothic" pitchFamily="34" charset="0"/>
+                <a:ea typeface="Malgun Gothic" pitchFamily="34" charset="-122"/>
+                <a:cs typeface="Malgun Gothic" pitchFamily="34" charset="-120"/>
+              </a:rPr>
+              <a:t>아이콘</a:t>
+            </a:r>
+            <a:endParaRPr lang="en-US" sz="2600" dirty="0"/>
+          </a:p>
+        </p:txBody>
+      </p:sp>
+      <p:sp>
+        <p:nvSpPr>
+          <p:cNvPr id="4" name="Text 2"/>
+          <p:cNvSpPr txBox="1"/>
+          <p:nvPr/>
+        </p:nvSpPr>
+        <p:spPr>
+          <a:xfrm>
+            <a:off x="640080" y="1298448"/>
+            <a:ext cx="10911535" cy="347472"/>
+          </a:xfrm>
+          <a:prstGeom prst="rect">
+            <a:avLst/>
+          </a:prstGeom>
+          <a:noFill/>
+          <a:ln/>
+        </p:spPr>
+        <p:txBody>
+          <a:bodyPr wrap="square" lIns="0" tIns="0" rIns="0" bIns="0" rtlCol="0" anchor="t"/>
+          <a:lstStyle/>
+          <a:p>
+            <a:pPr algn="l" indent="0" marL="0">
+              <a:lnSpc>
+                <a:spcPct val="100000"/>
+              </a:lnSpc>
+              <a:buNone/>
+            </a:pPr>
+            <a:r>
+              <a:rPr lang="en-US" sz="1200" dirty="0">
+                <a:solidFill>
+                  <a:srgbClr val="8A9099"/>
+                </a:solidFill>
+                <a:latin typeface="Malgun Gothic" pitchFamily="34" charset="0"/>
+                <a:ea typeface="Malgun Gothic" pitchFamily="34" charset="-122"/>
+                <a:cs typeface="Malgun Gothic" pitchFamily="34" charset="-120"/>
+              </a:rPr>
+              <a:t>직접 그린 선형 벡터만 사용합니다 (24dp · 2dp · 둥근 끝). 이모지 금지.</a:t>
+            </a:r>
+            <a:endParaRPr lang="en-US" sz="1200" dirty="0"/>
+          </a:p>
+        </p:txBody>
+      </p:sp>
+      <p:sp>
+        <p:nvSpPr>
+          <p:cNvPr id="5" name="Text 3"/>
+          <p:cNvSpPr txBox="1"/>
+          <p:nvPr/>
+        </p:nvSpPr>
+        <p:spPr>
+          <a:xfrm>
+            <a:off x="640080" y="2103120"/>
+            <a:ext cx="1280160" cy="274320"/>
+          </a:xfrm>
+          <a:prstGeom prst="rect">
+            <a:avLst/>
+          </a:prstGeom>
+          <a:noFill/>
+          <a:ln/>
+        </p:spPr>
+        <p:txBody>
+          <a:bodyPr wrap="square" lIns="0" tIns="0" rIns="0" bIns="0" rtlCol="0" anchor="ctr"/>
+          <a:lstStyle/>
+          <a:p>
+            <a:pPr algn="l" indent="0" marL="0">
+              <a:lnSpc>
+                <a:spcPct val="100000"/>
+              </a:lnSpc>
+              <a:buNone/>
+            </a:pPr>
+            <a:r>
+              <a:rPr lang="en-US" sz="1200" b="1" dirty="0">
+                <a:solidFill>
+                  <a:srgbClr val="8A9099"/>
+                </a:solidFill>
+                <a:latin typeface="Malgun Gothic" pitchFamily="34" charset="0"/>
+                <a:ea typeface="Malgun Gothic" pitchFamily="34" charset="-122"/>
+                <a:cs typeface="Malgun Gothic" pitchFamily="34" charset="-120"/>
+              </a:rPr>
+              <a:t>상태</a:t>
+            </a:r>
+            <a:endParaRPr lang="en-US" sz="1200" dirty="0"/>
+          </a:p>
+        </p:txBody>
+      </p:sp>
+      <p:sp>
+        <p:nvSpPr>
+          <p:cNvPr id="6" name="Shape 4"/>
+          <p:cNvSpPr/>
+          <p:nvPr/>
+        </p:nvSpPr>
+        <p:spPr>
+          <a:xfrm>
+            <a:off x="2011680" y="2011680"/>
+            <a:ext cx="777240" cy="777240"/>
+          </a:xfrm>
+          <a:prstGeom prst="roundRect">
+            <a:avLst>
+              <a:gd name="adj" fmla="val 11765"/>
+            </a:avLst>
+          </a:prstGeom>
+          <a:solidFill>
+            <a:srgbClr val="1A1D23"/>
+          </a:solidFill>
+          <a:ln w="12700">
+            <a:solidFill>
+              <a:srgbClr val="2A2E38"/>
+            </a:solidFill>
+            <a:prstDash val="solid"/>
+          </a:ln>
+        </p:spPr>
+      </p:sp>
+      <p:sp>
+        <p:nvSpPr>
+          <p:cNvPr id="7" name="Shape 5"/>
+          <p:cNvSpPr/>
+          <p:nvPr/>
+        </p:nvSpPr>
+        <p:spPr>
+          <a:xfrm>
+            <a:off x="2260397" y="2408530"/>
+            <a:ext cx="98755" cy="106985"/>
+          </a:xfrm>
+          <a:prstGeom prst="line">
+            <a:avLst/>
+          </a:prstGeom>
+          <a:noFill/>
+          <a:ln w="16510">
+            <a:solidFill>
+              <a:srgbClr val="E6E9EF"/>
+            </a:solidFill>
+            <a:prstDash val="solid"/>
+          </a:ln>
+        </p:spPr>
+      </p:sp>
+      <p:sp>
+        <p:nvSpPr>
+          <p:cNvPr id="8" name="Shape 6"/>
+          <p:cNvSpPr/>
+          <p:nvPr/>
+        </p:nvSpPr>
+        <p:spPr>
+          <a:xfrm flipV="1">
+            <a:off x="2359152" y="2285086"/>
+            <a:ext cx="181051" cy="230429"/>
+          </a:xfrm>
+          <a:prstGeom prst="line">
+            <a:avLst/>
+          </a:prstGeom>
+          <a:noFill/>
+          <a:ln w="16510">
+            <a:solidFill>
+              <a:srgbClr val="E6E9EF"/>
+            </a:solidFill>
+            <a:prstDash val="solid"/>
+          </a:ln>
+        </p:spPr>
+      </p:sp>
+      <p:sp>
+        <p:nvSpPr>
+          <p:cNvPr id="9" name="Shape 7"/>
+          <p:cNvSpPr/>
+          <p:nvPr/>
+        </p:nvSpPr>
+        <p:spPr>
+          <a:xfrm>
+            <a:off x="2880360" y="2011680"/>
+            <a:ext cx="777240" cy="777240"/>
+          </a:xfrm>
+          <a:prstGeom prst="roundRect">
+            <a:avLst>
+              <a:gd name="adj" fmla="val 11765"/>
+            </a:avLst>
+          </a:prstGeom>
+          <a:solidFill>
+            <a:srgbClr val="1A1D23"/>
+          </a:solidFill>
+          <a:ln w="12700">
+            <a:solidFill>
+              <a:srgbClr val="2A2E38"/>
+            </a:solidFill>
+            <a:prstDash val="solid"/>
+          </a:ln>
+        </p:spPr>
+      </p:sp>
+      <p:sp>
+        <p:nvSpPr>
+          <p:cNvPr id="10" name="Shape 8"/>
+          <p:cNvSpPr/>
+          <p:nvPr/>
+        </p:nvSpPr>
+        <p:spPr>
+          <a:xfrm>
+            <a:off x="3063240" y="2219249"/>
+            <a:ext cx="411480" cy="370332"/>
+          </a:xfrm>
+          <a:prstGeom prst="triangle">
+            <a:avLst/>
+          </a:prstGeom>
+          <a:ln w="16510">
+            <a:solidFill>
+              <a:srgbClr val="E6E9EF"/>
+            </a:solidFill>
+            <a:prstDash val="solid"/>
+          </a:ln>
+        </p:spPr>
+      </p:sp>
+      <p:sp>
+        <p:nvSpPr>
+          <p:cNvPr id="11" name="Shape 9"/>
+          <p:cNvSpPr/>
+          <p:nvPr/>
+        </p:nvSpPr>
+        <p:spPr>
+          <a:xfrm>
+            <a:off x="3268980" y="2350922"/>
+            <a:ext cx="0" cy="90526"/>
+          </a:xfrm>
+          <a:prstGeom prst="line">
+            <a:avLst/>
+          </a:prstGeom>
+          <a:noFill/>
+          <a:ln w="16510">
+            <a:solidFill>
+              <a:srgbClr val="E6E9EF"/>
+            </a:solidFill>
+            <a:prstDash val="solid"/>
+          </a:ln>
+        </p:spPr>
+      </p:sp>
+      <p:sp>
+        <p:nvSpPr>
+          <p:cNvPr id="12" name="Shape 10"/>
+          <p:cNvSpPr/>
+          <p:nvPr/>
+        </p:nvSpPr>
+        <p:spPr>
+          <a:xfrm>
+            <a:off x="3250463" y="2474366"/>
+            <a:ext cx="37033" cy="37033"/>
+          </a:xfrm>
+          <a:prstGeom prst="roundRect">
+            <a:avLst>
+              <a:gd name="adj" fmla="val 49383"/>
+            </a:avLst>
+          </a:prstGeom>
+          <a:solidFill>
+            <a:srgbClr val="E6E9EF"/>
+          </a:solidFill>
+          <a:ln/>
+        </p:spPr>
+      </p:sp>
+      <p:sp>
+        <p:nvSpPr>
+          <p:cNvPr id="13" name="Shape 11"/>
+          <p:cNvSpPr/>
+          <p:nvPr/>
+        </p:nvSpPr>
+        <p:spPr>
+          <a:xfrm>
+            <a:off x="3749040" y="2011680"/>
+            <a:ext cx="777240" cy="777240"/>
+          </a:xfrm>
+          <a:prstGeom prst="roundRect">
+            <a:avLst>
+              <a:gd name="adj" fmla="val 11765"/>
+            </a:avLst>
+          </a:prstGeom>
+          <a:solidFill>
+            <a:srgbClr val="1A1D23"/>
+          </a:solidFill>
+          <a:ln w="12700">
+            <a:solidFill>
+              <a:srgbClr val="2A2E38"/>
+            </a:solidFill>
+            <a:prstDash val="solid"/>
+          </a:ln>
+        </p:spPr>
+      </p:sp>
+      <p:sp>
+        <p:nvSpPr>
+          <p:cNvPr id="14" name="Shape 12"/>
+          <p:cNvSpPr/>
+          <p:nvPr/>
+        </p:nvSpPr>
+        <p:spPr>
+          <a:xfrm>
+            <a:off x="3931920" y="2194560"/>
+            <a:ext cx="411480" cy="411480"/>
+          </a:xfrm>
+          <a:prstGeom prst="ellipse">
+            <a:avLst/>
+          </a:prstGeom>
+          <a:ln w="16510">
+            <a:solidFill>
+              <a:srgbClr val="E6E9EF"/>
+            </a:solidFill>
+            <a:prstDash val="solid"/>
+          </a:ln>
+        </p:spPr>
+      </p:sp>
+      <p:sp>
+        <p:nvSpPr>
+          <p:cNvPr id="15" name="Shape 13"/>
+          <p:cNvSpPr/>
+          <p:nvPr/>
+        </p:nvSpPr>
+        <p:spPr>
+          <a:xfrm>
+            <a:off x="4055364" y="2318004"/>
+            <a:ext cx="164592" cy="164592"/>
+          </a:xfrm>
+          <a:prstGeom prst="line">
+            <a:avLst/>
+          </a:prstGeom>
+          <a:noFill/>
+          <a:ln w="16510">
+            <a:solidFill>
+              <a:srgbClr val="E6E9EF"/>
+            </a:solidFill>
+            <a:prstDash val="solid"/>
+          </a:ln>
+        </p:spPr>
+      </p:sp>
+      <p:sp>
+        <p:nvSpPr>
+          <p:cNvPr id="16" name="Shape 14"/>
+          <p:cNvSpPr/>
+          <p:nvPr/>
+        </p:nvSpPr>
+        <p:spPr>
+          <a:xfrm flipH="1">
+            <a:off x="4055364" y="2318004"/>
+            <a:ext cx="164592" cy="164592"/>
+          </a:xfrm>
+          <a:prstGeom prst="line">
+            <a:avLst/>
+          </a:prstGeom>
+          <a:noFill/>
+          <a:ln w="16510">
+            <a:solidFill>
+              <a:srgbClr val="E6E9EF"/>
+            </a:solidFill>
+            <a:prstDash val="solid"/>
+          </a:ln>
+        </p:spPr>
+      </p:sp>
+      <p:sp>
+        <p:nvSpPr>
+          <p:cNvPr id="17" name="Shape 15"/>
+          <p:cNvSpPr/>
+          <p:nvPr/>
+        </p:nvSpPr>
+        <p:spPr>
+          <a:xfrm>
+            <a:off x="4617720" y="2011680"/>
+            <a:ext cx="777240" cy="777240"/>
+          </a:xfrm>
+          <a:prstGeom prst="roundRect">
+            <a:avLst>
+              <a:gd name="adj" fmla="val 11765"/>
+            </a:avLst>
+          </a:prstGeom>
+          <a:solidFill>
+            <a:srgbClr val="1A1D23"/>
+          </a:solidFill>
+          <a:ln w="12700">
+            <a:solidFill>
+              <a:srgbClr val="2A2E38"/>
+            </a:solidFill>
+            <a:prstDash val="solid"/>
+          </a:ln>
+        </p:spPr>
+      </p:sp>
+      <p:sp>
+        <p:nvSpPr>
+          <p:cNvPr id="18" name="Shape 16"/>
+          <p:cNvSpPr/>
+          <p:nvPr/>
+        </p:nvSpPr>
+        <p:spPr>
+          <a:xfrm>
+            <a:off x="4800600" y="2227478"/>
+            <a:ext cx="411480" cy="296266"/>
+          </a:xfrm>
+          <a:prstGeom prst="cloud">
+            <a:avLst/>
+          </a:prstGeom>
+          <a:ln w="16510">
+            <a:solidFill>
+              <a:srgbClr val="E6E9EF"/>
+            </a:solidFill>
+            <a:prstDash val="solid"/>
+          </a:ln>
+        </p:spPr>
+      </p:sp>
+      <p:sp>
+        <p:nvSpPr>
+          <p:cNvPr id="19" name="Shape 17"/>
+          <p:cNvSpPr/>
+          <p:nvPr/>
+        </p:nvSpPr>
+        <p:spPr>
+          <a:xfrm>
+            <a:off x="4841748" y="2235708"/>
+            <a:ext cx="329184" cy="329184"/>
+          </a:xfrm>
+          <a:prstGeom prst="line">
+            <a:avLst/>
+          </a:prstGeom>
+          <a:noFill/>
+          <a:ln w="16510">
+            <a:solidFill>
+              <a:srgbClr val="E6E9EF"/>
+            </a:solidFill>
+            <a:prstDash val="solid"/>
+          </a:ln>
+        </p:spPr>
+      </p:sp>
+      <p:sp>
+        <p:nvSpPr>
+          <p:cNvPr id="20" name="Text 18"/>
+          <p:cNvSpPr txBox="1"/>
+          <p:nvPr/>
+        </p:nvSpPr>
+        <p:spPr>
+          <a:xfrm>
+            <a:off x="640080" y="3246120"/>
+            <a:ext cx="1280160" cy="274320"/>
+          </a:xfrm>
+          <a:prstGeom prst="rect">
+            <a:avLst/>
+          </a:prstGeom>
+          <a:noFill/>
+          <a:ln/>
+        </p:spPr>
+        <p:txBody>
+          <a:bodyPr wrap="square" lIns="0" tIns="0" rIns="0" bIns="0" rtlCol="0" anchor="ctr"/>
+          <a:lstStyle/>
+          <a:p>
+            <a:pPr algn="l" indent="0" marL="0">
+              <a:lnSpc>
+                <a:spcPct val="100000"/>
+              </a:lnSpc>
+              <a:buNone/>
+            </a:pPr>
+            <a:r>
+              <a:rPr lang="en-US" sz="1200" b="1" dirty="0">
+                <a:solidFill>
+                  <a:srgbClr val="8A9099"/>
+                </a:solidFill>
+                <a:latin typeface="Malgun Gothic" pitchFamily="34" charset="0"/>
+                <a:ea typeface="Malgun Gothic" pitchFamily="34" charset="-122"/>
+                <a:cs typeface="Malgun Gothic" pitchFamily="34" charset="-120"/>
+              </a:rPr>
+              <a:t>지표</a:t>
+            </a:r>
+            <a:endParaRPr lang="en-US" sz="1200" dirty="0"/>
+          </a:p>
+        </p:txBody>
+      </p:sp>
+      <p:sp>
+        <p:nvSpPr>
+          <p:cNvPr id="21" name="Shape 19"/>
+          <p:cNvSpPr/>
+          <p:nvPr/>
+        </p:nvSpPr>
+        <p:spPr>
+          <a:xfrm>
+            <a:off x="2011680" y="3154680"/>
+            <a:ext cx="777240" cy="777240"/>
+          </a:xfrm>
+          <a:prstGeom prst="roundRect">
+            <a:avLst>
+              <a:gd name="adj" fmla="val 11765"/>
+            </a:avLst>
+          </a:prstGeom>
+          <a:solidFill>
+            <a:srgbClr val="1A1D23"/>
+          </a:solidFill>
+          <a:ln w="12700">
+            <a:solidFill>
+              <a:srgbClr val="2A2E38"/>
+            </a:solidFill>
+            <a:prstDash val="solid"/>
+          </a:ln>
+        </p:spPr>
+      </p:sp>
+      <p:sp>
+        <p:nvSpPr>
+          <p:cNvPr id="22" name="Shape 20"/>
+          <p:cNvSpPr/>
+          <p:nvPr/>
+        </p:nvSpPr>
+        <p:spPr>
+          <a:xfrm>
+            <a:off x="2309774" y="3452774"/>
+            <a:ext cx="181051" cy="181051"/>
+          </a:xfrm>
+          <a:prstGeom prst="roundRect">
+            <a:avLst>
+              <a:gd name="adj" fmla="val 15152"/>
+            </a:avLst>
+          </a:prstGeom>
+          <a:ln w="16510">
+            <a:solidFill>
+              <a:srgbClr val="E6E9EF"/>
+            </a:solidFill>
+            <a:prstDash val="solid"/>
+          </a:ln>
+        </p:spPr>
+      </p:sp>
+      <p:sp>
+        <p:nvSpPr>
+          <p:cNvPr id="23" name="Shape 21"/>
+          <p:cNvSpPr/>
+          <p:nvPr/>
+        </p:nvSpPr>
+        <p:spPr>
+          <a:xfrm>
+            <a:off x="2400300" y="3370478"/>
+            <a:ext cx="0" cy="65837"/>
+          </a:xfrm>
+          <a:prstGeom prst="line">
+            <a:avLst/>
+          </a:prstGeom>
+          <a:noFill/>
+          <a:ln w="16510">
+            <a:solidFill>
+              <a:srgbClr val="E6E9EF"/>
+            </a:solidFill>
+            <a:prstDash val="solid"/>
+          </a:ln>
+        </p:spPr>
+      </p:sp>
+      <p:sp>
+        <p:nvSpPr>
+          <p:cNvPr id="24" name="Shape 22"/>
+          <p:cNvSpPr/>
+          <p:nvPr/>
+        </p:nvSpPr>
+        <p:spPr>
+          <a:xfrm>
+            <a:off x="2400300" y="3650285"/>
+            <a:ext cx="0" cy="65837"/>
+          </a:xfrm>
+          <a:prstGeom prst="line">
+            <a:avLst/>
+          </a:prstGeom>
+          <a:noFill/>
+          <a:ln w="16510">
+            <a:solidFill>
+              <a:srgbClr val="E6E9EF"/>
+            </a:solidFill>
+            <a:prstDash val="solid"/>
+          </a:ln>
+        </p:spPr>
+      </p:sp>
+      <p:sp>
+        <p:nvSpPr>
+          <p:cNvPr id="25" name="Shape 23"/>
+          <p:cNvSpPr/>
+          <p:nvPr/>
+        </p:nvSpPr>
+        <p:spPr>
+          <a:xfrm>
+            <a:off x="2227478" y="3543300"/>
+            <a:ext cx="65837" cy="0"/>
+          </a:xfrm>
+          <a:prstGeom prst="line">
+            <a:avLst/>
+          </a:prstGeom>
+          <a:noFill/>
+          <a:ln w="16510">
+            <a:solidFill>
+              <a:srgbClr val="E6E9EF"/>
+            </a:solidFill>
+            <a:prstDash val="solid"/>
+          </a:ln>
+        </p:spPr>
+      </p:sp>
+      <p:sp>
+        <p:nvSpPr>
+          <p:cNvPr id="26" name="Shape 24"/>
+          <p:cNvSpPr/>
+          <p:nvPr/>
+        </p:nvSpPr>
+        <p:spPr>
+          <a:xfrm>
+            <a:off x="2507285" y="3543300"/>
+            <a:ext cx="65837" cy="0"/>
+          </a:xfrm>
+          <a:prstGeom prst="line">
+            <a:avLst/>
+          </a:prstGeom>
+          <a:noFill/>
+          <a:ln w="16510">
+            <a:solidFill>
+              <a:srgbClr val="E6E9EF"/>
+            </a:solidFill>
+            <a:prstDash val="solid"/>
+          </a:ln>
+        </p:spPr>
+      </p:sp>
+      <p:sp>
+        <p:nvSpPr>
+          <p:cNvPr id="27" name="Shape 25"/>
+          <p:cNvSpPr/>
+          <p:nvPr/>
+        </p:nvSpPr>
+        <p:spPr>
+          <a:xfrm>
+            <a:off x="2880360" y="3154680"/>
+            <a:ext cx="777240" cy="777240"/>
+          </a:xfrm>
+          <a:prstGeom prst="roundRect">
+            <a:avLst>
+              <a:gd name="adj" fmla="val 11765"/>
+            </a:avLst>
+          </a:prstGeom>
+          <a:solidFill>
+            <a:srgbClr val="1A1D23"/>
+          </a:solidFill>
+          <a:ln w="12700">
+            <a:solidFill>
+              <a:srgbClr val="2A2E38"/>
+            </a:solidFill>
+            <a:prstDash val="solid"/>
+          </a:ln>
+        </p:spPr>
+      </p:sp>
+      <p:sp>
+        <p:nvSpPr>
+          <p:cNvPr id="28" name="Shape 26"/>
+          <p:cNvSpPr/>
+          <p:nvPr/>
+        </p:nvSpPr>
+        <p:spPr>
+          <a:xfrm>
+            <a:off x="3087929" y="3407512"/>
+            <a:ext cx="362102" cy="106985"/>
+          </a:xfrm>
+          <a:prstGeom prst="roundRect">
+            <a:avLst>
+              <a:gd name="adj" fmla="val 25641"/>
+            </a:avLst>
+          </a:prstGeom>
+          <a:ln w="16510">
+            <a:solidFill>
+              <a:srgbClr val="E6E9EF"/>
+            </a:solidFill>
+            <a:prstDash val="solid"/>
+          </a:ln>
+        </p:spPr>
+      </p:sp>
+      <p:sp>
+        <p:nvSpPr>
+          <p:cNvPr id="29" name="Shape 27"/>
+          <p:cNvSpPr/>
+          <p:nvPr/>
+        </p:nvSpPr>
+        <p:spPr>
+          <a:xfrm>
+            <a:off x="3087929" y="3572104"/>
+            <a:ext cx="362102" cy="106985"/>
+          </a:xfrm>
+          <a:prstGeom prst="roundRect">
+            <a:avLst>
+              <a:gd name="adj" fmla="val 25641"/>
+            </a:avLst>
+          </a:prstGeom>
+          <a:ln w="16510">
+            <a:solidFill>
+              <a:srgbClr val="E6E9EF"/>
+            </a:solidFill>
+            <a:prstDash val="solid"/>
+          </a:ln>
+        </p:spPr>
+      </p:sp>
+      <p:sp>
+        <p:nvSpPr>
+          <p:cNvPr id="30" name="Shape 28"/>
+          <p:cNvSpPr/>
+          <p:nvPr/>
+        </p:nvSpPr>
+        <p:spPr>
+          <a:xfrm>
+            <a:off x="3749040" y="3154680"/>
+            <a:ext cx="777240" cy="777240"/>
+          </a:xfrm>
+          <a:prstGeom prst="roundRect">
+            <a:avLst>
+              <a:gd name="adj" fmla="val 11765"/>
+            </a:avLst>
+          </a:prstGeom>
+          <a:solidFill>
+            <a:srgbClr val="1A1D23"/>
+          </a:solidFill>
+          <a:ln w="12700">
+            <a:solidFill>
+              <a:srgbClr val="2A2E38"/>
+            </a:solidFill>
+            <a:prstDash val="solid"/>
+          </a:ln>
+        </p:spPr>
+      </p:sp>
+      <p:sp>
+        <p:nvSpPr>
+          <p:cNvPr id="31" name="Shape 29"/>
+          <p:cNvSpPr/>
+          <p:nvPr/>
+        </p:nvSpPr>
+        <p:spPr>
+          <a:xfrm>
+            <a:off x="3956609" y="3391052"/>
+            <a:ext cx="362102" cy="123444"/>
+          </a:xfrm>
+          <a:prstGeom prst="roundRect">
+            <a:avLst>
+              <a:gd name="adj" fmla="val 22222"/>
+            </a:avLst>
+          </a:prstGeom>
+          <a:ln w="16510">
+            <a:solidFill>
+              <a:srgbClr val="E6E9EF"/>
+            </a:solidFill>
+            <a:prstDash val="solid"/>
+          </a:ln>
+        </p:spPr>
+      </p:sp>
+      <p:sp>
+        <p:nvSpPr>
+          <p:cNvPr id="32" name="Shape 30"/>
+          <p:cNvSpPr/>
+          <p:nvPr/>
+        </p:nvSpPr>
+        <p:spPr>
+          <a:xfrm>
+            <a:off x="3956609" y="3572104"/>
+            <a:ext cx="362102" cy="123444"/>
+          </a:xfrm>
+          <a:prstGeom prst="roundRect">
+            <a:avLst>
+              <a:gd name="adj" fmla="val 22222"/>
+            </a:avLst>
+          </a:prstGeom>
+          <a:ln w="16510">
+            <a:solidFill>
+              <a:srgbClr val="E6E9EF"/>
+            </a:solidFill>
+            <a:prstDash val="solid"/>
+          </a:ln>
+        </p:spPr>
+      </p:sp>
+      <p:sp>
+        <p:nvSpPr>
+          <p:cNvPr id="33" name="Shape 31"/>
+          <p:cNvSpPr/>
+          <p:nvPr/>
+        </p:nvSpPr>
+        <p:spPr>
+          <a:xfrm>
+            <a:off x="4010101" y="3434258"/>
+            <a:ext cx="28804" cy="28804"/>
+          </a:xfrm>
+          <a:prstGeom prst="roundRect">
+            <a:avLst>
+              <a:gd name="adj" fmla="val 63491"/>
+            </a:avLst>
+          </a:prstGeom>
+          <a:solidFill>
+            <a:srgbClr val="E6E9EF"/>
+          </a:solidFill>
+          <a:ln/>
+        </p:spPr>
+      </p:sp>
+      <p:sp>
+        <p:nvSpPr>
+          <p:cNvPr id="34" name="Shape 32"/>
+          <p:cNvSpPr/>
+          <p:nvPr/>
+        </p:nvSpPr>
+        <p:spPr>
+          <a:xfrm>
+            <a:off x="4010101" y="3615309"/>
+            <a:ext cx="28804" cy="28804"/>
+          </a:xfrm>
+          <a:prstGeom prst="roundRect">
+            <a:avLst>
+              <a:gd name="adj" fmla="val 63491"/>
+            </a:avLst>
+          </a:prstGeom>
+          <a:solidFill>
+            <a:srgbClr val="E6E9EF"/>
+          </a:solidFill>
+          <a:ln/>
+        </p:spPr>
+      </p:sp>
+      <p:sp>
+        <p:nvSpPr>
+          <p:cNvPr id="35" name="Shape 33"/>
+          <p:cNvSpPr/>
+          <p:nvPr/>
+        </p:nvSpPr>
+        <p:spPr>
+          <a:xfrm>
+            <a:off x="4617720" y="3154680"/>
+            <a:ext cx="777240" cy="777240"/>
+          </a:xfrm>
+          <a:prstGeom prst="roundRect">
+            <a:avLst>
+              <a:gd name="adj" fmla="val 11765"/>
+            </a:avLst>
+          </a:prstGeom>
+          <a:solidFill>
+            <a:srgbClr val="1A1D23"/>
+          </a:solidFill>
+          <a:ln w="12700">
+            <a:solidFill>
+              <a:srgbClr val="2A2E38"/>
+            </a:solidFill>
+            <a:prstDash val="solid"/>
+          </a:ln>
+        </p:spPr>
+      </p:sp>
+      <p:sp>
+        <p:nvSpPr>
+          <p:cNvPr id="36" name="Shape 34"/>
+          <p:cNvSpPr/>
+          <p:nvPr/>
+        </p:nvSpPr>
+        <p:spPr>
+          <a:xfrm>
+            <a:off x="4833518" y="3502152"/>
+            <a:ext cx="296266" cy="0"/>
+          </a:xfrm>
+          <a:prstGeom prst="line">
+            <a:avLst/>
+          </a:prstGeom>
+          <a:noFill/>
+          <a:ln w="16510">
+            <a:solidFill>
+              <a:srgbClr val="E6E9EF"/>
+            </a:solidFill>
+            <a:prstDash val="solid"/>
+          </a:ln>
+        </p:spPr>
+      </p:sp>
+      <p:sp>
+        <p:nvSpPr>
+          <p:cNvPr id="37" name="Shape 35"/>
+          <p:cNvSpPr/>
+          <p:nvPr/>
+        </p:nvSpPr>
+        <p:spPr>
+          <a:xfrm rot="5400000">
+            <a:off x="5105095" y="3448660"/>
+            <a:ext cx="90526" cy="106985"/>
+          </a:xfrm>
+          <a:prstGeom prst="triangle">
+            <a:avLst/>
+          </a:prstGeom>
+          <a:solidFill>
+            <a:srgbClr val="E6E9EF"/>
+          </a:solidFill>
+          <a:ln/>
+        </p:spPr>
+      </p:sp>
+      <p:sp>
+        <p:nvSpPr>
+          <p:cNvPr id="38" name="Shape 36"/>
+          <p:cNvSpPr/>
+          <p:nvPr/>
+        </p:nvSpPr>
+        <p:spPr>
+          <a:xfrm>
+            <a:off x="4882896" y="3592678"/>
+            <a:ext cx="296266" cy="0"/>
+          </a:xfrm>
+          <a:prstGeom prst="line">
+            <a:avLst/>
+          </a:prstGeom>
+          <a:noFill/>
+          <a:ln w="16510">
+            <a:solidFill>
+              <a:srgbClr val="E6E9EF"/>
+            </a:solidFill>
+            <a:prstDash val="solid"/>
+          </a:ln>
+        </p:spPr>
+      </p:sp>
+      <p:sp>
+        <p:nvSpPr>
+          <p:cNvPr id="39" name="Shape 37"/>
+          <p:cNvSpPr/>
+          <p:nvPr/>
+        </p:nvSpPr>
+        <p:spPr>
+          <a:xfrm rot="16200000">
+            <a:off x="4817059" y="3539185"/>
+            <a:ext cx="90526" cy="106985"/>
+          </a:xfrm>
+          <a:prstGeom prst="triangle">
+            <a:avLst/>
+          </a:prstGeom>
+          <a:solidFill>
+            <a:srgbClr val="E6E9EF"/>
+          </a:solidFill>
+          <a:ln/>
+        </p:spPr>
+      </p:sp>
+      <p:sp>
+        <p:nvSpPr>
+          <p:cNvPr id="40" name="Text 38"/>
+          <p:cNvSpPr txBox="1"/>
+          <p:nvPr/>
+        </p:nvSpPr>
+        <p:spPr>
+          <a:xfrm>
+            <a:off x="640080" y="4389120"/>
+            <a:ext cx="1280160" cy="274320"/>
+          </a:xfrm>
+          <a:prstGeom prst="rect">
+            <a:avLst/>
+          </a:prstGeom>
+          <a:noFill/>
+          <a:ln/>
+        </p:spPr>
+        <p:txBody>
+          <a:bodyPr wrap="square" lIns="0" tIns="0" rIns="0" bIns="0" rtlCol="0" anchor="ctr"/>
+          <a:lstStyle/>
+          <a:p>
+            <a:pPr algn="l" indent="0" marL="0">
+              <a:lnSpc>
+                <a:spcPct val="100000"/>
+              </a:lnSpc>
+              <a:buNone/>
+            </a:pPr>
+            <a:r>
+              <a:rPr lang="en-US" sz="1200" b="1" dirty="0">
+                <a:solidFill>
+                  <a:srgbClr val="8A9099"/>
+                </a:solidFill>
+                <a:latin typeface="Malgun Gothic" pitchFamily="34" charset="0"/>
+                <a:ea typeface="Malgun Gothic" pitchFamily="34" charset="-122"/>
+                <a:cs typeface="Malgun Gothic" pitchFamily="34" charset="-120"/>
+              </a:rPr>
+              <a:t>동작</a:t>
+            </a:r>
+            <a:endParaRPr lang="en-US" sz="1200" dirty="0"/>
+          </a:p>
+        </p:txBody>
+      </p:sp>
+      <p:sp>
+        <p:nvSpPr>
+          <p:cNvPr id="41" name="Shape 39"/>
+          <p:cNvSpPr/>
+          <p:nvPr/>
+        </p:nvSpPr>
+        <p:spPr>
+          <a:xfrm>
+            <a:off x="2011680" y="4297680"/>
+            <a:ext cx="777240" cy="777240"/>
+          </a:xfrm>
+          <a:prstGeom prst="roundRect">
+            <a:avLst>
+              <a:gd name="adj" fmla="val 11765"/>
+            </a:avLst>
+          </a:prstGeom>
+          <a:solidFill>
+            <a:srgbClr val="1A1D23"/>
+          </a:solidFill>
+          <a:ln w="12700">
+            <a:solidFill>
+              <a:srgbClr val="2A2E38"/>
+            </a:solidFill>
+            <a:prstDash val="solid"/>
+          </a:ln>
+        </p:spPr>
+      </p:sp>
+      <p:sp>
+        <p:nvSpPr>
+          <p:cNvPr id="42" name="Shape 40"/>
+          <p:cNvSpPr/>
+          <p:nvPr/>
+        </p:nvSpPr>
+        <p:spPr>
+          <a:xfrm>
+            <a:off x="2194560" y="4480560"/>
+            <a:ext cx="411480" cy="411480"/>
+          </a:xfrm>
+          <a:prstGeom prst="circularArrow">
+            <a:avLst/>
+          </a:prstGeom>
+          <a:solidFill>
+            <a:srgbClr val="E6E9EF"/>
+          </a:solidFill>
+          <a:ln/>
+        </p:spPr>
+      </p:sp>
+      <p:sp>
+        <p:nvSpPr>
+          <p:cNvPr id="43" name="Shape 41"/>
+          <p:cNvSpPr/>
+          <p:nvPr/>
+        </p:nvSpPr>
+        <p:spPr>
+          <a:xfrm>
+            <a:off x="2880360" y="4297680"/>
+            <a:ext cx="777240" cy="777240"/>
+          </a:xfrm>
+          <a:prstGeom prst="roundRect">
+            <a:avLst>
+              <a:gd name="adj" fmla="val 11765"/>
+            </a:avLst>
+          </a:prstGeom>
+          <a:solidFill>
+            <a:srgbClr val="1A1D23"/>
+          </a:solidFill>
+          <a:ln w="12700">
+            <a:solidFill>
+              <a:srgbClr val="2A2E38"/>
+            </a:solidFill>
+            <a:prstDash val="solid"/>
+          </a:ln>
+        </p:spPr>
+      </p:sp>
+      <p:sp>
+        <p:nvSpPr>
+          <p:cNvPr id="44" name="Shape 42"/>
+          <p:cNvSpPr/>
+          <p:nvPr/>
+        </p:nvSpPr>
+        <p:spPr>
+          <a:xfrm>
+            <a:off x="3063240" y="4480560"/>
+            <a:ext cx="411480" cy="411480"/>
+          </a:xfrm>
+          <a:prstGeom prst="gear6">
+            <a:avLst/>
+          </a:prstGeom>
+          <a:solidFill>
+            <a:srgbClr val="E6E9EF"/>
+          </a:solidFill>
+          <a:ln/>
+        </p:spPr>
+      </p:sp>
+      <p:sp>
+        <p:nvSpPr>
+          <p:cNvPr id="45" name="Shape 43"/>
+          <p:cNvSpPr/>
+          <p:nvPr/>
+        </p:nvSpPr>
+        <p:spPr>
+          <a:xfrm>
+            <a:off x="3749040" y="4297680"/>
+            <a:ext cx="777240" cy="777240"/>
+          </a:xfrm>
+          <a:prstGeom prst="roundRect">
+            <a:avLst>
+              <a:gd name="adj" fmla="val 11765"/>
+            </a:avLst>
+          </a:prstGeom>
+          <a:solidFill>
+            <a:srgbClr val="1A1D23"/>
+          </a:solidFill>
+          <a:ln w="12700">
+            <a:solidFill>
+              <a:srgbClr val="2A2E38"/>
+            </a:solidFill>
+            <a:prstDash val="solid"/>
+          </a:ln>
+        </p:spPr>
+      </p:sp>
+      <p:sp>
+        <p:nvSpPr>
+          <p:cNvPr id="46" name="Shape 44"/>
+          <p:cNvSpPr/>
+          <p:nvPr/>
+        </p:nvSpPr>
+        <p:spPr>
+          <a:xfrm flipH="1">
+            <a:off x="4071823" y="4562856"/>
+            <a:ext cx="115214" cy="123444"/>
+          </a:xfrm>
+          <a:prstGeom prst="line">
+            <a:avLst/>
+          </a:prstGeom>
+          <a:noFill/>
+          <a:ln w="16510">
+            <a:solidFill>
+              <a:srgbClr val="E6E9EF"/>
+            </a:solidFill>
+            <a:prstDash val="solid"/>
+          </a:ln>
+        </p:spPr>
+      </p:sp>
+      <p:sp>
+        <p:nvSpPr>
+          <p:cNvPr id="47" name="Shape 45"/>
+          <p:cNvSpPr/>
+          <p:nvPr/>
+        </p:nvSpPr>
+        <p:spPr>
+          <a:xfrm>
+            <a:off x="4071823" y="4686300"/>
+            <a:ext cx="115214" cy="123444"/>
+          </a:xfrm>
+          <a:prstGeom prst="line">
+            <a:avLst/>
+          </a:prstGeom>
+          <a:noFill/>
+          <a:ln w="16510">
+            <a:solidFill>
+              <a:srgbClr val="E6E9EF"/>
+            </a:solidFill>
+            <a:prstDash val="solid"/>
+          </a:ln>
+        </p:spPr>
+      </p:sp>
+      <p:sp>
+        <p:nvSpPr>
+          <p:cNvPr id="48" name="Shape 46"/>
+          <p:cNvSpPr/>
+          <p:nvPr/>
+        </p:nvSpPr>
+        <p:spPr>
+          <a:xfrm>
+            <a:off x="4617720" y="4297680"/>
+            <a:ext cx="777240" cy="777240"/>
+          </a:xfrm>
+          <a:prstGeom prst="roundRect">
+            <a:avLst>
+              <a:gd name="adj" fmla="val 11765"/>
+            </a:avLst>
+          </a:prstGeom>
+          <a:solidFill>
+            <a:srgbClr val="1A1D23"/>
+          </a:solidFill>
+          <a:ln w="12700">
+            <a:solidFill>
+              <a:srgbClr val="2A2E38"/>
+            </a:solidFill>
+            <a:prstDash val="solid"/>
+          </a:ln>
+        </p:spPr>
+      </p:sp>
+      <p:sp>
+        <p:nvSpPr>
+          <p:cNvPr id="49" name="Shape 47"/>
+          <p:cNvSpPr/>
+          <p:nvPr/>
+        </p:nvSpPr>
+        <p:spPr>
+          <a:xfrm>
+            <a:off x="5006340" y="4546397"/>
+            <a:ext cx="0" cy="279806"/>
+          </a:xfrm>
+          <a:prstGeom prst="line">
+            <a:avLst/>
+          </a:prstGeom>
+          <a:noFill/>
+          <a:ln w="16510">
+            <a:solidFill>
+              <a:srgbClr val="E6E9EF"/>
+            </a:solidFill>
+            <a:prstDash val="solid"/>
+          </a:ln>
+        </p:spPr>
+      </p:sp>
+      <p:sp>
+        <p:nvSpPr>
+          <p:cNvPr id="50" name="Shape 48"/>
+          <p:cNvSpPr/>
+          <p:nvPr/>
+        </p:nvSpPr>
+        <p:spPr>
+          <a:xfrm>
+            <a:off x="4866437" y="4686300"/>
+            <a:ext cx="279806" cy="0"/>
+          </a:xfrm>
+          <a:prstGeom prst="line">
+            <a:avLst/>
+          </a:prstGeom>
+          <a:noFill/>
+          <a:ln w="16510">
+            <a:solidFill>
+              <a:srgbClr val="E6E9EF"/>
+            </a:solidFill>
+            <a:prstDash val="solid"/>
+          </a:ln>
+        </p:spPr>
+      </p:sp>
+      <p:sp>
+        <p:nvSpPr>
+          <p:cNvPr id="51" name="Shape 49"/>
+          <p:cNvSpPr/>
+          <p:nvPr/>
+        </p:nvSpPr>
+        <p:spPr>
+          <a:xfrm>
+            <a:off x="5486400" y="4297680"/>
+            <a:ext cx="777240" cy="777240"/>
+          </a:xfrm>
+          <a:prstGeom prst="roundRect">
+            <a:avLst>
+              <a:gd name="adj" fmla="val 11765"/>
+            </a:avLst>
+          </a:prstGeom>
+          <a:solidFill>
+            <a:srgbClr val="1A1D23"/>
+          </a:solidFill>
+          <a:ln w="12700">
+            <a:solidFill>
+              <a:srgbClr val="2A2E38"/>
+            </a:solidFill>
+            <a:prstDash val="solid"/>
+          </a:ln>
+        </p:spPr>
+      </p:sp>
+      <p:sp>
+        <p:nvSpPr>
+          <p:cNvPr id="52" name="Shape 50"/>
+          <p:cNvSpPr/>
+          <p:nvPr/>
+        </p:nvSpPr>
+        <p:spPr>
+          <a:xfrm flipV="1">
+            <a:off x="5743346" y="4554626"/>
+            <a:ext cx="205740" cy="205740"/>
+          </a:xfrm>
+          <a:prstGeom prst="line">
+            <a:avLst/>
+          </a:prstGeom>
+          <a:noFill/>
+          <a:ln w="24130">
+            <a:solidFill>
+              <a:srgbClr val="E6E9EF"/>
+            </a:solidFill>
+            <a:prstDash val="solid"/>
+          </a:ln>
+        </p:spPr>
+      </p:sp>
+      <p:sp>
+        <p:nvSpPr>
+          <p:cNvPr id="53" name="Shape 51"/>
+          <p:cNvSpPr/>
+          <p:nvPr/>
+        </p:nvSpPr>
+        <p:spPr>
+          <a:xfrm>
+            <a:off x="5743346" y="4760366"/>
+            <a:ext cx="65837" cy="24689"/>
+          </a:xfrm>
+          <a:prstGeom prst="line">
+            <a:avLst/>
+          </a:prstGeom>
+          <a:noFill/>
+          <a:ln w="16510">
+            <a:solidFill>
+              <a:srgbClr val="E6E9EF"/>
+            </a:solidFill>
+            <a:prstDash val="solid"/>
+          </a:ln>
+        </p:spPr>
+      </p:sp>
+      <p:sp>
+        <p:nvSpPr>
+          <p:cNvPr id="54" name="Shape 52"/>
+          <p:cNvSpPr/>
+          <p:nvPr/>
+        </p:nvSpPr>
+        <p:spPr>
+          <a:xfrm>
+            <a:off x="6355080" y="4297680"/>
+            <a:ext cx="777240" cy="777240"/>
+          </a:xfrm>
+          <a:prstGeom prst="roundRect">
+            <a:avLst>
+              <a:gd name="adj" fmla="val 11765"/>
+            </a:avLst>
+          </a:prstGeom>
+          <a:solidFill>
+            <a:srgbClr val="1A1D23"/>
+          </a:solidFill>
+          <a:ln w="12700">
+            <a:solidFill>
+              <a:srgbClr val="2A2E38"/>
+            </a:solidFill>
+            <a:prstDash val="solid"/>
+          </a:ln>
+        </p:spPr>
+      </p:sp>
+      <p:sp>
+        <p:nvSpPr>
+          <p:cNvPr id="55" name="Shape 53"/>
+          <p:cNvSpPr/>
+          <p:nvPr/>
+        </p:nvSpPr>
+        <p:spPr>
+          <a:xfrm>
+            <a:off x="6636715" y="4595774"/>
+            <a:ext cx="213970" cy="0"/>
+          </a:xfrm>
+          <a:prstGeom prst="line">
+            <a:avLst/>
+          </a:prstGeom>
+          <a:noFill/>
+          <a:ln w="16510">
+            <a:solidFill>
+              <a:srgbClr val="E6E9EF"/>
+            </a:solidFill>
+            <a:prstDash val="solid"/>
+          </a:ln>
+        </p:spPr>
+      </p:sp>
+      <p:sp>
+        <p:nvSpPr>
+          <p:cNvPr id="56" name="Shape 54"/>
+          <p:cNvSpPr/>
+          <p:nvPr/>
+        </p:nvSpPr>
+        <p:spPr>
+          <a:xfrm>
+            <a:off x="6710782" y="4546397"/>
+            <a:ext cx="65837" cy="0"/>
+          </a:xfrm>
+          <a:prstGeom prst="line">
+            <a:avLst/>
+          </a:prstGeom>
+          <a:noFill/>
+          <a:ln w="16510">
+            <a:solidFill>
+              <a:srgbClr val="E6E9EF"/>
+            </a:solidFill>
+            <a:prstDash val="solid"/>
+          </a:ln>
+        </p:spPr>
+      </p:sp>
+      <p:sp>
+        <p:nvSpPr>
+          <p:cNvPr id="57" name="Shape 55"/>
+          <p:cNvSpPr/>
+          <p:nvPr/>
+        </p:nvSpPr>
+        <p:spPr>
+          <a:xfrm>
+            <a:off x="6669634" y="4620463"/>
+            <a:ext cx="148133" cy="197510"/>
+          </a:xfrm>
+          <a:prstGeom prst="roundRect">
+            <a:avLst>
+              <a:gd name="adj" fmla="val 18518"/>
+            </a:avLst>
+          </a:prstGeom>
+          <a:ln w="16510">
+            <a:solidFill>
+              <a:srgbClr val="E6E9EF"/>
+            </a:solidFill>
+            <a:prstDash val="solid"/>
+          </a:ln>
+        </p:spPr>
+      </p:sp>
+      <p:sp>
+        <p:nvSpPr>
+          <p:cNvPr id="58" name="Text 56"/>
+          <p:cNvSpPr txBox="1"/>
+          <p:nvPr/>
+        </p:nvSpPr>
+        <p:spPr>
+          <a:xfrm>
+            <a:off x="640080" y="5669280"/>
+            <a:ext cx="10881360" cy="274320"/>
+          </a:xfrm>
+          <a:prstGeom prst="rect">
+            <a:avLst/>
+          </a:prstGeom>
+          <a:noFill/>
+          <a:ln/>
+        </p:spPr>
+        <p:txBody>
+          <a:bodyPr wrap="square" lIns="0" tIns="0" rIns="0" bIns="0" rtlCol="0" anchor="t"/>
+          <a:lstStyle/>
+          <a:p>
+            <a:pPr algn="l" indent="0" marL="0">
+              <a:lnSpc>
+                <a:spcPct val="100000"/>
+              </a:lnSpc>
+              <a:buNone/>
+            </a:pPr>
+            <a:r>
+              <a:rPr lang="en-US" sz="1100" dirty="0">
+                <a:solidFill>
+                  <a:srgbClr val="8A9099"/>
+                </a:solidFill>
+                <a:latin typeface="Malgun Gothic" pitchFamily="34" charset="0"/>
+                <a:ea typeface="Malgun Gothic" pitchFamily="34" charset="-122"/>
+                <a:cs typeface="Malgun Gothic" pitchFamily="34" charset="-120"/>
+              </a:rPr>
+              <a:t>선 두께·둥근 끝·24dp 그리드를 모든 아이콘에서 동일하게 유지합니다.</a:t>
+            </a:r>
+            <a:endParaRPr lang="en-US" sz="1100" dirty="0"/>
+          </a:p>
+        </p:txBody>
+      </p:sp>
+      <p:sp>
+        <p:nvSpPr>
+          <p:cNvPr id="59" name="Shape 57"/>
+          <p:cNvSpPr/>
+          <p:nvPr/>
+        </p:nvSpPr>
+        <p:spPr>
+          <a:xfrm>
+            <a:off x="640080" y="6382512"/>
+            <a:ext cx="10911535" cy="0"/>
+          </a:xfrm>
+          <a:prstGeom prst="line">
+            <a:avLst/>
+          </a:prstGeom>
+          <a:noFill/>
+          <a:ln w="12700">
+            <a:solidFill>
+              <a:srgbClr val="2A2E38"/>
+            </a:solidFill>
+            <a:prstDash val="solid"/>
+          </a:ln>
+        </p:spPr>
+      </p:sp>
+      <p:sp>
+        <p:nvSpPr>
+          <p:cNvPr id="60" name="Text 58"/>
+          <p:cNvSpPr txBox="1"/>
+          <p:nvPr/>
+        </p:nvSpPr>
+        <p:spPr>
+          <a:xfrm>
+            <a:off x="640080" y="6455664"/>
+            <a:ext cx="5486400" cy="274320"/>
+          </a:xfrm>
+          <a:prstGeom prst="rect">
+            <a:avLst/>
+          </a:prstGeom>
+          <a:noFill/>
+          <a:ln/>
+        </p:spPr>
+        <p:txBody>
+          <a:bodyPr wrap="square" lIns="0" tIns="0" rIns="0" bIns="0" rtlCol="0" anchor="t"/>
+          <a:lstStyle/>
+          <a:p>
+            <a:pPr algn="l" indent="0" marL="0">
+              <a:lnSpc>
+                <a:spcPct val="100000"/>
+              </a:lnSpc>
+              <a:buNone/>
+            </a:pPr>
+            <a:r>
+              <a:rPr lang="en-US" sz="1000" dirty="0">
+                <a:solidFill>
+                  <a:srgbClr val="8A9099"/>
+                </a:solidFill>
+                <a:latin typeface="Malgun Gothic" pitchFamily="34" charset="0"/>
+                <a:ea typeface="Malgun Gothic" pitchFamily="34" charset="-122"/>
+                <a:cs typeface="Malgun Gothic" pitchFamily="34" charset="-120"/>
+              </a:rPr>
+              <a:t>Servex — 디자인 상세</a:t>
+            </a:r>
+            <a:endParaRPr lang="en-US" sz="1000" dirty="0"/>
+          </a:p>
+        </p:txBody>
+      </p:sp>
+      <p:sp>
+        <p:nvSpPr>
+          <p:cNvPr id="61" name="Text 59"/>
+          <p:cNvSpPr txBox="1"/>
+          <p:nvPr/>
+        </p:nvSpPr>
+        <p:spPr>
+          <a:xfrm>
+            <a:off x="9722815" y="6455664"/>
+            <a:ext cx="1828800" cy="274320"/>
+          </a:xfrm>
+          <a:prstGeom prst="rect">
+            <a:avLst/>
+          </a:prstGeom>
+          <a:noFill/>
+          <a:ln/>
+        </p:spPr>
+        <p:txBody>
+          <a:bodyPr wrap="square" lIns="0" tIns="0" rIns="0" bIns="0" rtlCol="0" anchor="t"/>
+          <a:lstStyle/>
+          <a:p>
+            <a:pPr algn="r" indent="0" marL="0">
+              <a:lnSpc>
+                <a:spcPct val="100000"/>
+              </a:lnSpc>
+              <a:buNone/>
+            </a:pPr>
+            <a:r>
+              <a:rPr lang="en-US" sz="1000" dirty="0">
+                <a:solidFill>
+                  <a:srgbClr val="8A9099"/>
+                </a:solidFill>
+                <a:latin typeface="Malgun Gothic" pitchFamily="34" charset="0"/>
+                <a:ea typeface="Malgun Gothic" pitchFamily="34" charset="-122"/>
+                <a:cs typeface="Malgun Gothic" pitchFamily="34" charset="-120"/>
+              </a:rPr>
+              <a:t>10 / 11</a:t>
+            </a:r>
+            <a:endParaRPr lang="en-US" sz="1000" dirty="0"/>
+          </a:p>
+        </p:txBody>
+      </p:sp>
+    </p:spTree>
+  </p:cSld>
+  <p:clrMapOvr>
+    <a:masterClrMapping/>
+  </p:clrMapOvr>
+</p:sld>
+</file>
+
+<file path=ppt/slides/slide9.xml><?xml version="1.0" encoding="utf-8"?>
+<p:sld xmlns:a="http://schemas.openxmlformats.org/drawingml/2006/main" xmlns:r="http://schemas.openxmlformats.org/officeDocument/2006/relationships" xmlns:p="http://schemas.openxmlformats.org/presentationml/2006/main">
+  <p:cSld name="Slide 9">
+    <p:bg>
+      <p:bgPr>
+        <a:solidFill>
+          <a:srgbClr val="06070A"/>
+        </a:solidFill>
+      </p:bgPr>
+    </p:bg>
+    <p:spTree>
+      <p:nvGrpSpPr>
+        <p:cNvPr id="1" name=""/>
+        <p:cNvGrpSpPr/>
+        <p:nvPr/>
+      </p:nvGrpSpPr>
+      <p:grpSpPr>
+        <a:xfrm>
+          <a:off x="0" y="0"/>
+          <a:ext cx="0" cy="0"/>
+          <a:chOff x="0" y="0"/>
+          <a:chExt cx="0" cy="0"/>
+        </a:xfrm>
+      </p:grpSpPr>
+      <p:sp>
+        <p:nvSpPr>
+          <p:cNvPr id="2" name="Text 0"/>
+          <p:cNvSpPr txBox="1"/>
+          <p:nvPr/>
+        </p:nvSpPr>
+        <p:spPr>
+          <a:xfrm>
+            <a:off x="640080" y="457200"/>
+            <a:ext cx="10911535" cy="274320"/>
+          </a:xfrm>
+          <a:prstGeom prst="rect">
+            <a:avLst/>
+          </a:prstGeom>
+          <a:noFill/>
+          <a:ln/>
+        </p:spPr>
+        <p:txBody>
+          <a:bodyPr wrap="square" lIns="0" tIns="0" rIns="0" bIns="0" rtlCol="0" anchor="t"/>
+          <a:lstStyle/>
+          <a:p>
+            <a:pPr algn="l" indent="0" marL="0">
+              <a:lnSpc>
+                <a:spcPct val="100000"/>
+              </a:lnSpc>
+              <a:buNone/>
+            </a:pPr>
+            <a:r>
+              <a:rPr lang="en-US" sz="1100" b="1" spc="200" kern="0" dirty="0">
+                <a:solidFill>
+                  <a:srgbClr val="4C8DFF"/>
+                </a:solidFill>
+                <a:latin typeface="Malgun Gothic" pitchFamily="34" charset="0"/>
+                <a:ea typeface="Malgun Gothic" pitchFamily="34" charset="-122"/>
+                <a:cs typeface="Malgun Gothic" pitchFamily="34" charset="-120"/>
+              </a:rPr>
+              <a:t>DATA</a:t>
+            </a:r>
+            <a:endParaRPr lang="en-US" sz="1100" dirty="0"/>
+          </a:p>
+        </p:txBody>
+      </p:sp>
+      <p:sp>
+        <p:nvSpPr>
+          <p:cNvPr id="3" name="Text 1"/>
+          <p:cNvSpPr txBox="1"/>
+          <p:nvPr/>
+        </p:nvSpPr>
+        <p:spPr>
+          <a:xfrm>
+            <a:off x="640080" y="731520"/>
+            <a:ext cx="10911535" cy="548640"/>
+          </a:xfrm>
+          <a:prstGeom prst="rect">
+            <a:avLst/>
+          </a:prstGeom>
+          <a:noFill/>
+          <a:ln/>
+        </p:spPr>
+        <p:txBody>
+          <a:bodyPr wrap="square" lIns="0" tIns="0" rIns="0" bIns="0" rtlCol="0" anchor="t"/>
+          <a:lstStyle/>
+          <a:p>
+            <a:pPr algn="l" indent="0" marL="0">
+              <a:lnSpc>
+                <a:spcPct val="100000"/>
+              </a:lnSpc>
+              <a:buNone/>
+            </a:pPr>
+            <a:r>
+              <a:rPr lang="en-US" sz="2600" b="1" dirty="0">
+                <a:solidFill>
+                  <a:srgbClr val="E6E9EF"/>
+                </a:solidFill>
+                <a:latin typeface="Malgun Gothic" pitchFamily="34" charset="0"/>
+                <a:ea typeface="Malgun Gothic" pitchFamily="34" charset="-122"/>
+                <a:cs typeface="Malgun Gothic" pitchFamily="34" charset="-120"/>
+              </a:rPr>
+              <a:t>데이터 표시</a:t>
+            </a:r>
+            <a:endParaRPr lang="en-US" sz="2600" dirty="0"/>
+          </a:p>
+        </p:txBody>
+      </p:sp>
+      <p:sp>
+        <p:nvSpPr>
+          <p:cNvPr id="4" name="Text 2"/>
+          <p:cNvSpPr txBox="1"/>
+          <p:nvPr/>
+        </p:nvSpPr>
+        <p:spPr>
+          <a:xfrm>
+            <a:off x="640080" y="1298448"/>
+            <a:ext cx="10911535" cy="347472"/>
+          </a:xfrm>
+          <a:prstGeom prst="rect">
+            <a:avLst/>
+          </a:prstGeom>
+          <a:noFill/>
+          <a:ln/>
+        </p:spPr>
+        <p:txBody>
+          <a:bodyPr wrap="square" lIns="0" tIns="0" rIns="0" bIns="0" rtlCol="0" anchor="t"/>
+          <a:lstStyle/>
+          <a:p>
+            <a:pPr algn="l" indent="0" marL="0">
+              <a:lnSpc>
+                <a:spcPct val="100000"/>
+              </a:lnSpc>
+              <a:buNone/>
+            </a:pPr>
+            <a:r>
+              <a:rPr lang="en-US" sz="1200" dirty="0">
+                <a:solidFill>
+                  <a:srgbClr val="8A9099"/>
+                </a:solidFill>
+                <a:latin typeface="Malgun Gothic" pitchFamily="34" charset="0"/>
+                <a:ea typeface="Malgun Gothic" pitchFamily="34" charset="-122"/>
+                <a:cs typeface="Malgun Gothic" pitchFamily="34" charset="-120"/>
+              </a:rPr>
+              <a:t>수치·차트·바는 항상 같은 규칙으로 표시합니다.</a:t>
+            </a:r>
+            <a:endParaRPr lang="en-US" sz="1200" dirty="0"/>
+          </a:p>
+        </p:txBody>
+      </p:sp>
+      <p:sp>
+        <p:nvSpPr>
+          <p:cNvPr id="5" name="Text 3"/>
+          <p:cNvSpPr txBox="1"/>
+          <p:nvPr/>
+        </p:nvSpPr>
+        <p:spPr>
+          <a:xfrm>
+            <a:off x="640080" y="1965960"/>
+            <a:ext cx="5486400" cy="228600"/>
+          </a:xfrm>
+          <a:prstGeom prst="rect">
+            <a:avLst/>
+          </a:prstGeom>
+          <a:noFill/>
+          <a:ln/>
+        </p:spPr>
+        <p:txBody>
+          <a:bodyPr wrap="square" lIns="0" tIns="0" rIns="0" bIns="0" rtlCol="0" anchor="t"/>
+          <a:lstStyle/>
+          <a:p>
+            <a:pPr algn="l" indent="0" marL="0">
+              <a:lnSpc>
+                <a:spcPct val="100000"/>
+              </a:lnSpc>
+              <a:buNone/>
+            </a:pPr>
+            <a:r>
+              <a:rPr lang="en-US" sz="1050" b="1" spc="150" kern="0" dirty="0">
+                <a:solidFill>
+                  <a:srgbClr val="8A9099"/>
+                </a:solidFill>
+                <a:latin typeface="Malgun Gothic" pitchFamily="34" charset="0"/>
+                <a:ea typeface="Malgun Gothic" pitchFamily="34" charset="-122"/>
+                <a:cs typeface="Malgun Gothic" pitchFamily="34" charset="-120"/>
+              </a:rPr>
+              <a:t>BIG METRIC</a:t>
+            </a:r>
+            <a:endParaRPr lang="en-US" sz="1050" dirty="0"/>
+          </a:p>
+        </p:txBody>
+      </p:sp>
+      <p:sp>
+        <p:nvSpPr>
+          <p:cNvPr id="6" name="Shape 4"/>
+          <p:cNvSpPr/>
+          <p:nvPr/>
+        </p:nvSpPr>
+        <p:spPr>
+          <a:xfrm>
+            <a:off x="1265530" y="2317090"/>
+            <a:ext cx="120701" cy="120701"/>
+          </a:xfrm>
+          <a:prstGeom prst="roundRect">
+            <a:avLst>
+              <a:gd name="adj" fmla="val 22727"/>
+            </a:avLst>
+          </a:prstGeom>
+          <a:ln w="16510">
+            <a:solidFill>
+              <a:srgbClr val="8A9099"/>
+            </a:solidFill>
+            <a:prstDash val="solid"/>
+          </a:ln>
+        </p:spPr>
+      </p:sp>
+      <p:sp>
+        <p:nvSpPr>
+          <p:cNvPr id="7" name="Shape 5"/>
+          <p:cNvSpPr/>
+          <p:nvPr/>
+        </p:nvSpPr>
+        <p:spPr>
+          <a:xfrm>
+            <a:off x="1325880" y="2262226"/>
+            <a:ext cx="0" cy="43891"/>
+          </a:xfrm>
+          <a:prstGeom prst="line">
+            <a:avLst/>
+          </a:prstGeom>
+          <a:noFill/>
+          <a:ln w="16510">
+            <a:solidFill>
+              <a:srgbClr val="8A9099"/>
+            </a:solidFill>
+            <a:prstDash val="solid"/>
+          </a:ln>
+        </p:spPr>
+      </p:sp>
+      <p:sp>
+        <p:nvSpPr>
+          <p:cNvPr id="8" name="Shape 6"/>
+          <p:cNvSpPr/>
+          <p:nvPr/>
+        </p:nvSpPr>
+        <p:spPr>
+          <a:xfrm>
+            <a:off x="1325880" y="2448763"/>
+            <a:ext cx="0" cy="43891"/>
+          </a:xfrm>
+          <a:prstGeom prst="line">
+            <a:avLst/>
+          </a:prstGeom>
+          <a:noFill/>
+          <a:ln w="16510">
+            <a:solidFill>
+              <a:srgbClr val="8A9099"/>
+            </a:solidFill>
+            <a:prstDash val="solid"/>
+          </a:ln>
+        </p:spPr>
+      </p:sp>
+      <p:sp>
+        <p:nvSpPr>
+          <p:cNvPr id="9" name="Shape 7"/>
+          <p:cNvSpPr/>
+          <p:nvPr/>
+        </p:nvSpPr>
+        <p:spPr>
+          <a:xfrm>
+            <a:off x="1210666" y="2377440"/>
+            <a:ext cx="43891" cy="0"/>
+          </a:xfrm>
+          <a:prstGeom prst="line">
+            <a:avLst/>
+          </a:prstGeom>
+          <a:noFill/>
+          <a:ln w="16510">
+            <a:solidFill>
+              <a:srgbClr val="8A9099"/>
+            </a:solidFill>
+            <a:prstDash val="solid"/>
+          </a:ln>
+        </p:spPr>
+      </p:sp>
+      <p:sp>
+        <p:nvSpPr>
+          <p:cNvPr id="10" name="Shape 8"/>
+          <p:cNvSpPr/>
+          <p:nvPr/>
+        </p:nvSpPr>
+        <p:spPr>
+          <a:xfrm>
+            <a:off x="1397203" y="2377440"/>
+            <a:ext cx="43891" cy="0"/>
+          </a:xfrm>
+          <a:prstGeom prst="line">
+            <a:avLst/>
+          </a:prstGeom>
+          <a:noFill/>
+          <a:ln w="16510">
+            <a:solidFill>
+              <a:srgbClr val="8A9099"/>
+            </a:solidFill>
+            <a:prstDash val="solid"/>
+          </a:ln>
+        </p:spPr>
+      </p:sp>
+      <p:sp>
+        <p:nvSpPr>
+          <p:cNvPr id="11" name="Text 9"/>
+          <p:cNvSpPr txBox="1"/>
+          <p:nvPr/>
+        </p:nvSpPr>
+        <p:spPr>
+          <a:xfrm>
+            <a:off x="640080" y="2560320"/>
+            <a:ext cx="1371600" cy="548640"/>
+          </a:xfrm>
+          <a:prstGeom prst="rect">
+            <a:avLst/>
+          </a:prstGeom>
+          <a:noFill/>
+          <a:ln/>
+        </p:spPr>
+        <p:txBody>
+          <a:bodyPr wrap="square" lIns="0" tIns="0" rIns="0" bIns="0" rtlCol="0" anchor="t"/>
+          <a:lstStyle/>
+          <a:p>
+            <a:pPr algn="ctr" indent="0" marL="0">
+              <a:lnSpc>
+                <a:spcPct val="100000"/>
+              </a:lnSpc>
+              <a:buNone/>
+            </a:pPr>
+            <a:r>
+              <a:rPr lang="en-US" sz="2800" b="1" dirty="0">
+                <a:solidFill>
+                  <a:srgbClr val="E6E9EF"/>
+                </a:solidFill>
+                <a:latin typeface="Malgun Gothic" pitchFamily="34" charset="0"/>
+                <a:ea typeface="Malgun Gothic" pitchFamily="34" charset="-122"/>
+                <a:cs typeface="Malgun Gothic" pitchFamily="34" charset="-120"/>
+              </a:rPr>
+              <a:t>37%</a:t>
+            </a:r>
+            <a:endParaRPr lang="en-US" sz="2800" dirty="0"/>
+          </a:p>
+        </p:txBody>
+      </p:sp>
+      <p:sp>
+        <p:nvSpPr>
+          <p:cNvPr id="12" name="Text 10"/>
+          <p:cNvSpPr txBox="1"/>
+          <p:nvPr/>
+        </p:nvSpPr>
+        <p:spPr>
+          <a:xfrm>
+            <a:off x="640080" y="3108960"/>
+            <a:ext cx="1371600" cy="228600"/>
+          </a:xfrm>
+          <a:prstGeom prst="rect">
+            <a:avLst/>
+          </a:prstGeom>
+          <a:noFill/>
+          <a:ln/>
+        </p:spPr>
+        <p:txBody>
+          <a:bodyPr wrap="square" lIns="0" tIns="0" rIns="0" bIns="0" rtlCol="0" anchor="t"/>
+          <a:lstStyle/>
+          <a:p>
+            <a:pPr algn="ctr" indent="0" marL="0">
+              <a:lnSpc>
+                <a:spcPct val="100000"/>
+              </a:lnSpc>
+              <a:buNone/>
+            </a:pPr>
+            <a:r>
+              <a:rPr lang="en-US" sz="1050" dirty="0">
+                <a:solidFill>
+                  <a:srgbClr val="8A9099"/>
+                </a:solidFill>
+                <a:latin typeface="Malgun Gothic" pitchFamily="34" charset="0"/>
+                <a:ea typeface="Malgun Gothic" pitchFamily="34" charset="-122"/>
+                <a:cs typeface="Malgun Gothic" pitchFamily="34" charset="-120"/>
+              </a:rPr>
+              <a:t>CPU</a:t>
+            </a:r>
+            <a:endParaRPr lang="en-US" sz="1050" dirty="0"/>
+          </a:p>
+        </p:txBody>
+      </p:sp>
+      <p:sp>
+        <p:nvSpPr>
+          <p:cNvPr id="13" name="Shape 11"/>
+          <p:cNvSpPr/>
+          <p:nvPr/>
+        </p:nvSpPr>
+        <p:spPr>
+          <a:xfrm>
+            <a:off x="3125419" y="2286914"/>
+            <a:ext cx="241402" cy="71323"/>
+          </a:xfrm>
+          <a:prstGeom prst="roundRect">
+            <a:avLst>
+              <a:gd name="adj" fmla="val 38462"/>
+            </a:avLst>
+          </a:prstGeom>
+          <a:ln w="16510">
+            <a:solidFill>
+              <a:srgbClr val="8A9099"/>
+            </a:solidFill>
+            <a:prstDash val="solid"/>
+          </a:ln>
+        </p:spPr>
+      </p:sp>
+      <p:sp>
+        <p:nvSpPr>
+          <p:cNvPr id="14" name="Shape 12"/>
+          <p:cNvSpPr/>
+          <p:nvPr/>
+        </p:nvSpPr>
+        <p:spPr>
+          <a:xfrm>
+            <a:off x="3125419" y="2396642"/>
+            <a:ext cx="241402" cy="71323"/>
+          </a:xfrm>
+          <a:prstGeom prst="roundRect">
+            <a:avLst>
+              <a:gd name="adj" fmla="val 38462"/>
+            </a:avLst>
+          </a:prstGeom>
+          <a:ln w="16510">
+            <a:solidFill>
+              <a:srgbClr val="8A9099"/>
+            </a:solidFill>
+            <a:prstDash val="solid"/>
+          </a:ln>
+        </p:spPr>
+      </p:sp>
+      <p:sp>
+        <p:nvSpPr>
+          <p:cNvPr id="15" name="Text 13"/>
+          <p:cNvSpPr txBox="1"/>
+          <p:nvPr/>
+        </p:nvSpPr>
+        <p:spPr>
+          <a:xfrm>
+            <a:off x="2560320" y="2560320"/>
+            <a:ext cx="1371600" cy="548640"/>
+          </a:xfrm>
+          <a:prstGeom prst="rect">
+            <a:avLst/>
+          </a:prstGeom>
+          <a:noFill/>
+          <a:ln/>
+        </p:spPr>
+        <p:txBody>
+          <a:bodyPr wrap="square" lIns="0" tIns="0" rIns="0" bIns="0" rtlCol="0" anchor="t"/>
+          <a:lstStyle/>
+          <a:p>
+            <a:pPr algn="ctr" indent="0" marL="0">
+              <a:lnSpc>
+                <a:spcPct val="100000"/>
+              </a:lnSpc>
+              <a:buNone/>
+            </a:pPr>
+            <a:r>
+              <a:rPr lang="en-US" sz="2800" b="1" dirty="0">
+                <a:solidFill>
+                  <a:srgbClr val="E6E9EF"/>
+                </a:solidFill>
+                <a:latin typeface="Malgun Gothic" pitchFamily="34" charset="0"/>
+                <a:ea typeface="Malgun Gothic" pitchFamily="34" charset="-122"/>
+                <a:cs typeface="Malgun Gothic" pitchFamily="34" charset="-120"/>
+              </a:rPr>
+              <a:t>54%</a:t>
+            </a:r>
+            <a:endParaRPr lang="en-US" sz="2800" dirty="0"/>
+          </a:p>
+        </p:txBody>
+      </p:sp>
+      <p:sp>
+        <p:nvSpPr>
+          <p:cNvPr id="16" name="Text 14"/>
+          <p:cNvSpPr txBox="1"/>
+          <p:nvPr/>
+        </p:nvSpPr>
+        <p:spPr>
+          <a:xfrm>
+            <a:off x="2560320" y="3108960"/>
+            <a:ext cx="1371600" cy="228600"/>
+          </a:xfrm>
+          <a:prstGeom prst="rect">
+            <a:avLst/>
+          </a:prstGeom>
+          <a:noFill/>
+          <a:ln/>
+        </p:spPr>
+        <p:txBody>
+          <a:bodyPr wrap="square" lIns="0" tIns="0" rIns="0" bIns="0" rtlCol="0" anchor="t"/>
+          <a:lstStyle/>
+          <a:p>
+            <a:pPr algn="ctr" indent="0" marL="0">
+              <a:lnSpc>
+                <a:spcPct val="100000"/>
+              </a:lnSpc>
+              <a:buNone/>
+            </a:pPr>
+            <a:r>
+              <a:rPr lang="en-US" sz="1050" dirty="0">
+                <a:solidFill>
+                  <a:srgbClr val="8A9099"/>
+                </a:solidFill>
+                <a:latin typeface="Malgun Gothic" pitchFamily="34" charset="0"/>
+                <a:ea typeface="Malgun Gothic" pitchFamily="34" charset="-122"/>
+                <a:cs typeface="Malgun Gothic" pitchFamily="34" charset="-120"/>
+              </a:rPr>
+              <a:t>MEM</a:t>
+            </a:r>
+            <a:endParaRPr lang="en-US" sz="1050" dirty="0"/>
+          </a:p>
+        </p:txBody>
+      </p:sp>
+      <p:sp>
+        <p:nvSpPr>
+          <p:cNvPr id="17" name="Shape 15"/>
+          <p:cNvSpPr/>
+          <p:nvPr/>
+        </p:nvSpPr>
+        <p:spPr>
+          <a:xfrm>
+            <a:off x="5045659" y="2275942"/>
+            <a:ext cx="241402" cy="82296"/>
+          </a:xfrm>
+          <a:prstGeom prst="roundRect">
+            <a:avLst>
+              <a:gd name="adj" fmla="val 33333"/>
+            </a:avLst>
+          </a:prstGeom>
+          <a:ln w="16510">
+            <a:solidFill>
+              <a:srgbClr val="8A9099"/>
+            </a:solidFill>
+            <a:prstDash val="solid"/>
+          </a:ln>
+        </p:spPr>
+      </p:sp>
+      <p:sp>
+        <p:nvSpPr>
+          <p:cNvPr id="18" name="Shape 16"/>
+          <p:cNvSpPr/>
+          <p:nvPr/>
+        </p:nvSpPr>
+        <p:spPr>
+          <a:xfrm>
+            <a:off x="5045659" y="2396642"/>
+            <a:ext cx="241402" cy="82296"/>
+          </a:xfrm>
+          <a:prstGeom prst="roundRect">
+            <a:avLst>
+              <a:gd name="adj" fmla="val 33333"/>
+            </a:avLst>
+          </a:prstGeom>
+          <a:ln w="16510">
+            <a:solidFill>
+              <a:srgbClr val="8A9099"/>
+            </a:solidFill>
+            <a:prstDash val="solid"/>
+          </a:ln>
+        </p:spPr>
+      </p:sp>
+      <p:sp>
+        <p:nvSpPr>
+          <p:cNvPr id="19" name="Shape 17"/>
+          <p:cNvSpPr/>
+          <p:nvPr/>
+        </p:nvSpPr>
+        <p:spPr>
+          <a:xfrm>
+            <a:off x="5081321" y="2304745"/>
+            <a:ext cx="19202" cy="19202"/>
+          </a:xfrm>
+          <a:prstGeom prst="roundRect">
+            <a:avLst>
+              <a:gd name="adj" fmla="val 95240"/>
+            </a:avLst>
+          </a:prstGeom>
+          <a:solidFill>
+            <a:srgbClr val="8A9099"/>
+          </a:solidFill>
+          <a:ln/>
+        </p:spPr>
+      </p:sp>
+      <p:sp>
+        <p:nvSpPr>
+          <p:cNvPr id="20" name="Shape 18"/>
+          <p:cNvSpPr/>
+          <p:nvPr/>
+        </p:nvSpPr>
+        <p:spPr>
+          <a:xfrm>
+            <a:off x="5081321" y="2425446"/>
+            <a:ext cx="19202" cy="19202"/>
+          </a:xfrm>
+          <a:prstGeom prst="roundRect">
+            <a:avLst>
+              <a:gd name="adj" fmla="val 95240"/>
+            </a:avLst>
+          </a:prstGeom>
+          <a:solidFill>
+            <a:srgbClr val="8A9099"/>
+          </a:solidFill>
+          <a:ln/>
+        </p:spPr>
+      </p:sp>
+      <p:sp>
+        <p:nvSpPr>
+          <p:cNvPr id="21" name="Text 19"/>
+          <p:cNvSpPr txBox="1"/>
+          <p:nvPr/>
+        </p:nvSpPr>
+        <p:spPr>
+          <a:xfrm>
+            <a:off x="4480560" y="2560320"/>
+            <a:ext cx="1371600" cy="548640"/>
+          </a:xfrm>
+          <a:prstGeom prst="rect">
+            <a:avLst/>
+          </a:prstGeom>
+          <a:noFill/>
+          <a:ln/>
+        </p:spPr>
+        <p:txBody>
+          <a:bodyPr wrap="square" lIns="0" tIns="0" rIns="0" bIns="0" rtlCol="0" anchor="t"/>
+          <a:lstStyle/>
+          <a:p>
+            <a:pPr algn="ctr" indent="0" marL="0">
+              <a:lnSpc>
+                <a:spcPct val="100000"/>
+              </a:lnSpc>
+              <a:buNone/>
+            </a:pPr>
+            <a:r>
+              <a:rPr lang="en-US" sz="2800" b="1" dirty="0">
+                <a:solidFill>
+                  <a:srgbClr val="E6E9EF"/>
+                </a:solidFill>
+                <a:latin typeface="Malgun Gothic" pitchFamily="34" charset="0"/>
+                <a:ea typeface="Malgun Gothic" pitchFamily="34" charset="-122"/>
+                <a:cs typeface="Malgun Gothic" pitchFamily="34" charset="-120"/>
+              </a:rPr>
+              <a:t>40%</a:t>
+            </a:r>
+            <a:endParaRPr lang="en-US" sz="2800" dirty="0"/>
+          </a:p>
+        </p:txBody>
+      </p:sp>
+      <p:sp>
+        <p:nvSpPr>
+          <p:cNvPr id="22" name="Text 20"/>
+          <p:cNvSpPr txBox="1"/>
+          <p:nvPr/>
+        </p:nvSpPr>
+        <p:spPr>
+          <a:xfrm>
+            <a:off x="4480560" y="3108960"/>
+            <a:ext cx="1371600" cy="228600"/>
+          </a:xfrm>
+          <a:prstGeom prst="rect">
+            <a:avLst/>
+          </a:prstGeom>
+          <a:noFill/>
+          <a:ln/>
+        </p:spPr>
+        <p:txBody>
+          <a:bodyPr wrap="square" lIns="0" tIns="0" rIns="0" bIns="0" rtlCol="0" anchor="t"/>
+          <a:lstStyle/>
+          <a:p>
+            <a:pPr algn="ctr" indent="0" marL="0">
+              <a:lnSpc>
+                <a:spcPct val="100000"/>
+              </a:lnSpc>
+              <a:buNone/>
+            </a:pPr>
+            <a:r>
+              <a:rPr lang="en-US" sz="1050" dirty="0">
+                <a:solidFill>
+                  <a:srgbClr val="8A9099"/>
+                </a:solidFill>
+                <a:latin typeface="Malgun Gothic" pitchFamily="34" charset="0"/>
+                <a:ea typeface="Malgun Gothic" pitchFamily="34" charset="-122"/>
+                <a:cs typeface="Malgun Gothic" pitchFamily="34" charset="-120"/>
+              </a:rPr>
+              <a:t>DISK</a:t>
+            </a:r>
+            <a:endParaRPr lang="en-US" sz="1050" dirty="0"/>
+          </a:p>
+        </p:txBody>
+      </p:sp>
+      <p:sp>
+        <p:nvSpPr>
+          <p:cNvPr id="23" name="Text 21"/>
+          <p:cNvSpPr txBox="1"/>
+          <p:nvPr/>
+        </p:nvSpPr>
+        <p:spPr>
+          <a:xfrm>
+            <a:off x="640080" y="3520440"/>
+            <a:ext cx="5486400" cy="228600"/>
+          </a:xfrm>
+          <a:prstGeom prst="rect">
+            <a:avLst/>
+          </a:prstGeom>
+          <a:noFill/>
+          <a:ln/>
+        </p:spPr>
+        <p:txBody>
+          <a:bodyPr wrap="square" lIns="0" tIns="0" rIns="0" bIns="0" rtlCol="0" anchor="t"/>
+          <a:lstStyle/>
+          <a:p>
+            <a:pPr algn="l" indent="0" marL="0">
+              <a:lnSpc>
+                <a:spcPct val="100000"/>
+              </a:lnSpc>
+              <a:buNone/>
+            </a:pPr>
+            <a:r>
+              <a:rPr lang="en-US" sz="1050" b="1" spc="150" kern="0" dirty="0">
+                <a:solidFill>
+                  <a:srgbClr val="8A9099"/>
+                </a:solidFill>
+                <a:latin typeface="Malgun Gothic" pitchFamily="34" charset="0"/>
+                <a:ea typeface="Malgun Gothic" pitchFamily="34" charset="-122"/>
+                <a:cs typeface="Malgun Gothic" pitchFamily="34" charset="-120"/>
+              </a:rPr>
+              <a:t>CHART</a:t>
+            </a:r>
+            <a:endParaRPr lang="en-US" sz="1050" dirty="0"/>
+          </a:p>
+        </p:txBody>
+      </p:sp>
+      <p:sp>
+        <p:nvSpPr>
+          <p:cNvPr id="24" name="Shape 22"/>
+          <p:cNvSpPr/>
+          <p:nvPr/>
+        </p:nvSpPr>
+        <p:spPr>
+          <a:xfrm>
+            <a:off x="640080" y="3794760"/>
+            <a:ext cx="5486400" cy="1371600"/>
+          </a:xfrm>
+          <a:prstGeom prst="roundRect">
+            <a:avLst>
+              <a:gd name="adj" fmla="val 5333"/>
+            </a:avLst>
+          </a:prstGeom>
+          <a:solidFill>
+            <a:srgbClr val="232732"/>
+          </a:solidFill>
+          <a:ln/>
+        </p:spPr>
+      </p:sp>
+      <p:sp>
+        <p:nvSpPr>
+          <p:cNvPr id="25" name="Text 23"/>
+          <p:cNvSpPr txBox="1"/>
+          <p:nvPr/>
+        </p:nvSpPr>
+        <p:spPr>
+          <a:xfrm>
+            <a:off x="749808" y="3886200"/>
+            <a:ext cx="640080" cy="182880"/>
+          </a:xfrm>
+          <a:prstGeom prst="rect">
+            <a:avLst/>
+          </a:prstGeom>
+          <a:noFill/>
+          <a:ln/>
+        </p:spPr>
+        <p:txBody>
+          <a:bodyPr wrap="square" lIns="0" tIns="0" rIns="0" bIns="0" rtlCol="0" anchor="t"/>
+          <a:lstStyle/>
+          <a:p>
+            <a:pPr algn="l" indent="0" marL="0">
+              <a:lnSpc>
+                <a:spcPct val="100000"/>
+              </a:lnSpc>
+              <a:buNone/>
+            </a:pPr>
+            <a:r>
+              <a:rPr lang="en-US" sz="800" dirty="0">
+                <a:solidFill>
+                  <a:srgbClr val="8A9099"/>
+                </a:solidFill>
+                <a:latin typeface="Malgun Gothic" pitchFamily="34" charset="0"/>
+                <a:ea typeface="Malgun Gothic" pitchFamily="34" charset="-122"/>
+                <a:cs typeface="Malgun Gothic" pitchFamily="34" charset="-120"/>
+              </a:rPr>
+              <a:t>20%</a:t>
+            </a:r>
+            <a:endParaRPr lang="en-US" sz="800" dirty="0"/>
+          </a:p>
+        </p:txBody>
+      </p:sp>
+      <p:sp>
+        <p:nvSpPr>
+          <p:cNvPr id="26" name="Text 24"/>
+          <p:cNvSpPr txBox="1"/>
+          <p:nvPr/>
+        </p:nvSpPr>
+        <p:spPr>
+          <a:xfrm>
+            <a:off x="749808" y="4389120"/>
+            <a:ext cx="640080" cy="182880"/>
+          </a:xfrm>
+          <a:prstGeom prst="rect">
+            <a:avLst/>
+          </a:prstGeom>
+          <a:noFill/>
+          <a:ln/>
+        </p:spPr>
+        <p:txBody>
+          <a:bodyPr wrap="square" lIns="0" tIns="0" rIns="0" bIns="0" rtlCol="0" anchor="t"/>
+          <a:lstStyle/>
+          <a:p>
+            <a:pPr algn="l" indent="0" marL="0">
+              <a:lnSpc>
+                <a:spcPct val="100000"/>
+              </a:lnSpc>
+              <a:buNone/>
+            </a:pPr>
+            <a:r>
+              <a:rPr lang="en-US" sz="800" dirty="0">
+                <a:solidFill>
+                  <a:srgbClr val="8A9099"/>
+                </a:solidFill>
+                <a:latin typeface="Malgun Gothic" pitchFamily="34" charset="0"/>
+                <a:ea typeface="Malgun Gothic" pitchFamily="34" charset="-122"/>
+                <a:cs typeface="Malgun Gothic" pitchFamily="34" charset="-120"/>
+              </a:rPr>
+              <a:t>10%</a:t>
+            </a:r>
+            <a:endParaRPr lang="en-US" sz="800" dirty="0"/>
+          </a:p>
+        </p:txBody>
+      </p:sp>
+      <p:sp>
+        <p:nvSpPr>
+          <p:cNvPr id="27" name="Text 25"/>
+          <p:cNvSpPr txBox="1"/>
+          <p:nvPr/>
+        </p:nvSpPr>
+        <p:spPr>
+          <a:xfrm>
+            <a:off x="749808" y="4892040"/>
+            <a:ext cx="640080" cy="182880"/>
+          </a:xfrm>
+          <a:prstGeom prst="rect">
+            <a:avLst/>
+          </a:prstGeom>
+          <a:noFill/>
+          <a:ln/>
+        </p:spPr>
+        <p:txBody>
+          <a:bodyPr wrap="square" lIns="0" tIns="0" rIns="0" bIns="0" rtlCol="0" anchor="t"/>
+          <a:lstStyle/>
+          <a:p>
+            <a:pPr algn="l" indent="0" marL="0">
+              <a:lnSpc>
+                <a:spcPct val="100000"/>
+              </a:lnSpc>
+              <a:buNone/>
+            </a:pPr>
+            <a:r>
+              <a:rPr lang="en-US" sz="800" dirty="0">
+                <a:solidFill>
+                  <a:srgbClr val="8A9099"/>
+                </a:solidFill>
+                <a:latin typeface="Malgun Gothic" pitchFamily="34" charset="0"/>
+                <a:ea typeface="Malgun Gothic" pitchFamily="34" charset="-122"/>
+                <a:cs typeface="Malgun Gothic" pitchFamily="34" charset="-120"/>
+              </a:rPr>
+              <a:t>0%</a:t>
+            </a:r>
+            <a:endParaRPr lang="en-US" sz="800" dirty="0"/>
+          </a:p>
+        </p:txBody>
+      </p:sp>
+      <p:sp>
+        <p:nvSpPr>
+          <p:cNvPr id="28" name="Shape 26"/>
+          <p:cNvSpPr/>
+          <p:nvPr/>
+        </p:nvSpPr>
+        <p:spPr>
+          <a:xfrm flipV="1">
+            <a:off x="1508760" y="4539343"/>
+            <a:ext cx="640080" cy="489857"/>
+          </a:xfrm>
+          <a:prstGeom prst="line">
+            <a:avLst/>
+          </a:prstGeom>
+          <a:noFill/>
+          <a:ln w="20320">
+            <a:solidFill>
+              <a:srgbClr val="4C8DFF"/>
+            </a:solidFill>
+            <a:prstDash val="solid"/>
+          </a:ln>
+        </p:spPr>
+      </p:sp>
+      <p:sp>
+        <p:nvSpPr>
+          <p:cNvPr id="29" name="Shape 27"/>
+          <p:cNvSpPr/>
+          <p:nvPr/>
+        </p:nvSpPr>
+        <p:spPr>
+          <a:xfrm>
+            <a:off x="2148840" y="4539343"/>
+            <a:ext cx="640080" cy="326571"/>
+          </a:xfrm>
+          <a:prstGeom prst="line">
+            <a:avLst/>
+          </a:prstGeom>
+          <a:noFill/>
+          <a:ln w="20320">
+            <a:solidFill>
+              <a:srgbClr val="4C8DFF"/>
+            </a:solidFill>
+            <a:prstDash val="solid"/>
+          </a:ln>
+        </p:spPr>
+      </p:sp>
+      <p:sp>
+        <p:nvSpPr>
+          <p:cNvPr id="30" name="Shape 28"/>
+          <p:cNvSpPr/>
+          <p:nvPr/>
+        </p:nvSpPr>
+        <p:spPr>
+          <a:xfrm flipV="1">
+            <a:off x="2788920" y="4212771"/>
+            <a:ext cx="640080" cy="653143"/>
+          </a:xfrm>
+          <a:prstGeom prst="line">
+            <a:avLst/>
+          </a:prstGeom>
+          <a:noFill/>
+          <a:ln w="20320">
+            <a:solidFill>
+              <a:srgbClr val="4C8DFF"/>
+            </a:solidFill>
+            <a:prstDash val="solid"/>
+          </a:ln>
+        </p:spPr>
+      </p:sp>
+      <p:sp>
+        <p:nvSpPr>
+          <p:cNvPr id="31" name="Shape 29"/>
+          <p:cNvSpPr/>
+          <p:nvPr/>
+        </p:nvSpPr>
+        <p:spPr>
+          <a:xfrm>
+            <a:off x="3429000" y="4212771"/>
+            <a:ext cx="640080" cy="489857"/>
+          </a:xfrm>
+          <a:prstGeom prst="line">
+            <a:avLst/>
+          </a:prstGeom>
+          <a:noFill/>
+          <a:ln w="20320">
+            <a:solidFill>
+              <a:srgbClr val="4C8DFF"/>
+            </a:solidFill>
+            <a:prstDash val="solid"/>
+          </a:ln>
+        </p:spPr>
+      </p:sp>
+      <p:sp>
+        <p:nvSpPr>
+          <p:cNvPr id="32" name="Shape 30"/>
+          <p:cNvSpPr/>
+          <p:nvPr/>
+        </p:nvSpPr>
+        <p:spPr>
+          <a:xfrm flipV="1">
+            <a:off x="4069080" y="4049486"/>
+            <a:ext cx="640080" cy="653143"/>
+          </a:xfrm>
+          <a:prstGeom prst="line">
+            <a:avLst/>
+          </a:prstGeom>
+          <a:noFill/>
+          <a:ln w="20320">
+            <a:solidFill>
+              <a:srgbClr val="4C8DFF"/>
+            </a:solidFill>
+            <a:prstDash val="solid"/>
+          </a:ln>
+        </p:spPr>
+      </p:sp>
+      <p:sp>
+        <p:nvSpPr>
+          <p:cNvPr id="33" name="Shape 31"/>
+          <p:cNvSpPr/>
+          <p:nvPr/>
+        </p:nvSpPr>
+        <p:spPr>
+          <a:xfrm>
+            <a:off x="4709160" y="4049486"/>
+            <a:ext cx="640080" cy="326571"/>
+          </a:xfrm>
+          <a:prstGeom prst="line">
+            <a:avLst/>
+          </a:prstGeom>
+          <a:noFill/>
+          <a:ln w="20320">
+            <a:solidFill>
+              <a:srgbClr val="4C8DFF"/>
+            </a:solidFill>
+            <a:prstDash val="solid"/>
+          </a:ln>
+        </p:spPr>
+      </p:sp>
+      <p:sp>
+        <p:nvSpPr>
+          <p:cNvPr id="34" name="Shape 32"/>
+          <p:cNvSpPr/>
+          <p:nvPr/>
+        </p:nvSpPr>
+        <p:spPr>
+          <a:xfrm flipV="1">
+            <a:off x="5349240" y="3886200"/>
+            <a:ext cx="640080" cy="489857"/>
+          </a:xfrm>
+          <a:prstGeom prst="line">
+            <a:avLst/>
+          </a:prstGeom>
+          <a:noFill/>
+          <a:ln w="20320">
+            <a:solidFill>
+              <a:srgbClr val="4C8DFF"/>
+            </a:solidFill>
+            <a:prstDash val="solid"/>
+          </a:ln>
+        </p:spPr>
+      </p:sp>
+      <p:sp>
+        <p:nvSpPr>
+          <p:cNvPr id="35" name="Text 33"/>
+          <p:cNvSpPr txBox="1"/>
+          <p:nvPr/>
+        </p:nvSpPr>
+        <p:spPr>
+          <a:xfrm>
+            <a:off x="640080" y="5257800"/>
+            <a:ext cx="5669280" cy="274320"/>
+          </a:xfrm>
+          <a:prstGeom prst="rect">
+            <a:avLst/>
+          </a:prstGeom>
+          <a:noFill/>
+          <a:ln/>
+        </p:spPr>
+        <p:txBody>
+          <a:bodyPr wrap="square" lIns="0" tIns="0" rIns="0" bIns="0" rtlCol="0" anchor="t"/>
+          <a:lstStyle/>
+          <a:p>
+            <a:pPr algn="l" indent="0" marL="0">
+              <a:lnSpc>
+                <a:spcPct val="100000"/>
+              </a:lnSpc>
+              <a:buNone/>
+            </a:pPr>
+            <a:r>
+              <a:rPr lang="en-US" sz="1050" dirty="0">
+                <a:solidFill>
+                  <a:srgbClr val="8A9099"/>
+                </a:solidFill>
+                <a:latin typeface="Malgun Gothic" pitchFamily="34" charset="0"/>
+                <a:ea typeface="Malgun Gothic" pitchFamily="34" charset="-122"/>
+                <a:cs typeface="Malgun Gothic" pitchFamily="34" charset="-120"/>
+              </a:rPr>
+              <a:t>y축 숫자 눈금 + 자동 스케일 + 부드러운 곡선 + 현재값 표시.</a:t>
+            </a:r>
+            <a:endParaRPr lang="en-US" sz="1050" dirty="0"/>
+          </a:p>
+        </p:txBody>
+      </p:sp>
+      <p:sp>
+        <p:nvSpPr>
+          <p:cNvPr id="36" name="Text 34"/>
+          <p:cNvSpPr txBox="1"/>
+          <p:nvPr/>
+        </p:nvSpPr>
+        <p:spPr>
+          <a:xfrm>
+            <a:off x="6675120" y="1965960"/>
+            <a:ext cx="4876495" cy="228600"/>
+          </a:xfrm>
+          <a:prstGeom prst="rect">
+            <a:avLst/>
+          </a:prstGeom>
+          <a:noFill/>
+          <a:ln/>
+        </p:spPr>
+        <p:txBody>
+          <a:bodyPr wrap="square" lIns="0" tIns="0" rIns="0" bIns="0" rtlCol="0" anchor="t"/>
+          <a:lstStyle/>
+          <a:p>
+            <a:pPr algn="l" indent="0" marL="0">
+              <a:lnSpc>
+                <a:spcPct val="100000"/>
+              </a:lnSpc>
+              <a:buNone/>
+            </a:pPr>
+            <a:r>
+              <a:rPr lang="en-US" sz="1050" b="1" spc="150" kern="0" dirty="0">
+                <a:solidFill>
+                  <a:srgbClr val="8A9099"/>
+                </a:solidFill>
+                <a:latin typeface="Malgun Gothic" pitchFamily="34" charset="0"/>
+                <a:ea typeface="Malgun Gothic" pitchFamily="34" charset="-122"/>
+                <a:cs typeface="Malgun Gothic" pitchFamily="34" charset="-120"/>
+              </a:rPr>
+              <a:t>BARS &amp; LISTS</a:t>
+            </a:r>
+            <a:endParaRPr lang="en-US" sz="1050" dirty="0"/>
+          </a:p>
+        </p:txBody>
+      </p:sp>
+      <p:sp>
+        <p:nvSpPr>
+          <p:cNvPr id="37" name="Shape 35"/>
+          <p:cNvSpPr/>
+          <p:nvPr/>
+        </p:nvSpPr>
+        <p:spPr>
+          <a:xfrm>
+            <a:off x="6675120" y="2240280"/>
+            <a:ext cx="4876495" cy="365760"/>
+          </a:xfrm>
+          <a:prstGeom prst="roundRect">
+            <a:avLst>
+              <a:gd name="adj" fmla="val 50000"/>
+            </a:avLst>
+          </a:prstGeom>
+          <a:solidFill>
+            <a:srgbClr val="232732"/>
+          </a:solidFill>
+          <a:ln/>
+        </p:spPr>
+      </p:sp>
+      <p:sp>
+        <p:nvSpPr>
+          <p:cNvPr id="38" name="Shape 36"/>
+          <p:cNvSpPr/>
+          <p:nvPr/>
+        </p:nvSpPr>
+        <p:spPr>
+          <a:xfrm>
+            <a:off x="6675120" y="2240280"/>
+            <a:ext cx="1940845" cy="365760"/>
+          </a:xfrm>
+          <a:prstGeom prst="roundRect">
+            <a:avLst>
+              <a:gd name="adj" fmla="val 50000"/>
+            </a:avLst>
+          </a:prstGeom>
+          <a:solidFill>
+            <a:srgbClr val="3DDC84"/>
+          </a:solidFill>
+          <a:ln/>
+        </p:spPr>
+      </p:sp>
+      <p:sp>
+        <p:nvSpPr>
+          <p:cNvPr id="39" name="Text 37"/>
+          <p:cNvSpPr txBox="1"/>
+          <p:nvPr/>
+        </p:nvSpPr>
+        <p:spPr>
+          <a:xfrm>
+            <a:off x="6675120" y="2240280"/>
+            <a:ext cx="4876495" cy="365760"/>
+          </a:xfrm>
+          <a:prstGeom prst="rect">
+            <a:avLst/>
+          </a:prstGeom>
+          <a:noFill/>
+          <a:ln/>
+        </p:spPr>
+        <p:txBody>
+          <a:bodyPr wrap="square" lIns="0" tIns="0" rIns="0" bIns="0" rtlCol="0" anchor="ctr"/>
+          <a:lstStyle/>
+          <a:p>
+            <a:pPr algn="ctr" indent="0" marL="0">
+              <a:lnSpc>
+                <a:spcPct val="100000"/>
+              </a:lnSpc>
+              <a:buNone/>
+            </a:pPr>
+            <a:r>
+              <a:rPr lang="en-US" sz="1050" dirty="0">
+                <a:solidFill>
+                  <a:srgbClr val="E6E9EF"/>
+                </a:solidFill>
+                <a:latin typeface="Malgun Gothic" pitchFamily="34" charset="0"/>
+                <a:ea typeface="Malgun Gothic" pitchFamily="34" charset="-122"/>
+                <a:cs typeface="Malgun Gothic" pitchFamily="34" charset="-120"/>
+              </a:rPr>
+              <a:t>/  39.8%</a:t>
+            </a:r>
+            <a:endParaRPr lang="en-US" sz="1050" dirty="0"/>
+          </a:p>
+        </p:txBody>
+      </p:sp>
+      <p:sp>
+        <p:nvSpPr>
+          <p:cNvPr id="40" name="Shape 38"/>
+          <p:cNvSpPr/>
+          <p:nvPr/>
+        </p:nvSpPr>
+        <p:spPr>
+          <a:xfrm>
+            <a:off x="6675120" y="2743200"/>
+            <a:ext cx="4876495" cy="365760"/>
+          </a:xfrm>
+          <a:prstGeom prst="roundRect">
+            <a:avLst>
+              <a:gd name="adj" fmla="val 50000"/>
+            </a:avLst>
+          </a:prstGeom>
+          <a:solidFill>
+            <a:srgbClr val="232732"/>
+          </a:solidFill>
+          <a:ln/>
+        </p:spPr>
+      </p:sp>
+      <p:sp>
+        <p:nvSpPr>
+          <p:cNvPr id="41" name="Shape 39"/>
+          <p:cNvSpPr/>
+          <p:nvPr/>
+        </p:nvSpPr>
+        <p:spPr>
+          <a:xfrm>
+            <a:off x="6675120" y="2743200"/>
+            <a:ext cx="3813419" cy="365760"/>
+          </a:xfrm>
+          <a:prstGeom prst="roundRect">
+            <a:avLst>
+              <a:gd name="adj" fmla="val 50000"/>
+            </a:avLst>
+          </a:prstGeom>
+          <a:solidFill>
+            <a:srgbClr val="FFC93C"/>
+          </a:solidFill>
+          <a:ln/>
+        </p:spPr>
+      </p:sp>
+      <p:sp>
+        <p:nvSpPr>
+          <p:cNvPr id="42" name="Text 40"/>
+          <p:cNvSpPr txBox="1"/>
+          <p:nvPr/>
+        </p:nvSpPr>
+        <p:spPr>
+          <a:xfrm>
+            <a:off x="6675120" y="2743200"/>
+            <a:ext cx="4876495" cy="365760"/>
+          </a:xfrm>
+          <a:prstGeom prst="rect">
+            <a:avLst/>
+          </a:prstGeom>
+          <a:noFill/>
+          <a:ln/>
+        </p:spPr>
+        <p:txBody>
+          <a:bodyPr wrap="square" lIns="0" tIns="0" rIns="0" bIns="0" rtlCol="0" anchor="ctr"/>
+          <a:lstStyle/>
+          <a:p>
+            <a:pPr algn="ctr" indent="0" marL="0">
+              <a:lnSpc>
+                <a:spcPct val="100000"/>
+              </a:lnSpc>
+              <a:buNone/>
+            </a:pPr>
+            <a:r>
+              <a:rPr lang="en-US" sz="1050" dirty="0">
+                <a:solidFill>
+                  <a:srgbClr val="E6E9EF"/>
+                </a:solidFill>
+                <a:latin typeface="Malgun Gothic" pitchFamily="34" charset="0"/>
+                <a:ea typeface="Malgun Gothic" pitchFamily="34" charset="-122"/>
+                <a:cs typeface="Malgun Gothic" pitchFamily="34" charset="-120"/>
+              </a:rPr>
+              <a:t>/data  78.2%</a:t>
+            </a:r>
+            <a:endParaRPr lang="en-US" sz="1050" dirty="0"/>
+          </a:p>
+        </p:txBody>
+      </p:sp>
+      <p:sp>
+        <p:nvSpPr>
+          <p:cNvPr id="43" name="Text 41"/>
+          <p:cNvSpPr txBox="1"/>
+          <p:nvPr/>
+        </p:nvSpPr>
+        <p:spPr>
+          <a:xfrm>
+            <a:off x="6675120" y="3291840"/>
+            <a:ext cx="4876495" cy="310896"/>
+          </a:xfrm>
+          <a:prstGeom prst="rect">
+            <a:avLst/>
+          </a:prstGeom>
+          <a:noFill/>
+          <a:ln/>
+        </p:spPr>
+        <p:txBody>
+          <a:bodyPr wrap="square" lIns="0" tIns="0" rIns="0" bIns="0" rtlCol="0" anchor="ctr"/>
+          <a:lstStyle/>
+          <a:p>
+            <a:pPr algn="l" indent="0" marL="0">
+              <a:lnSpc>
+                <a:spcPct val="100000"/>
+              </a:lnSpc>
+              <a:buNone/>
+            </a:pPr>
+            <a:r>
+              <a:rPr lang="en-US" sz="1100" dirty="0">
+                <a:solidFill>
+                  <a:srgbClr val="E6E9EF"/>
+                </a:solidFill>
+                <a:latin typeface="Malgun Gothic" pitchFamily="34" charset="0"/>
+                <a:ea typeface="Malgun Gothic" pitchFamily="34" charset="-122"/>
+                <a:cs typeface="Malgun Gothic" pitchFamily="34" charset="-120"/>
+              </a:rPr>
+              <a:t>nginx        cpu 12.9%   mem 1.2%</a:t>
+            </a:r>
+            <a:endParaRPr lang="en-US" sz="1100" dirty="0"/>
+          </a:p>
+        </p:txBody>
+      </p:sp>
+      <p:sp>
+        <p:nvSpPr>
+          <p:cNvPr id="44" name="Text 42"/>
+          <p:cNvSpPr txBox="1"/>
+          <p:nvPr/>
+        </p:nvSpPr>
+        <p:spPr>
+          <a:xfrm>
+            <a:off x="6675120" y="3639312"/>
+            <a:ext cx="4876495" cy="310896"/>
+          </a:xfrm>
+          <a:prstGeom prst="rect">
+            <a:avLst/>
+          </a:prstGeom>
+          <a:noFill/>
+          <a:ln/>
+        </p:spPr>
+        <p:txBody>
+          <a:bodyPr wrap="square" lIns="0" tIns="0" rIns="0" bIns="0" rtlCol="0" anchor="ctr"/>
+          <a:lstStyle/>
+          <a:p>
+            <a:pPr algn="l" indent="0" marL="0">
+              <a:lnSpc>
+                <a:spcPct val="100000"/>
+              </a:lnSpc>
+              <a:buNone/>
+            </a:pPr>
+            <a:r>
+              <a:rPr lang="en-US" sz="1100" dirty="0">
+                <a:solidFill>
+                  <a:srgbClr val="E6E9EF"/>
+                </a:solidFill>
+                <a:latin typeface="Malgun Gothic" pitchFamily="34" charset="0"/>
+                <a:ea typeface="Malgun Gothic" pitchFamily="34" charset="-122"/>
+                <a:cs typeface="Malgun Gothic" pitchFamily="34" charset="-120"/>
+              </a:rPr>
+              <a:t>postgres   cpu 8.1%    mem 8.4%</a:t>
+            </a:r>
+            <a:endParaRPr lang="en-US" sz="1100" dirty="0"/>
+          </a:p>
+        </p:txBody>
+      </p:sp>
+      <p:sp>
+        <p:nvSpPr>
+          <p:cNvPr id="45" name="Text 43"/>
+          <p:cNvSpPr txBox="1"/>
+          <p:nvPr/>
+        </p:nvSpPr>
+        <p:spPr>
+          <a:xfrm>
+            <a:off x="6675120" y="3986784"/>
+            <a:ext cx="4876495" cy="310896"/>
+          </a:xfrm>
+          <a:prstGeom prst="rect">
+            <a:avLst/>
+          </a:prstGeom>
+          <a:noFill/>
+          <a:ln/>
+        </p:spPr>
+        <p:txBody>
+          <a:bodyPr wrap="square" lIns="0" tIns="0" rIns="0" bIns="0" rtlCol="0" anchor="ctr"/>
+          <a:lstStyle/>
+          <a:p>
+            <a:pPr algn="l" indent="0" marL="0">
+              <a:lnSpc>
+                <a:spcPct val="100000"/>
+              </a:lnSpc>
+              <a:buNone/>
+            </a:pPr>
+            <a:r>
+              <a:rPr lang="en-US" sz="1100" dirty="0">
+                <a:solidFill>
+                  <a:srgbClr val="E6E9EF"/>
+                </a:solidFill>
+                <a:latin typeface="Malgun Gothic" pitchFamily="34" charset="0"/>
+                <a:ea typeface="Malgun Gothic" pitchFamily="34" charset="-122"/>
+                <a:cs typeface="Malgun Gothic" pitchFamily="34" charset="-120"/>
+              </a:rPr>
+              <a:t>dockerd    cpu 5.2%    mem 2.1%</a:t>
+            </a:r>
+            <a:endParaRPr lang="en-US" sz="1100" dirty="0"/>
+          </a:p>
+        </p:txBody>
+      </p:sp>
+      <p:sp>
+        <p:nvSpPr>
+          <p:cNvPr id="46" name="Text 44"/>
+          <p:cNvSpPr txBox="1"/>
+          <p:nvPr/>
+        </p:nvSpPr>
+        <p:spPr>
+          <a:xfrm>
+            <a:off x="6675120" y="4480560"/>
+            <a:ext cx="4876495" cy="274320"/>
+          </a:xfrm>
+          <a:prstGeom prst="rect">
+            <a:avLst/>
+          </a:prstGeom>
+          <a:noFill/>
+          <a:ln/>
+        </p:spPr>
+        <p:txBody>
+          <a:bodyPr wrap="square" lIns="0" tIns="0" rIns="0" bIns="0" rtlCol="0" anchor="t"/>
+          <a:lstStyle/>
+          <a:p>
+            <a:pPr algn="l" indent="0" marL="0">
+              <a:lnSpc>
+                <a:spcPct val="100000"/>
+              </a:lnSpc>
+              <a:buNone/>
+            </a:pPr>
+            <a:r>
+              <a:rPr lang="en-US" sz="1050" dirty="0">
+                <a:solidFill>
+                  <a:srgbClr val="8A9099"/>
+                </a:solidFill>
+                <a:latin typeface="Malgun Gothic" pitchFamily="34" charset="0"/>
+                <a:ea typeface="Malgun Gothic" pitchFamily="34" charset="-122"/>
+                <a:cs typeface="Malgun Gothic" pitchFamily="34" charset="-120"/>
+              </a:rPr>
+              <a:t>수치는 tabular, 단위는 자동 포맷 (%, B/s).</a:t>
+            </a:r>
+            <a:endParaRPr lang="en-US" sz="1050" dirty="0"/>
+          </a:p>
+        </p:txBody>
+      </p:sp>
+      <p:sp>
+        <p:nvSpPr>
+          <p:cNvPr id="47" name="Shape 45"/>
+          <p:cNvSpPr/>
+          <p:nvPr/>
+        </p:nvSpPr>
+        <p:spPr>
+          <a:xfrm>
+            <a:off x="640080" y="6382512"/>
+            <a:ext cx="10911535" cy="0"/>
+          </a:xfrm>
+          <a:prstGeom prst="line">
+            <a:avLst/>
+          </a:prstGeom>
+          <a:noFill/>
+          <a:ln w="12700">
+            <a:solidFill>
+              <a:srgbClr val="2A2E38"/>
+            </a:solidFill>
+            <a:prstDash val="solid"/>
+          </a:ln>
+        </p:spPr>
+      </p:sp>
+      <p:sp>
+        <p:nvSpPr>
+          <p:cNvPr id="48" name="Text 46"/>
+          <p:cNvSpPr txBox="1"/>
+          <p:nvPr/>
+        </p:nvSpPr>
+        <p:spPr>
+          <a:xfrm>
+            <a:off x="640080" y="6455664"/>
+            <a:ext cx="5486400" cy="274320"/>
+          </a:xfrm>
+          <a:prstGeom prst="rect">
+            <a:avLst/>
+          </a:prstGeom>
+          <a:noFill/>
+          <a:ln/>
+        </p:spPr>
+        <p:txBody>
+          <a:bodyPr wrap="square" lIns="0" tIns="0" rIns="0" bIns="0" rtlCol="0" anchor="t"/>
+          <a:lstStyle/>
+          <a:p>
+            <a:pPr algn="l" indent="0" marL="0">
+              <a:lnSpc>
+                <a:spcPct val="100000"/>
+              </a:lnSpc>
+              <a:buNone/>
+            </a:pPr>
+            <a:r>
+              <a:rPr lang="en-US" sz="1000" dirty="0">
+                <a:solidFill>
+                  <a:srgbClr val="8A9099"/>
+                </a:solidFill>
+                <a:latin typeface="Malgun Gothic" pitchFamily="34" charset="0"/>
+                <a:ea typeface="Malgun Gothic" pitchFamily="34" charset="-122"/>
+                <a:cs typeface="Malgun Gothic" pitchFamily="34" charset="-120"/>
+              </a:rPr>
+              <a:t>Servex — 디자인 상세</a:t>
+            </a:r>
+            <a:endParaRPr lang="en-US" sz="1000" dirty="0"/>
+          </a:p>
+        </p:txBody>
+      </p:sp>
+      <p:sp>
+        <p:nvSpPr>
+          <p:cNvPr id="49" name="Text 47"/>
+          <p:cNvSpPr txBox="1"/>
+          <p:nvPr/>
+        </p:nvSpPr>
+        <p:spPr>
+          <a:xfrm>
+            <a:off x="9722815" y="6455664"/>
+            <a:ext cx="1828800" cy="274320"/>
+          </a:xfrm>
+          <a:prstGeom prst="rect">
+            <a:avLst/>
+          </a:prstGeom>
+          <a:noFill/>
+          <a:ln/>
+        </p:spPr>
+        <p:txBody>
+          <a:bodyPr wrap="square" lIns="0" tIns="0" rIns="0" bIns="0" rtlCol="0" anchor="t"/>
+          <a:lstStyle/>
+          <a:p>
+            <a:pPr algn="r" indent="0" marL="0">
+              <a:lnSpc>
+                <a:spcPct val="100000"/>
+              </a:lnSpc>
+              <a:buNone/>
+            </a:pPr>
+            <a:r>
+              <a:rPr lang="en-US" sz="1000" dirty="0">
+                <a:solidFill>
+                  <a:srgbClr val="8A9099"/>
+                </a:solidFill>
+                <a:latin typeface="Malgun Gothic" pitchFamily="34" charset="0"/>
+                <a:ea typeface="Malgun Gothic" pitchFamily="34" charset="-122"/>
+                <a:cs typeface="Malgun Gothic" pitchFamily="34" charset="-120"/>
+              </a:rPr>
+              <a:t>11 / 11</a:t>
+            </a:r>
+            <a:endParaRPr lang="en-US" sz="1000" dirty="0"/>
+          </a:p>
+        </p:txBody>
+      </p:sp>
+    </p:spTree>
+  </p:cSld>
+  <p:clrMapOvr>
+    <a:masterClrMapping/>
+  </p:clrMapOvr>
+</p:sld>
+</file>
+
 <file path=ppt/theme/theme1.xml><?xml version="1.0" encoding="utf-8"?>
 <a:theme xmlns:a="http://schemas.openxmlformats.org/drawingml/2006/main" name="Office Theme">
   <a:themeElements>
